--- a/resources/Thermal_loop_data/Thermal Loop Data Graphs.pptx
+++ b/resources/Thermal_loop_data/Thermal Loop Data Graphs.pptx
@@ -6,12 +6,28 @@
   </p:sldMasterIdLst>
   <p:sldIdLst>
     <p:sldId id="256" r:id="rId2"/>
-    <p:sldId id="257" r:id="rId3"/>
-    <p:sldId id="260" r:id="rId4"/>
-    <p:sldId id="259" r:id="rId5"/>
-    <p:sldId id="261" r:id="rId6"/>
-    <p:sldId id="258" r:id="rId7"/>
-    <p:sldId id="262" r:id="rId8"/>
+    <p:sldId id="263" r:id="rId3"/>
+    <p:sldId id="276" r:id="rId4"/>
+    <p:sldId id="257" r:id="rId5"/>
+    <p:sldId id="260" r:id="rId6"/>
+    <p:sldId id="259" r:id="rId7"/>
+    <p:sldId id="261" r:id="rId8"/>
+    <p:sldId id="258" r:id="rId9"/>
+    <p:sldId id="262" r:id="rId10"/>
+    <p:sldId id="277" r:id="rId11"/>
+    <p:sldId id="264" r:id="rId12"/>
+    <p:sldId id="267" r:id="rId13"/>
+    <p:sldId id="265" r:id="rId14"/>
+    <p:sldId id="268" r:id="rId15"/>
+    <p:sldId id="266" r:id="rId16"/>
+    <p:sldId id="269" r:id="rId17"/>
+    <p:sldId id="278" r:id="rId18"/>
+    <p:sldId id="270" r:id="rId19"/>
+    <p:sldId id="271" r:id="rId20"/>
+    <p:sldId id="272" r:id="rId21"/>
+    <p:sldId id="274" r:id="rId22"/>
+    <p:sldId id="273" r:id="rId23"/>
+    <p:sldId id="275" r:id="rId24"/>
   </p:sldIdLst>
   <p:sldSz cx="12192000" cy="6858000"/>
   <p:notesSz cx="6858000" cy="9144000"/>
@@ -121,8 +137,8 @@
 <file path=ppt/revisionInfo.xml><?xml version="1.0" encoding="utf-8"?>
 <p1510:revInfo xmlns:a="http://schemas.openxmlformats.org/drawingml/2006/main" xmlns:r="http://schemas.openxmlformats.org/officeDocument/2006/relationships" xmlns:p1510="http://schemas.microsoft.com/office/powerpoint/2015/10/main">
   <p1510:revLst>
-    <p1510:client id="{3D7E9EA9-2484-D84D-929C-E4B2F03CBF6D}" v="94" dt="2025-07-17T20:40:34.003"/>
-    <p1510:client id="{E9E93091-E162-9E7C-84C2-A505E6E5249B}" v="334" dt="2025-07-17T20:34:22.949"/>
+    <p1510:client id="{1A9F580B-8D25-E87E-9F25-5CFA58A26164}" v="872" dt="2025-07-22T19:02:02.483"/>
+    <p1510:client id="{3D7E9EA9-2484-D84D-929C-E4B2F03CBF6D}" v="15" dt="2025-07-22T19:14:33.991"/>
   </p1510:revLst>
 </p1510:revInfo>
 </file>
@@ -256,7 +272,7 @@
           <a:p>
             <a:fld id="{846CE7D5-CF57-46EF-B807-FDD0502418D4}" type="datetimeFigureOut">
               <a:rPr lang="en-US" smtClean="0"/>
-              <a:t>7/17/2025</a:t>
+              <a:t>7/22/2025</a:t>
             </a:fld>
             <a:endParaRPr lang="en-US"/>
           </a:p>
@@ -424,7 +440,7 @@
           <a:p>
             <a:fld id="{846CE7D5-CF57-46EF-B807-FDD0502418D4}" type="datetimeFigureOut">
               <a:rPr lang="en-US" smtClean="0"/>
-              <a:t>7/17/2025</a:t>
+              <a:t>7/22/2025</a:t>
             </a:fld>
             <a:endParaRPr lang="en-US"/>
           </a:p>
@@ -602,7 +618,7 @@
           <a:p>
             <a:fld id="{846CE7D5-CF57-46EF-B807-FDD0502418D4}" type="datetimeFigureOut">
               <a:rPr lang="en-US" smtClean="0"/>
-              <a:t>7/17/2025</a:t>
+              <a:t>7/22/2025</a:t>
             </a:fld>
             <a:endParaRPr lang="en-US"/>
           </a:p>
@@ -770,7 +786,7 @@
           <a:p>
             <a:fld id="{846CE7D5-CF57-46EF-B807-FDD0502418D4}" type="datetimeFigureOut">
               <a:rPr lang="en-US" smtClean="0"/>
-              <a:t>7/17/2025</a:t>
+              <a:t>7/22/2025</a:t>
             </a:fld>
             <a:endParaRPr lang="en-US"/>
           </a:p>
@@ -1015,7 +1031,7 @@
           <a:p>
             <a:fld id="{846CE7D5-CF57-46EF-B807-FDD0502418D4}" type="datetimeFigureOut">
               <a:rPr lang="en-US" smtClean="0"/>
-              <a:t>7/17/2025</a:t>
+              <a:t>7/22/2025</a:t>
             </a:fld>
             <a:endParaRPr lang="en-US"/>
           </a:p>
@@ -1244,7 +1260,7 @@
           <a:p>
             <a:fld id="{846CE7D5-CF57-46EF-B807-FDD0502418D4}" type="datetimeFigureOut">
               <a:rPr lang="en-US" smtClean="0"/>
-              <a:t>7/17/2025</a:t>
+              <a:t>7/22/2025</a:t>
             </a:fld>
             <a:endParaRPr lang="en-US"/>
           </a:p>
@@ -1608,7 +1624,7 @@
           <a:p>
             <a:fld id="{846CE7D5-CF57-46EF-B807-FDD0502418D4}" type="datetimeFigureOut">
               <a:rPr lang="en-US" smtClean="0"/>
-              <a:t>7/17/2025</a:t>
+              <a:t>7/22/2025</a:t>
             </a:fld>
             <a:endParaRPr lang="en-US"/>
           </a:p>
@@ -1725,7 +1741,7 @@
           <a:p>
             <a:fld id="{846CE7D5-CF57-46EF-B807-FDD0502418D4}" type="datetimeFigureOut">
               <a:rPr lang="en-US" smtClean="0"/>
-              <a:t>7/17/2025</a:t>
+              <a:t>7/22/2025</a:t>
             </a:fld>
             <a:endParaRPr lang="en-US"/>
           </a:p>
@@ -1820,7 +1836,7 @@
           <a:p>
             <a:fld id="{846CE7D5-CF57-46EF-B807-FDD0502418D4}" type="datetimeFigureOut">
               <a:rPr lang="en-US" smtClean="0"/>
-              <a:t>7/17/2025</a:t>
+              <a:t>7/22/2025</a:t>
             </a:fld>
             <a:endParaRPr lang="en-US"/>
           </a:p>
@@ -2095,7 +2111,7 @@
           <a:p>
             <a:fld id="{846CE7D5-CF57-46EF-B807-FDD0502418D4}" type="datetimeFigureOut">
               <a:rPr lang="en-US" smtClean="0"/>
-              <a:t>7/17/2025</a:t>
+              <a:t>7/22/2025</a:t>
             </a:fld>
             <a:endParaRPr lang="en-US"/>
           </a:p>
@@ -2350,7 +2366,7 @@
           <a:p>
             <a:fld id="{846CE7D5-CF57-46EF-B807-FDD0502418D4}" type="datetimeFigureOut">
               <a:rPr lang="en-US" smtClean="0"/>
-              <a:t>7/17/2025</a:t>
+              <a:t>7/22/2025</a:t>
             </a:fld>
             <a:endParaRPr lang="en-US"/>
           </a:p>
@@ -2561,7 +2577,7 @@
           <a:p>
             <a:fld id="{846CE7D5-CF57-46EF-B807-FDD0502418D4}" type="datetimeFigureOut">
               <a:rPr lang="en-US" smtClean="0"/>
-              <a:t>7/17/2025</a:t>
+              <a:t>7/22/2025</a:t>
             </a:fld>
             <a:endParaRPr lang="en-US"/>
           </a:p>
@@ -3022,6 +3038,878 @@
 </p:sld>
 </file>
 
+<file path=ppt/slides/slide10.xml><?xml version="1.0" encoding="utf-8"?>
+<p:sld xmlns:a="http://schemas.openxmlformats.org/drawingml/2006/main" xmlns:r="http://schemas.openxmlformats.org/officeDocument/2006/relationships" xmlns:p="http://schemas.openxmlformats.org/presentationml/2006/main">
+  <p:cSld>
+    <p:spTree>
+      <p:nvGrpSpPr>
+        <p:cNvPr id="1" name="">
+          <a:extLst>
+            <a:ext uri="{FF2B5EF4-FFF2-40B4-BE49-F238E27FC236}">
+              <a16:creationId xmlns:a16="http://schemas.microsoft.com/office/drawing/2014/main" id="{D8AC270A-1C18-8584-3CDC-5197BF8B00A9}"/>
+            </a:ext>
+          </a:extLst>
+        </p:cNvPr>
+        <p:cNvGrpSpPr/>
+        <p:nvPr/>
+      </p:nvGrpSpPr>
+      <p:grpSpPr>
+        <a:xfrm>
+          <a:off x="0" y="0"/>
+          <a:ext cx="0" cy="0"/>
+          <a:chOff x="0" y="0"/>
+          <a:chExt cx="0" cy="0"/>
+        </a:xfrm>
+      </p:grpSpPr>
+      <p:sp>
+        <p:nvSpPr>
+          <p:cNvPr id="2" name="Title 1">
+            <a:extLst>
+              <a:ext uri="{FF2B5EF4-FFF2-40B4-BE49-F238E27FC236}">
+                <a16:creationId xmlns:a16="http://schemas.microsoft.com/office/drawing/2014/main" id="{AFD2806E-E06C-3D5D-B7CC-3B0241CB6B8D}"/>
+              </a:ext>
+            </a:extLst>
+          </p:cNvPr>
+          <p:cNvSpPr>
+            <a:spLocks noGrp="1"/>
+          </p:cNvSpPr>
+          <p:nvPr>
+            <p:ph type="title"/>
+          </p:nvPr>
+        </p:nvSpPr>
+        <p:spPr/>
+        <p:txBody>
+          <a:bodyPr/>
+          <a:lstStyle/>
+          <a:p>
+            <a:r>
+              <a:rPr lang="en-US"/>
+              <a:t>Pump Heat Up Data (slides 11-16)</a:t>
+            </a:r>
+          </a:p>
+        </p:txBody>
+      </p:sp>
+      <p:sp>
+        <p:nvSpPr>
+          <p:cNvPr id="3" name="Content Placeholder 2">
+            <a:extLst>
+              <a:ext uri="{FF2B5EF4-FFF2-40B4-BE49-F238E27FC236}">
+                <a16:creationId xmlns:a16="http://schemas.microsoft.com/office/drawing/2014/main" id="{2C99DD7A-F29D-D7BE-6D84-E0EF6E925CB5}"/>
+              </a:ext>
+            </a:extLst>
+          </p:cNvPr>
+          <p:cNvSpPr>
+            <a:spLocks noGrp="1"/>
+          </p:cNvSpPr>
+          <p:nvPr>
+            <p:ph idx="1"/>
+          </p:nvPr>
+        </p:nvSpPr>
+        <p:spPr/>
+        <p:txBody>
+          <a:bodyPr vert="horz" lIns="91440" tIns="45720" rIns="91440" bIns="45720" rtlCol="0" anchor="t">
+            <a:normAutofit/>
+          </a:bodyPr>
+          <a:lstStyle/>
+          <a:p>
+            <a:r>
+              <a:rPr lang="en-US"/>
+              <a:t>Middle valve closed</a:t>
+            </a:r>
+          </a:p>
+          <a:p>
+            <a:r>
+              <a:rPr lang="en-US"/>
+              <a:t>Upper valve open</a:t>
+            </a:r>
+          </a:p>
+          <a:p>
+            <a:r>
+              <a:rPr lang="en-US"/>
+              <a:t>Heat exchanger 0.5 gal/min at 6 hours</a:t>
+            </a:r>
+          </a:p>
+        </p:txBody>
+      </p:sp>
+    </p:spTree>
+    <p:extLst>
+      <p:ext uri="{BB962C8B-B14F-4D97-AF65-F5344CB8AC3E}">
+        <p14:creationId xmlns:p14="http://schemas.microsoft.com/office/powerpoint/2010/main" val="388464789"/>
+      </p:ext>
+    </p:extLst>
+  </p:cSld>
+  <p:clrMapOvr>
+    <a:masterClrMapping/>
+  </p:clrMapOvr>
+</p:sld>
+</file>
+
+<file path=ppt/slides/slide11.xml><?xml version="1.0" encoding="utf-8"?>
+<p:sld xmlns:a="http://schemas.openxmlformats.org/drawingml/2006/main" xmlns:r="http://schemas.openxmlformats.org/officeDocument/2006/relationships" xmlns:p="http://schemas.openxmlformats.org/presentationml/2006/main">
+  <p:cSld>
+    <p:spTree>
+      <p:nvGrpSpPr>
+        <p:cNvPr id="1" name=""/>
+        <p:cNvGrpSpPr/>
+        <p:nvPr/>
+      </p:nvGrpSpPr>
+      <p:grpSpPr>
+        <a:xfrm>
+          <a:off x="0" y="0"/>
+          <a:ext cx="0" cy="0"/>
+          <a:chOff x="0" y="0"/>
+          <a:chExt cx="0" cy="0"/>
+        </a:xfrm>
+      </p:grpSpPr>
+      <p:sp>
+        <p:nvSpPr>
+          <p:cNvPr id="2" name="Title 1">
+            <a:extLst>
+              <a:ext uri="{FF2B5EF4-FFF2-40B4-BE49-F238E27FC236}">
+                <a16:creationId xmlns:a16="http://schemas.microsoft.com/office/drawing/2014/main" id="{BF21C3F9-0172-AF2A-9893-9EF3F3CFE8BF}"/>
+              </a:ext>
+            </a:extLst>
+          </p:cNvPr>
+          <p:cNvSpPr>
+            <a:spLocks noGrp="1"/>
+          </p:cNvSpPr>
+          <p:nvPr>
+            <p:ph type="ctrTitle"/>
+          </p:nvPr>
+        </p:nvSpPr>
+        <p:spPr/>
+        <p:txBody>
+          <a:bodyPr/>
+          <a:lstStyle/>
+          <a:p>
+            <a:r>
+              <a:rPr lang="en-US"/>
+              <a:t>6-hour pump heat up</a:t>
+            </a:r>
+          </a:p>
+        </p:txBody>
+      </p:sp>
+      <p:sp>
+        <p:nvSpPr>
+          <p:cNvPr id="3" name="Subtitle 2">
+            <a:extLst>
+              <a:ext uri="{FF2B5EF4-FFF2-40B4-BE49-F238E27FC236}">
+                <a16:creationId xmlns:a16="http://schemas.microsoft.com/office/drawing/2014/main" id="{4EF39B82-2759-3936-F868-278CA0DCD0D4}"/>
+              </a:ext>
+            </a:extLst>
+          </p:cNvPr>
+          <p:cNvSpPr>
+            <a:spLocks noGrp="1"/>
+          </p:cNvSpPr>
+          <p:nvPr>
+            <p:ph type="subTitle" idx="1"/>
+          </p:nvPr>
+        </p:nvSpPr>
+        <p:spPr/>
+        <p:txBody>
+          <a:bodyPr vert="horz" lIns="91440" tIns="45720" rIns="91440" bIns="45720" rtlCol="0" anchor="t">
+            <a:normAutofit/>
+          </a:bodyPr>
+          <a:lstStyle/>
+          <a:p>
+            <a:r>
+              <a:rPr lang="en-US" dirty="0">
+                <a:hlinkClick r:id="rId2"/>
+              </a:rPr>
+              <a:t>PDF Graph Download</a:t>
+            </a:r>
+            <a:endParaRPr lang="en-US" dirty="0"/>
+          </a:p>
+        </p:txBody>
+      </p:sp>
+    </p:spTree>
+    <p:extLst>
+      <p:ext uri="{BB962C8B-B14F-4D97-AF65-F5344CB8AC3E}">
+        <p14:creationId xmlns:p14="http://schemas.microsoft.com/office/powerpoint/2010/main" val="2735073065"/>
+      </p:ext>
+    </p:extLst>
+  </p:cSld>
+  <p:clrMapOvr>
+    <a:masterClrMapping/>
+  </p:clrMapOvr>
+</p:sld>
+</file>
+
+<file path=ppt/slides/slide12.xml><?xml version="1.0" encoding="utf-8"?>
+<p:sld xmlns:a="http://schemas.openxmlformats.org/drawingml/2006/main" xmlns:r="http://schemas.openxmlformats.org/officeDocument/2006/relationships" xmlns:p="http://schemas.openxmlformats.org/presentationml/2006/main">
+  <p:cSld>
+    <p:spTree>
+      <p:nvGrpSpPr>
+        <p:cNvPr id="1" name=""/>
+        <p:cNvGrpSpPr/>
+        <p:nvPr/>
+      </p:nvGrpSpPr>
+      <p:grpSpPr>
+        <a:xfrm>
+          <a:off x="0" y="0"/>
+          <a:ext cx="0" cy="0"/>
+          <a:chOff x="0" y="0"/>
+          <a:chExt cx="0" cy="0"/>
+        </a:xfrm>
+      </p:grpSpPr>
+      <p:pic>
+        <p:nvPicPr>
+          <p:cNvPr id="2" name="Picture 1">
+            <a:extLst>
+              <a:ext uri="{FF2B5EF4-FFF2-40B4-BE49-F238E27FC236}">
+                <a16:creationId xmlns:a16="http://schemas.microsoft.com/office/drawing/2014/main" id="{20F681E8-3B12-7D14-7737-3AC1992151DB}"/>
+              </a:ext>
+            </a:extLst>
+          </p:cNvPr>
+          <p:cNvPicPr>
+            <a:picLocks noChangeAspect="1"/>
+          </p:cNvPicPr>
+          <p:nvPr/>
+        </p:nvPicPr>
+        <p:blipFill>
+          <a:blip r:embed="rId2"/>
+          <a:stretch>
+            <a:fillRect/>
+          </a:stretch>
+        </p:blipFill>
+        <p:spPr>
+          <a:xfrm>
+            <a:off x="886639" y="0"/>
+            <a:ext cx="10418721" cy="6858000"/>
+          </a:xfrm>
+          <a:prstGeom prst="rect">
+            <a:avLst/>
+          </a:prstGeom>
+        </p:spPr>
+      </p:pic>
+    </p:spTree>
+    <p:extLst>
+      <p:ext uri="{BB962C8B-B14F-4D97-AF65-F5344CB8AC3E}">
+        <p14:creationId xmlns:p14="http://schemas.microsoft.com/office/powerpoint/2010/main" val="3075340539"/>
+      </p:ext>
+    </p:extLst>
+  </p:cSld>
+  <p:clrMapOvr>
+    <a:masterClrMapping/>
+  </p:clrMapOvr>
+</p:sld>
+</file>
+
+<file path=ppt/slides/slide13.xml><?xml version="1.0" encoding="utf-8"?>
+<p:sld xmlns:a="http://schemas.openxmlformats.org/drawingml/2006/main" xmlns:r="http://schemas.openxmlformats.org/officeDocument/2006/relationships" xmlns:p="http://schemas.openxmlformats.org/presentationml/2006/main">
+  <p:cSld>
+    <p:spTree>
+      <p:nvGrpSpPr>
+        <p:cNvPr id="1" name="">
+          <a:extLst>
+            <a:ext uri="{FF2B5EF4-FFF2-40B4-BE49-F238E27FC236}">
+              <a16:creationId xmlns:a16="http://schemas.microsoft.com/office/drawing/2014/main" id="{C56FAF4A-3923-8D59-E148-2251A2FBAA0F}"/>
+            </a:ext>
+          </a:extLst>
+        </p:cNvPr>
+        <p:cNvGrpSpPr/>
+        <p:nvPr/>
+      </p:nvGrpSpPr>
+      <p:grpSpPr>
+        <a:xfrm>
+          <a:off x="0" y="0"/>
+          <a:ext cx="0" cy="0"/>
+          <a:chOff x="0" y="0"/>
+          <a:chExt cx="0" cy="0"/>
+        </a:xfrm>
+      </p:grpSpPr>
+      <p:sp>
+        <p:nvSpPr>
+          <p:cNvPr id="2" name="Title 1">
+            <a:extLst>
+              <a:ext uri="{FF2B5EF4-FFF2-40B4-BE49-F238E27FC236}">
+                <a16:creationId xmlns:a16="http://schemas.microsoft.com/office/drawing/2014/main" id="{2FD9C8E2-7F03-AD75-EA12-2B8F628CA5CB}"/>
+              </a:ext>
+            </a:extLst>
+          </p:cNvPr>
+          <p:cNvSpPr>
+            <a:spLocks noGrp="1"/>
+          </p:cNvSpPr>
+          <p:nvPr>
+            <p:ph type="ctrTitle"/>
+          </p:nvPr>
+        </p:nvSpPr>
+        <p:spPr/>
+        <p:txBody>
+          <a:bodyPr>
+            <a:normAutofit/>
+          </a:bodyPr>
+          <a:lstStyle/>
+          <a:p>
+            <a:r>
+              <a:rPr lang="en-US" dirty="0"/>
+              <a:t>0.5 gal/min Heat </a:t>
+            </a:r>
+            <a:r>
+              <a:rPr lang="en-US" dirty="0" err="1"/>
+              <a:t>Exhanger</a:t>
+            </a:r>
+            <a:endParaRPr lang="en-US" dirty="0"/>
+          </a:p>
+        </p:txBody>
+      </p:sp>
+      <p:sp>
+        <p:nvSpPr>
+          <p:cNvPr id="3" name="Subtitle 2">
+            <a:extLst>
+              <a:ext uri="{FF2B5EF4-FFF2-40B4-BE49-F238E27FC236}">
+                <a16:creationId xmlns:a16="http://schemas.microsoft.com/office/drawing/2014/main" id="{20852917-33A5-5221-720C-974EBFC1DFAD}"/>
+              </a:ext>
+            </a:extLst>
+          </p:cNvPr>
+          <p:cNvSpPr>
+            <a:spLocks noGrp="1"/>
+          </p:cNvSpPr>
+          <p:nvPr>
+            <p:ph type="subTitle" idx="1"/>
+          </p:nvPr>
+        </p:nvSpPr>
+        <p:spPr/>
+        <p:txBody>
+          <a:bodyPr vert="horz" lIns="91440" tIns="45720" rIns="91440" bIns="45720" rtlCol="0" anchor="t">
+            <a:normAutofit/>
+          </a:bodyPr>
+          <a:lstStyle/>
+          <a:p>
+            <a:r>
+              <a:rPr lang="en-US" dirty="0">
+                <a:hlinkClick r:id="rId2"/>
+              </a:rPr>
+              <a:t>PDF Graph Download</a:t>
+            </a:r>
+            <a:endParaRPr lang="en-US" dirty="0"/>
+          </a:p>
+        </p:txBody>
+      </p:sp>
+    </p:spTree>
+    <p:extLst>
+      <p:ext uri="{BB962C8B-B14F-4D97-AF65-F5344CB8AC3E}">
+        <p14:creationId xmlns:p14="http://schemas.microsoft.com/office/powerpoint/2010/main" val="2991374905"/>
+      </p:ext>
+    </p:extLst>
+  </p:cSld>
+  <p:clrMapOvr>
+    <a:masterClrMapping/>
+  </p:clrMapOvr>
+</p:sld>
+</file>
+
+<file path=ppt/slides/slide14.xml><?xml version="1.0" encoding="utf-8"?>
+<p:sld xmlns:a="http://schemas.openxmlformats.org/drawingml/2006/main" xmlns:r="http://schemas.openxmlformats.org/officeDocument/2006/relationships" xmlns:p="http://schemas.openxmlformats.org/presentationml/2006/main">
+  <p:cSld>
+    <p:spTree>
+      <p:nvGrpSpPr>
+        <p:cNvPr id="1" name="">
+          <a:extLst>
+            <a:ext uri="{FF2B5EF4-FFF2-40B4-BE49-F238E27FC236}">
+              <a16:creationId xmlns:a16="http://schemas.microsoft.com/office/drawing/2014/main" id="{64AD8569-D0DD-8128-96BC-FC6388466BB9}"/>
+            </a:ext>
+          </a:extLst>
+        </p:cNvPr>
+        <p:cNvGrpSpPr/>
+        <p:nvPr/>
+      </p:nvGrpSpPr>
+      <p:grpSpPr>
+        <a:xfrm>
+          <a:off x="0" y="0"/>
+          <a:ext cx="0" cy="0"/>
+          <a:chOff x="0" y="0"/>
+          <a:chExt cx="0" cy="0"/>
+        </a:xfrm>
+      </p:grpSpPr>
+      <p:pic>
+        <p:nvPicPr>
+          <p:cNvPr id="2" name="Picture 1">
+            <a:extLst>
+              <a:ext uri="{FF2B5EF4-FFF2-40B4-BE49-F238E27FC236}">
+                <a16:creationId xmlns:a16="http://schemas.microsoft.com/office/drawing/2014/main" id="{8E0582C1-E180-B0E4-D8B8-540538CA86E2}"/>
+              </a:ext>
+            </a:extLst>
+          </p:cNvPr>
+          <p:cNvPicPr>
+            <a:picLocks noChangeAspect="1"/>
+          </p:cNvPicPr>
+          <p:nvPr/>
+        </p:nvPicPr>
+        <p:blipFill>
+          <a:blip r:embed="rId2"/>
+          <a:stretch>
+            <a:fillRect/>
+          </a:stretch>
+        </p:blipFill>
+        <p:spPr>
+          <a:xfrm>
+            <a:off x="886639" y="0"/>
+            <a:ext cx="10418721" cy="6858000"/>
+          </a:xfrm>
+          <a:prstGeom prst="rect">
+            <a:avLst/>
+          </a:prstGeom>
+        </p:spPr>
+      </p:pic>
+    </p:spTree>
+    <p:extLst>
+      <p:ext uri="{BB962C8B-B14F-4D97-AF65-F5344CB8AC3E}">
+        <p14:creationId xmlns:p14="http://schemas.microsoft.com/office/powerpoint/2010/main" val="4265888717"/>
+      </p:ext>
+    </p:extLst>
+  </p:cSld>
+  <p:clrMapOvr>
+    <a:masterClrMapping/>
+  </p:clrMapOvr>
+</p:sld>
+</file>
+
+<file path=ppt/slides/slide15.xml><?xml version="1.0" encoding="utf-8"?>
+<p:sld xmlns:a="http://schemas.openxmlformats.org/drawingml/2006/main" xmlns:r="http://schemas.openxmlformats.org/officeDocument/2006/relationships" xmlns:p="http://schemas.openxmlformats.org/presentationml/2006/main">
+  <p:cSld>
+    <p:spTree>
+      <p:nvGrpSpPr>
+        <p:cNvPr id="1" name="">
+          <a:extLst>
+            <a:ext uri="{FF2B5EF4-FFF2-40B4-BE49-F238E27FC236}">
+              <a16:creationId xmlns:a16="http://schemas.microsoft.com/office/drawing/2014/main" id="{E1E7A550-37D4-F3D4-6E50-0FFF6B5AF6B7}"/>
+            </a:ext>
+          </a:extLst>
+        </p:cNvPr>
+        <p:cNvGrpSpPr/>
+        <p:nvPr/>
+      </p:nvGrpSpPr>
+      <p:grpSpPr>
+        <a:xfrm>
+          <a:off x="0" y="0"/>
+          <a:ext cx="0" cy="0"/>
+          <a:chOff x="0" y="0"/>
+          <a:chExt cx="0" cy="0"/>
+        </a:xfrm>
+      </p:grpSpPr>
+      <p:sp>
+        <p:nvSpPr>
+          <p:cNvPr id="2" name="Title 1">
+            <a:extLst>
+              <a:ext uri="{FF2B5EF4-FFF2-40B4-BE49-F238E27FC236}">
+                <a16:creationId xmlns:a16="http://schemas.microsoft.com/office/drawing/2014/main" id="{CCA549DA-2BFB-C6C3-766E-C662A7FB2F8C}"/>
+              </a:ext>
+            </a:extLst>
+          </p:cNvPr>
+          <p:cNvSpPr>
+            <a:spLocks noGrp="1"/>
+          </p:cNvSpPr>
+          <p:nvPr>
+            <p:ph type="ctrTitle"/>
+          </p:nvPr>
+        </p:nvSpPr>
+        <p:spPr/>
+        <p:txBody>
+          <a:bodyPr>
+            <a:normAutofit fontScale="90000"/>
+          </a:bodyPr>
+          <a:lstStyle/>
+          <a:p>
+            <a:r>
+              <a:rPr lang="en-US"/>
+              <a:t>6-hour pump heat up</a:t>
+            </a:r>
+            <a:br>
+              <a:rPr lang="en-US"/>
+            </a:br>
+            <a:r>
+              <a:rPr lang="en-US"/>
+              <a:t>+</a:t>
+            </a:r>
+            <a:br>
+              <a:rPr lang="en-US"/>
+            </a:br>
+            <a:r>
+              <a:rPr lang="en-US"/>
+              <a:t>0.5gal/min Heat exchanger</a:t>
+            </a:r>
+          </a:p>
+        </p:txBody>
+      </p:sp>
+      <p:sp>
+        <p:nvSpPr>
+          <p:cNvPr id="3" name="Subtitle 2">
+            <a:extLst>
+              <a:ext uri="{FF2B5EF4-FFF2-40B4-BE49-F238E27FC236}">
+                <a16:creationId xmlns:a16="http://schemas.microsoft.com/office/drawing/2014/main" id="{8AD32E18-4C5C-C452-580D-63E8600F6BE3}"/>
+              </a:ext>
+            </a:extLst>
+          </p:cNvPr>
+          <p:cNvSpPr>
+            <a:spLocks noGrp="1"/>
+          </p:cNvSpPr>
+          <p:nvPr>
+            <p:ph type="subTitle" idx="1"/>
+          </p:nvPr>
+        </p:nvSpPr>
+        <p:spPr/>
+        <p:txBody>
+          <a:bodyPr vert="horz" lIns="91440" tIns="45720" rIns="91440" bIns="45720" rtlCol="0" anchor="t">
+            <a:normAutofit/>
+          </a:bodyPr>
+          <a:lstStyle/>
+          <a:p>
+            <a:r>
+              <a:rPr lang="en-US" dirty="0">
+                <a:hlinkClick r:id="rId2"/>
+              </a:rPr>
+              <a:t>PDF Graph Download</a:t>
+            </a:r>
+            <a:endParaRPr lang="en-US" dirty="0"/>
+          </a:p>
+          <a:p>
+            <a:r>
+              <a:rPr lang="en-US" dirty="0">
+                <a:hlinkClick r:id="rId3"/>
+              </a:rPr>
+              <a:t>Raw Data File Download</a:t>
+            </a:r>
+            <a:endParaRPr lang="en-US" dirty="0"/>
+          </a:p>
+        </p:txBody>
+      </p:sp>
+    </p:spTree>
+    <p:extLst>
+      <p:ext uri="{BB962C8B-B14F-4D97-AF65-F5344CB8AC3E}">
+        <p14:creationId xmlns:p14="http://schemas.microsoft.com/office/powerpoint/2010/main" val="3377682008"/>
+      </p:ext>
+    </p:extLst>
+  </p:cSld>
+  <p:clrMapOvr>
+    <a:masterClrMapping/>
+  </p:clrMapOvr>
+</p:sld>
+</file>
+
+<file path=ppt/slides/slide16.xml><?xml version="1.0" encoding="utf-8"?>
+<p:sld xmlns:a="http://schemas.openxmlformats.org/drawingml/2006/main" xmlns:r="http://schemas.openxmlformats.org/officeDocument/2006/relationships" xmlns:p="http://schemas.openxmlformats.org/presentationml/2006/main">
+  <p:cSld>
+    <p:spTree>
+      <p:nvGrpSpPr>
+        <p:cNvPr id="1" name="">
+          <a:extLst>
+            <a:ext uri="{FF2B5EF4-FFF2-40B4-BE49-F238E27FC236}">
+              <a16:creationId xmlns:a16="http://schemas.microsoft.com/office/drawing/2014/main" id="{03950B34-B88E-7AA7-ED8A-A717136C8F03}"/>
+            </a:ext>
+          </a:extLst>
+        </p:cNvPr>
+        <p:cNvGrpSpPr/>
+        <p:nvPr/>
+      </p:nvGrpSpPr>
+      <p:grpSpPr>
+        <a:xfrm>
+          <a:off x="0" y="0"/>
+          <a:ext cx="0" cy="0"/>
+          <a:chOff x="0" y="0"/>
+          <a:chExt cx="0" cy="0"/>
+        </a:xfrm>
+      </p:grpSpPr>
+      <p:pic>
+        <p:nvPicPr>
+          <p:cNvPr id="2" name="Picture 1">
+            <a:extLst>
+              <a:ext uri="{FF2B5EF4-FFF2-40B4-BE49-F238E27FC236}">
+                <a16:creationId xmlns:a16="http://schemas.microsoft.com/office/drawing/2014/main" id="{36509DEB-BEDC-8027-2472-4FC83E16C5E3}"/>
+              </a:ext>
+            </a:extLst>
+          </p:cNvPr>
+          <p:cNvPicPr>
+            <a:picLocks noChangeAspect="1"/>
+          </p:cNvPicPr>
+          <p:nvPr/>
+        </p:nvPicPr>
+        <p:blipFill>
+          <a:blip r:embed="rId2"/>
+          <a:stretch>
+            <a:fillRect/>
+          </a:stretch>
+        </p:blipFill>
+        <p:spPr>
+          <a:xfrm>
+            <a:off x="886639" y="0"/>
+            <a:ext cx="10418721" cy="6858000"/>
+          </a:xfrm>
+          <a:prstGeom prst="rect">
+            <a:avLst/>
+          </a:prstGeom>
+        </p:spPr>
+      </p:pic>
+    </p:spTree>
+    <p:extLst>
+      <p:ext uri="{BB962C8B-B14F-4D97-AF65-F5344CB8AC3E}">
+        <p14:creationId xmlns:p14="http://schemas.microsoft.com/office/powerpoint/2010/main" val="1386898239"/>
+      </p:ext>
+    </p:extLst>
+  </p:cSld>
+  <p:clrMapOvr>
+    <a:masterClrMapping/>
+  </p:clrMapOvr>
+</p:sld>
+</file>
+
+<file path=ppt/slides/slide17.xml><?xml version="1.0" encoding="utf-8"?>
+<p:sld xmlns:a="http://schemas.openxmlformats.org/drawingml/2006/main" xmlns:r="http://schemas.openxmlformats.org/officeDocument/2006/relationships" xmlns:p="http://schemas.openxmlformats.org/presentationml/2006/main">
+  <p:cSld>
+    <p:spTree>
+      <p:nvGrpSpPr>
+        <p:cNvPr id="1" name="">
+          <a:extLst>
+            <a:ext uri="{FF2B5EF4-FFF2-40B4-BE49-F238E27FC236}">
+              <a16:creationId xmlns:a16="http://schemas.microsoft.com/office/drawing/2014/main" id="{8F075210-24B8-B231-FF9A-E8C7ADC9767D}"/>
+            </a:ext>
+          </a:extLst>
+        </p:cNvPr>
+        <p:cNvGrpSpPr/>
+        <p:nvPr/>
+      </p:nvGrpSpPr>
+      <p:grpSpPr>
+        <a:xfrm>
+          <a:off x="0" y="0"/>
+          <a:ext cx="0" cy="0"/>
+          <a:chOff x="0" y="0"/>
+          <a:chExt cx="0" cy="0"/>
+        </a:xfrm>
+      </p:grpSpPr>
+      <p:sp>
+        <p:nvSpPr>
+          <p:cNvPr id="2" name="Title 1">
+            <a:extLst>
+              <a:ext uri="{FF2B5EF4-FFF2-40B4-BE49-F238E27FC236}">
+                <a16:creationId xmlns:a16="http://schemas.microsoft.com/office/drawing/2014/main" id="{05588F5C-4530-E47A-8AE4-4921187E0DA7}"/>
+              </a:ext>
+            </a:extLst>
+          </p:cNvPr>
+          <p:cNvSpPr>
+            <a:spLocks noGrp="1"/>
+          </p:cNvSpPr>
+          <p:nvPr>
+            <p:ph type="title"/>
+          </p:nvPr>
+        </p:nvSpPr>
+        <p:spPr/>
+        <p:txBody>
+          <a:bodyPr/>
+          <a:lstStyle/>
+          <a:p>
+            <a:r>
+              <a:rPr lang="en-US"/>
+              <a:t>Rod Heat Up Data (slides 18-23)</a:t>
+            </a:r>
+          </a:p>
+        </p:txBody>
+      </p:sp>
+      <p:sp>
+        <p:nvSpPr>
+          <p:cNvPr id="3" name="Content Placeholder 2">
+            <a:extLst>
+              <a:ext uri="{FF2B5EF4-FFF2-40B4-BE49-F238E27FC236}">
+                <a16:creationId xmlns:a16="http://schemas.microsoft.com/office/drawing/2014/main" id="{46725CB9-6424-2C8C-2823-09580AF9A830}"/>
+              </a:ext>
+            </a:extLst>
+          </p:cNvPr>
+          <p:cNvSpPr>
+            <a:spLocks noGrp="1"/>
+          </p:cNvSpPr>
+          <p:nvPr>
+            <p:ph idx="1"/>
+          </p:nvPr>
+        </p:nvSpPr>
+        <p:spPr/>
+        <p:txBody>
+          <a:bodyPr vert="horz" lIns="91440" tIns="45720" rIns="91440" bIns="45720" rtlCol="0" anchor="t">
+            <a:normAutofit/>
+          </a:bodyPr>
+          <a:lstStyle/>
+          <a:p>
+            <a:r>
+              <a:rPr lang="en-US"/>
+              <a:t>Middle Valve closed</a:t>
+            </a:r>
+          </a:p>
+          <a:p>
+            <a:r>
+              <a:rPr lang="en-US"/>
+              <a:t>Upper Valve open</a:t>
+            </a:r>
+          </a:p>
+          <a:p>
+            <a:r>
+              <a:rPr lang="en-US"/>
+              <a:t>Heat Exchanger 0.5 gal/min at 4.5 hours </a:t>
+            </a:r>
+          </a:p>
+        </p:txBody>
+      </p:sp>
+    </p:spTree>
+    <p:extLst>
+      <p:ext uri="{BB962C8B-B14F-4D97-AF65-F5344CB8AC3E}">
+        <p14:creationId xmlns:p14="http://schemas.microsoft.com/office/powerpoint/2010/main" val="3341309276"/>
+      </p:ext>
+    </p:extLst>
+  </p:cSld>
+  <p:clrMapOvr>
+    <a:masterClrMapping/>
+  </p:clrMapOvr>
+</p:sld>
+</file>
+
+<file path=ppt/slides/slide18.xml><?xml version="1.0" encoding="utf-8"?>
+<p:sld xmlns:a="http://schemas.openxmlformats.org/drawingml/2006/main" xmlns:r="http://schemas.openxmlformats.org/officeDocument/2006/relationships" xmlns:p="http://schemas.openxmlformats.org/presentationml/2006/main">
+  <p:cSld>
+    <p:spTree>
+      <p:nvGrpSpPr>
+        <p:cNvPr id="1" name=""/>
+        <p:cNvGrpSpPr/>
+        <p:nvPr/>
+      </p:nvGrpSpPr>
+      <p:grpSpPr>
+        <a:xfrm>
+          <a:off x="0" y="0"/>
+          <a:ext cx="0" cy="0"/>
+          <a:chOff x="0" y="0"/>
+          <a:chExt cx="0" cy="0"/>
+        </a:xfrm>
+      </p:grpSpPr>
+      <p:sp>
+        <p:nvSpPr>
+          <p:cNvPr id="2" name="Title 1">
+            <a:extLst>
+              <a:ext uri="{FF2B5EF4-FFF2-40B4-BE49-F238E27FC236}">
+                <a16:creationId xmlns:a16="http://schemas.microsoft.com/office/drawing/2014/main" id="{380AFA0A-81AD-5995-88C5-4A23F908B64F}"/>
+              </a:ext>
+            </a:extLst>
+          </p:cNvPr>
+          <p:cNvSpPr>
+            <a:spLocks noGrp="1"/>
+          </p:cNvSpPr>
+          <p:nvPr>
+            <p:ph type="ctrTitle"/>
+          </p:nvPr>
+        </p:nvSpPr>
+        <p:spPr/>
+        <p:txBody>
+          <a:bodyPr/>
+          <a:lstStyle/>
+          <a:p>
+            <a:r>
+              <a:rPr lang="en-US"/>
+              <a:t>4.5-hour Rod heat up</a:t>
+            </a:r>
+          </a:p>
+        </p:txBody>
+      </p:sp>
+      <p:sp>
+        <p:nvSpPr>
+          <p:cNvPr id="3" name="Subtitle 2">
+            <a:extLst>
+              <a:ext uri="{FF2B5EF4-FFF2-40B4-BE49-F238E27FC236}">
+                <a16:creationId xmlns:a16="http://schemas.microsoft.com/office/drawing/2014/main" id="{F7AE2A58-31F6-87D6-160C-2603FDE0D6C4}"/>
+              </a:ext>
+            </a:extLst>
+          </p:cNvPr>
+          <p:cNvSpPr>
+            <a:spLocks noGrp="1"/>
+          </p:cNvSpPr>
+          <p:nvPr>
+            <p:ph type="subTitle" idx="1"/>
+          </p:nvPr>
+        </p:nvSpPr>
+        <p:spPr/>
+        <p:txBody>
+          <a:bodyPr vert="horz" lIns="91440" tIns="45720" rIns="91440" bIns="45720" rtlCol="0" anchor="t">
+            <a:normAutofit/>
+          </a:bodyPr>
+          <a:lstStyle/>
+          <a:p>
+            <a:r>
+              <a:rPr lang="en-US" dirty="0">
+                <a:hlinkClick r:id="rId2"/>
+              </a:rPr>
+              <a:t>PDF Graph Download</a:t>
+            </a:r>
+            <a:endParaRPr lang="en-US" dirty="0"/>
+          </a:p>
+        </p:txBody>
+      </p:sp>
+    </p:spTree>
+    <p:extLst>
+      <p:ext uri="{BB962C8B-B14F-4D97-AF65-F5344CB8AC3E}">
+        <p14:creationId xmlns:p14="http://schemas.microsoft.com/office/powerpoint/2010/main" val="1175689135"/>
+      </p:ext>
+    </p:extLst>
+  </p:cSld>
+  <p:clrMapOvr>
+    <a:masterClrMapping/>
+  </p:clrMapOvr>
+</p:sld>
+</file>
+
+<file path=ppt/slides/slide19.xml><?xml version="1.0" encoding="utf-8"?>
+<p:sld xmlns:a="http://schemas.openxmlformats.org/drawingml/2006/main" xmlns:r="http://schemas.openxmlformats.org/officeDocument/2006/relationships" xmlns:p="http://schemas.openxmlformats.org/presentationml/2006/main">
+  <p:cSld>
+    <p:spTree>
+      <p:nvGrpSpPr>
+        <p:cNvPr id="1" name=""/>
+        <p:cNvGrpSpPr/>
+        <p:nvPr/>
+      </p:nvGrpSpPr>
+      <p:grpSpPr>
+        <a:xfrm>
+          <a:off x="0" y="0"/>
+          <a:ext cx="0" cy="0"/>
+          <a:chOff x="0" y="0"/>
+          <a:chExt cx="0" cy="0"/>
+        </a:xfrm>
+      </p:grpSpPr>
+      <p:pic>
+        <p:nvPicPr>
+          <p:cNvPr id="2" name="Picture 1">
+            <a:extLst>
+              <a:ext uri="{FF2B5EF4-FFF2-40B4-BE49-F238E27FC236}">
+                <a16:creationId xmlns:a16="http://schemas.microsoft.com/office/drawing/2014/main" id="{FF4ABE8A-1041-3D50-98B5-3DCA7B1708C8}"/>
+              </a:ext>
+            </a:extLst>
+          </p:cNvPr>
+          <p:cNvPicPr>
+            <a:picLocks noChangeAspect="1"/>
+          </p:cNvPicPr>
+          <p:nvPr/>
+        </p:nvPicPr>
+        <p:blipFill>
+          <a:blip r:embed="rId2"/>
+          <a:stretch>
+            <a:fillRect/>
+          </a:stretch>
+        </p:blipFill>
+        <p:spPr>
+          <a:xfrm>
+            <a:off x="886639" y="0"/>
+            <a:ext cx="10418721" cy="6858000"/>
+          </a:xfrm>
+          <a:prstGeom prst="rect">
+            <a:avLst/>
+          </a:prstGeom>
+        </p:spPr>
+      </p:pic>
+    </p:spTree>
+    <p:extLst>
+      <p:ext uri="{BB962C8B-B14F-4D97-AF65-F5344CB8AC3E}">
+        <p14:creationId xmlns:p14="http://schemas.microsoft.com/office/powerpoint/2010/main" val="1326135099"/>
+      </p:ext>
+    </p:extLst>
+  </p:cSld>
+  <p:clrMapOvr>
+    <a:masterClrMapping/>
+  </p:clrMapOvr>
+</p:sld>
+</file>
+
 <file path=ppt/slides/slide2.xml><?xml version="1.0" encoding="utf-8"?>
 <p:sld xmlns:a="http://schemas.openxmlformats.org/drawingml/2006/main" xmlns:r="http://schemas.openxmlformats.org/officeDocument/2006/relationships" xmlns:p="http://schemas.openxmlformats.org/presentationml/2006/main">
   <p:cSld>
@@ -3044,6 +3932,578 @@
           <p:cNvPr id="2" name="Title 1">
             <a:extLst>
               <a:ext uri="{FF2B5EF4-FFF2-40B4-BE49-F238E27FC236}">
+                <a16:creationId xmlns:a16="http://schemas.microsoft.com/office/drawing/2014/main" id="{50EDDC44-917C-8FDE-EA0E-5BEAF8A92459}"/>
+              </a:ext>
+            </a:extLst>
+          </p:cNvPr>
+          <p:cNvSpPr>
+            <a:spLocks noGrp="1"/>
+          </p:cNvSpPr>
+          <p:nvPr>
+            <p:ph type="title"/>
+          </p:nvPr>
+        </p:nvSpPr>
+        <p:spPr/>
+        <p:txBody>
+          <a:bodyPr/>
+          <a:lstStyle/>
+          <a:p>
+            <a:r>
+              <a:rPr lang="en-US"/>
+              <a:t>Table of Contents</a:t>
+            </a:r>
+          </a:p>
+        </p:txBody>
+      </p:sp>
+      <p:sp>
+        <p:nvSpPr>
+          <p:cNvPr id="3" name="Content Placeholder 2">
+            <a:extLst>
+              <a:ext uri="{FF2B5EF4-FFF2-40B4-BE49-F238E27FC236}">
+                <a16:creationId xmlns:a16="http://schemas.microsoft.com/office/drawing/2014/main" id="{CF9FA322-40DF-F5FB-E1E9-D1731297163B}"/>
+              </a:ext>
+            </a:extLst>
+          </p:cNvPr>
+          <p:cNvSpPr>
+            <a:spLocks noGrp="1"/>
+          </p:cNvSpPr>
+          <p:nvPr>
+            <p:ph idx="1"/>
+          </p:nvPr>
+        </p:nvSpPr>
+        <p:spPr/>
+        <p:txBody>
+          <a:bodyPr vert="horz" lIns="91440" tIns="45720" rIns="91440" bIns="45720" rtlCol="0" anchor="t">
+            <a:normAutofit/>
+          </a:bodyPr>
+          <a:lstStyle/>
+          <a:p>
+            <a:r>
+              <a:rPr lang="en-US" dirty="0">
+                <a:hlinkClick r:id="rId2" action="ppaction://hlinksldjump"/>
+              </a:rPr>
+              <a:t>Pump Heat middle valve open</a:t>
+            </a:r>
+            <a:endParaRPr lang="en-US" dirty="0"/>
+          </a:p>
+          <a:p>
+            <a:r>
+              <a:rPr lang="en-US" dirty="0">
+                <a:hlinkClick r:id="rId3" action="ppaction://hlinksldjump"/>
+              </a:rPr>
+              <a:t>Pump Heat middle valve closed</a:t>
+            </a:r>
+            <a:endParaRPr lang="en-US" dirty="0"/>
+          </a:p>
+          <a:p>
+            <a:r>
+              <a:rPr lang="en-US" dirty="0">
+                <a:hlinkClick r:id="rId4" action="ppaction://hlinksldjump"/>
+              </a:rPr>
+              <a:t>Rod Heat middle valve closed</a:t>
+            </a:r>
+            <a:endParaRPr lang="en-US" dirty="0"/>
+          </a:p>
+        </p:txBody>
+      </p:sp>
+    </p:spTree>
+    <p:extLst>
+      <p:ext uri="{BB962C8B-B14F-4D97-AF65-F5344CB8AC3E}">
+        <p14:creationId xmlns:p14="http://schemas.microsoft.com/office/powerpoint/2010/main" val="3894846975"/>
+      </p:ext>
+    </p:extLst>
+  </p:cSld>
+  <p:clrMapOvr>
+    <a:masterClrMapping/>
+  </p:clrMapOvr>
+</p:sld>
+</file>
+
+<file path=ppt/slides/slide20.xml><?xml version="1.0" encoding="utf-8"?>
+<p:sld xmlns:a="http://schemas.openxmlformats.org/drawingml/2006/main" xmlns:r="http://schemas.openxmlformats.org/officeDocument/2006/relationships" xmlns:p="http://schemas.openxmlformats.org/presentationml/2006/main">
+  <p:cSld>
+    <p:spTree>
+      <p:nvGrpSpPr>
+        <p:cNvPr id="1" name="">
+          <a:extLst>
+            <a:ext uri="{FF2B5EF4-FFF2-40B4-BE49-F238E27FC236}">
+              <a16:creationId xmlns:a16="http://schemas.microsoft.com/office/drawing/2014/main" id="{A23F57CC-E74B-1E39-8C14-E474FB351070}"/>
+            </a:ext>
+          </a:extLst>
+        </p:cNvPr>
+        <p:cNvGrpSpPr/>
+        <p:nvPr/>
+      </p:nvGrpSpPr>
+      <p:grpSpPr>
+        <a:xfrm>
+          <a:off x="0" y="0"/>
+          <a:ext cx="0" cy="0"/>
+          <a:chOff x="0" y="0"/>
+          <a:chExt cx="0" cy="0"/>
+        </a:xfrm>
+      </p:grpSpPr>
+      <p:sp>
+        <p:nvSpPr>
+          <p:cNvPr id="2" name="Title 1">
+            <a:extLst>
+              <a:ext uri="{FF2B5EF4-FFF2-40B4-BE49-F238E27FC236}">
+                <a16:creationId xmlns:a16="http://schemas.microsoft.com/office/drawing/2014/main" id="{F9CA77C7-9BE9-0A5A-45F0-A6A7701D4B9F}"/>
+              </a:ext>
+            </a:extLst>
+          </p:cNvPr>
+          <p:cNvSpPr>
+            <a:spLocks noGrp="1"/>
+          </p:cNvSpPr>
+          <p:nvPr>
+            <p:ph type="ctrTitle"/>
+          </p:nvPr>
+        </p:nvSpPr>
+        <p:spPr/>
+        <p:txBody>
+          <a:bodyPr/>
+          <a:lstStyle/>
+          <a:p>
+            <a:r>
+              <a:rPr lang="en-US"/>
+              <a:t>0.5gal/min Heat Exchanger</a:t>
+            </a:r>
+          </a:p>
+        </p:txBody>
+      </p:sp>
+      <p:sp>
+        <p:nvSpPr>
+          <p:cNvPr id="3" name="Subtitle 2">
+            <a:extLst>
+              <a:ext uri="{FF2B5EF4-FFF2-40B4-BE49-F238E27FC236}">
+                <a16:creationId xmlns:a16="http://schemas.microsoft.com/office/drawing/2014/main" id="{C26F679E-E404-CB6D-993F-5EBBA17A1961}"/>
+              </a:ext>
+            </a:extLst>
+          </p:cNvPr>
+          <p:cNvSpPr>
+            <a:spLocks noGrp="1"/>
+          </p:cNvSpPr>
+          <p:nvPr>
+            <p:ph type="subTitle" idx="1"/>
+          </p:nvPr>
+        </p:nvSpPr>
+        <p:spPr/>
+        <p:txBody>
+          <a:bodyPr vert="horz" lIns="91440" tIns="45720" rIns="91440" bIns="45720" rtlCol="0" anchor="t">
+            <a:normAutofit/>
+          </a:bodyPr>
+          <a:lstStyle/>
+          <a:p>
+            <a:r>
+              <a:rPr lang="en-US" dirty="0">
+                <a:hlinkClick r:id="rId2"/>
+              </a:rPr>
+              <a:t>PDF Graph Download</a:t>
+            </a:r>
+            <a:endParaRPr lang="en-US" dirty="0"/>
+          </a:p>
+        </p:txBody>
+      </p:sp>
+    </p:spTree>
+    <p:extLst>
+      <p:ext uri="{BB962C8B-B14F-4D97-AF65-F5344CB8AC3E}">
+        <p14:creationId xmlns:p14="http://schemas.microsoft.com/office/powerpoint/2010/main" val="171582190"/>
+      </p:ext>
+    </p:extLst>
+  </p:cSld>
+  <p:clrMapOvr>
+    <a:masterClrMapping/>
+  </p:clrMapOvr>
+</p:sld>
+</file>
+
+<file path=ppt/slides/slide21.xml><?xml version="1.0" encoding="utf-8"?>
+<p:sld xmlns:a="http://schemas.openxmlformats.org/drawingml/2006/main" xmlns:r="http://schemas.openxmlformats.org/officeDocument/2006/relationships" xmlns:p="http://schemas.openxmlformats.org/presentationml/2006/main">
+  <p:cSld>
+    <p:spTree>
+      <p:nvGrpSpPr>
+        <p:cNvPr id="1" name="">
+          <a:extLst>
+            <a:ext uri="{FF2B5EF4-FFF2-40B4-BE49-F238E27FC236}">
+              <a16:creationId xmlns:a16="http://schemas.microsoft.com/office/drawing/2014/main" id="{0B6FACB3-BD86-A500-6775-F227F24898EA}"/>
+            </a:ext>
+          </a:extLst>
+        </p:cNvPr>
+        <p:cNvGrpSpPr/>
+        <p:nvPr/>
+      </p:nvGrpSpPr>
+      <p:grpSpPr>
+        <a:xfrm>
+          <a:off x="0" y="0"/>
+          <a:ext cx="0" cy="0"/>
+          <a:chOff x="0" y="0"/>
+          <a:chExt cx="0" cy="0"/>
+        </a:xfrm>
+      </p:grpSpPr>
+      <p:pic>
+        <p:nvPicPr>
+          <p:cNvPr id="2" name="Picture 1">
+            <a:extLst>
+              <a:ext uri="{FF2B5EF4-FFF2-40B4-BE49-F238E27FC236}">
+                <a16:creationId xmlns:a16="http://schemas.microsoft.com/office/drawing/2014/main" id="{AD6B1CE6-CB2C-DC82-233D-C9685D3C453A}"/>
+              </a:ext>
+            </a:extLst>
+          </p:cNvPr>
+          <p:cNvPicPr>
+            <a:picLocks noChangeAspect="1"/>
+          </p:cNvPicPr>
+          <p:nvPr/>
+        </p:nvPicPr>
+        <p:blipFill>
+          <a:blip r:embed="rId2"/>
+          <a:stretch>
+            <a:fillRect/>
+          </a:stretch>
+        </p:blipFill>
+        <p:spPr>
+          <a:xfrm>
+            <a:off x="886639" y="0"/>
+            <a:ext cx="10418721" cy="6858000"/>
+          </a:xfrm>
+          <a:prstGeom prst="rect">
+            <a:avLst/>
+          </a:prstGeom>
+        </p:spPr>
+      </p:pic>
+    </p:spTree>
+    <p:extLst>
+      <p:ext uri="{BB962C8B-B14F-4D97-AF65-F5344CB8AC3E}">
+        <p14:creationId xmlns:p14="http://schemas.microsoft.com/office/powerpoint/2010/main" val="107555853"/>
+      </p:ext>
+    </p:extLst>
+  </p:cSld>
+  <p:clrMapOvr>
+    <a:masterClrMapping/>
+  </p:clrMapOvr>
+</p:sld>
+</file>
+
+<file path=ppt/slides/slide22.xml><?xml version="1.0" encoding="utf-8"?>
+<p:sld xmlns:a="http://schemas.openxmlformats.org/drawingml/2006/main" xmlns:r="http://schemas.openxmlformats.org/officeDocument/2006/relationships" xmlns:p="http://schemas.openxmlformats.org/presentationml/2006/main">
+  <p:cSld>
+    <p:spTree>
+      <p:nvGrpSpPr>
+        <p:cNvPr id="1" name="">
+          <a:extLst>
+            <a:ext uri="{FF2B5EF4-FFF2-40B4-BE49-F238E27FC236}">
+              <a16:creationId xmlns:a16="http://schemas.microsoft.com/office/drawing/2014/main" id="{1817CD71-99E1-5F49-F5E8-942EEB975EB8}"/>
+            </a:ext>
+          </a:extLst>
+        </p:cNvPr>
+        <p:cNvGrpSpPr/>
+        <p:nvPr/>
+      </p:nvGrpSpPr>
+      <p:grpSpPr>
+        <a:xfrm>
+          <a:off x="0" y="0"/>
+          <a:ext cx="0" cy="0"/>
+          <a:chOff x="0" y="0"/>
+          <a:chExt cx="0" cy="0"/>
+        </a:xfrm>
+      </p:grpSpPr>
+      <p:sp>
+        <p:nvSpPr>
+          <p:cNvPr id="2" name="Title 1">
+            <a:extLst>
+              <a:ext uri="{FF2B5EF4-FFF2-40B4-BE49-F238E27FC236}">
+                <a16:creationId xmlns:a16="http://schemas.microsoft.com/office/drawing/2014/main" id="{D0CAC38F-AABB-689B-6E52-2A898C4D93F0}"/>
+              </a:ext>
+            </a:extLst>
+          </p:cNvPr>
+          <p:cNvSpPr>
+            <a:spLocks noGrp="1"/>
+          </p:cNvSpPr>
+          <p:nvPr>
+            <p:ph type="ctrTitle"/>
+          </p:nvPr>
+        </p:nvSpPr>
+        <p:spPr/>
+        <p:txBody>
+          <a:bodyPr>
+            <a:normAutofit fontScale="90000"/>
+          </a:bodyPr>
+          <a:lstStyle/>
+          <a:p>
+            <a:r>
+              <a:rPr lang="en-US"/>
+              <a:t>4.5-hour Rod Heat Up</a:t>
+            </a:r>
+            <a:br>
+              <a:rPr lang="en-US"/>
+            </a:br>
+            <a:r>
+              <a:rPr lang="en-US"/>
+              <a:t>+</a:t>
+            </a:r>
+            <a:br>
+              <a:rPr lang="en-US"/>
+            </a:br>
+            <a:r>
+              <a:rPr lang="en-US"/>
+              <a:t>0.5gal/min Heat Exchanger</a:t>
+            </a:r>
+          </a:p>
+        </p:txBody>
+      </p:sp>
+      <p:sp>
+        <p:nvSpPr>
+          <p:cNvPr id="3" name="Subtitle 2">
+            <a:extLst>
+              <a:ext uri="{FF2B5EF4-FFF2-40B4-BE49-F238E27FC236}">
+                <a16:creationId xmlns:a16="http://schemas.microsoft.com/office/drawing/2014/main" id="{4FD7E0EA-081F-91B1-B66C-922F04256106}"/>
+              </a:ext>
+            </a:extLst>
+          </p:cNvPr>
+          <p:cNvSpPr>
+            <a:spLocks noGrp="1"/>
+          </p:cNvSpPr>
+          <p:nvPr>
+            <p:ph type="subTitle" idx="1"/>
+          </p:nvPr>
+        </p:nvSpPr>
+        <p:spPr/>
+        <p:txBody>
+          <a:bodyPr vert="horz" lIns="91440" tIns="45720" rIns="91440" bIns="45720" rtlCol="0" anchor="t">
+            <a:normAutofit/>
+          </a:bodyPr>
+          <a:lstStyle/>
+          <a:p>
+            <a:r>
+              <a:rPr lang="en-US" dirty="0">
+                <a:hlinkClick r:id="rId2"/>
+              </a:rPr>
+              <a:t>PDF Graph Download</a:t>
+            </a:r>
+            <a:endParaRPr lang="en-US" dirty="0"/>
+          </a:p>
+          <a:p>
+            <a:r>
+              <a:rPr lang="en-US" dirty="0">
+                <a:hlinkClick r:id="rId3"/>
+              </a:rPr>
+              <a:t>Raw Data File Download</a:t>
+            </a:r>
+            <a:endParaRPr lang="en-US" dirty="0"/>
+          </a:p>
+        </p:txBody>
+      </p:sp>
+    </p:spTree>
+    <p:extLst>
+      <p:ext uri="{BB962C8B-B14F-4D97-AF65-F5344CB8AC3E}">
+        <p14:creationId xmlns:p14="http://schemas.microsoft.com/office/powerpoint/2010/main" val="195303266"/>
+      </p:ext>
+    </p:extLst>
+  </p:cSld>
+  <p:clrMapOvr>
+    <a:masterClrMapping/>
+  </p:clrMapOvr>
+</p:sld>
+</file>
+
+<file path=ppt/slides/slide23.xml><?xml version="1.0" encoding="utf-8"?>
+<p:sld xmlns:a="http://schemas.openxmlformats.org/drawingml/2006/main" xmlns:r="http://schemas.openxmlformats.org/officeDocument/2006/relationships" xmlns:p="http://schemas.openxmlformats.org/presentationml/2006/main">
+  <p:cSld>
+    <p:spTree>
+      <p:nvGrpSpPr>
+        <p:cNvPr id="1" name="">
+          <a:extLst>
+            <a:ext uri="{FF2B5EF4-FFF2-40B4-BE49-F238E27FC236}">
+              <a16:creationId xmlns:a16="http://schemas.microsoft.com/office/drawing/2014/main" id="{B633FBF2-8AF2-412E-3DF9-98122E1BE60B}"/>
+            </a:ext>
+          </a:extLst>
+        </p:cNvPr>
+        <p:cNvGrpSpPr/>
+        <p:nvPr/>
+      </p:nvGrpSpPr>
+      <p:grpSpPr>
+        <a:xfrm>
+          <a:off x="0" y="0"/>
+          <a:ext cx="0" cy="0"/>
+          <a:chOff x="0" y="0"/>
+          <a:chExt cx="0" cy="0"/>
+        </a:xfrm>
+      </p:grpSpPr>
+      <p:pic>
+        <p:nvPicPr>
+          <p:cNvPr id="2" name="Picture 1">
+            <a:extLst>
+              <a:ext uri="{FF2B5EF4-FFF2-40B4-BE49-F238E27FC236}">
+                <a16:creationId xmlns:a16="http://schemas.microsoft.com/office/drawing/2014/main" id="{8610B440-8FE7-51FC-E5B9-91FE08898209}"/>
+              </a:ext>
+            </a:extLst>
+          </p:cNvPr>
+          <p:cNvPicPr>
+            <a:picLocks noChangeAspect="1"/>
+          </p:cNvPicPr>
+          <p:nvPr/>
+        </p:nvPicPr>
+        <p:blipFill>
+          <a:blip r:embed="rId2"/>
+          <a:stretch>
+            <a:fillRect/>
+          </a:stretch>
+        </p:blipFill>
+        <p:spPr>
+          <a:xfrm>
+            <a:off x="886639" y="0"/>
+            <a:ext cx="10418721" cy="6858000"/>
+          </a:xfrm>
+          <a:prstGeom prst="rect">
+            <a:avLst/>
+          </a:prstGeom>
+        </p:spPr>
+      </p:pic>
+    </p:spTree>
+    <p:extLst>
+      <p:ext uri="{BB962C8B-B14F-4D97-AF65-F5344CB8AC3E}">
+        <p14:creationId xmlns:p14="http://schemas.microsoft.com/office/powerpoint/2010/main" val="4119749817"/>
+      </p:ext>
+    </p:extLst>
+  </p:cSld>
+  <p:clrMapOvr>
+    <a:masterClrMapping/>
+  </p:clrMapOvr>
+</p:sld>
+</file>
+
+<file path=ppt/slides/slide3.xml><?xml version="1.0" encoding="utf-8"?>
+<p:sld xmlns:a="http://schemas.openxmlformats.org/drawingml/2006/main" xmlns:r="http://schemas.openxmlformats.org/officeDocument/2006/relationships" xmlns:p="http://schemas.openxmlformats.org/presentationml/2006/main">
+  <p:cSld>
+    <p:spTree>
+      <p:nvGrpSpPr>
+        <p:cNvPr id="1" name=""/>
+        <p:cNvGrpSpPr/>
+        <p:nvPr/>
+      </p:nvGrpSpPr>
+      <p:grpSpPr>
+        <a:xfrm>
+          <a:off x="0" y="0"/>
+          <a:ext cx="0" cy="0"/>
+          <a:chOff x="0" y="0"/>
+          <a:chExt cx="0" cy="0"/>
+        </a:xfrm>
+      </p:grpSpPr>
+      <p:sp>
+        <p:nvSpPr>
+          <p:cNvPr id="2" name="Title 1">
+            <a:extLst>
+              <a:ext uri="{FF2B5EF4-FFF2-40B4-BE49-F238E27FC236}">
+                <a16:creationId xmlns:a16="http://schemas.microsoft.com/office/drawing/2014/main" id="{2DABA8F2-6179-FCEC-D7A0-AFA1AEB9CDDC}"/>
+              </a:ext>
+            </a:extLst>
+          </p:cNvPr>
+          <p:cNvSpPr>
+            <a:spLocks noGrp="1"/>
+          </p:cNvSpPr>
+          <p:nvPr>
+            <p:ph type="title"/>
+          </p:nvPr>
+        </p:nvSpPr>
+        <p:spPr/>
+        <p:txBody>
+          <a:bodyPr/>
+          <a:lstStyle/>
+          <a:p>
+            <a:r>
+              <a:rPr lang="en-US"/>
+              <a:t>Pump Heat Up Data (slides 4-9)</a:t>
+            </a:r>
+          </a:p>
+        </p:txBody>
+      </p:sp>
+      <p:sp>
+        <p:nvSpPr>
+          <p:cNvPr id="3" name="Content Placeholder 2">
+            <a:extLst>
+              <a:ext uri="{FF2B5EF4-FFF2-40B4-BE49-F238E27FC236}">
+                <a16:creationId xmlns:a16="http://schemas.microsoft.com/office/drawing/2014/main" id="{1E652A67-30C0-DABA-46C8-CB79DB106F66}"/>
+              </a:ext>
+            </a:extLst>
+          </p:cNvPr>
+          <p:cNvSpPr>
+            <a:spLocks noGrp="1"/>
+          </p:cNvSpPr>
+          <p:nvPr>
+            <p:ph idx="1"/>
+          </p:nvPr>
+        </p:nvSpPr>
+        <p:spPr/>
+        <p:txBody>
+          <a:bodyPr vert="horz" lIns="91440" tIns="45720" rIns="91440" bIns="45720" rtlCol="0" anchor="t">
+            <a:normAutofit/>
+          </a:bodyPr>
+          <a:lstStyle/>
+          <a:p>
+            <a:pPr>
+              <a:buFont typeface="Calibri" panose="020B0604020202020204" pitchFamily="34" charset="0"/>
+              <a:buChar char="-"/>
+            </a:pPr>
+            <a:r>
+              <a:rPr lang="en-US"/>
+              <a:t>Middle valve open</a:t>
+            </a:r>
+          </a:p>
+          <a:p>
+            <a:pPr>
+              <a:buFont typeface="Calibri" panose="020B0604020202020204" pitchFamily="34" charset="0"/>
+              <a:buChar char="-"/>
+            </a:pPr>
+            <a:r>
+              <a:rPr lang="en-US"/>
+              <a:t>Upper valve open</a:t>
+            </a:r>
+          </a:p>
+          <a:p>
+            <a:pPr>
+              <a:buFont typeface="Calibri" panose="020B0604020202020204" pitchFamily="34" charset="0"/>
+              <a:buChar char="-"/>
+            </a:pPr>
+            <a:r>
+              <a:rPr lang="en-US"/>
+              <a:t>Heat exchange increments of 0.5 gal/min</a:t>
+            </a:r>
+          </a:p>
+        </p:txBody>
+      </p:sp>
+    </p:spTree>
+    <p:extLst>
+      <p:ext uri="{BB962C8B-B14F-4D97-AF65-F5344CB8AC3E}">
+        <p14:creationId xmlns:p14="http://schemas.microsoft.com/office/powerpoint/2010/main" val="1951156181"/>
+      </p:ext>
+    </p:extLst>
+  </p:cSld>
+  <p:clrMapOvr>
+    <a:masterClrMapping/>
+  </p:clrMapOvr>
+</p:sld>
+</file>
+
+<file path=ppt/slides/slide4.xml><?xml version="1.0" encoding="utf-8"?>
+<p:sld xmlns:a="http://schemas.openxmlformats.org/drawingml/2006/main" xmlns:r="http://schemas.openxmlformats.org/officeDocument/2006/relationships" xmlns:p="http://schemas.openxmlformats.org/presentationml/2006/main">
+  <p:cSld>
+    <p:spTree>
+      <p:nvGrpSpPr>
+        <p:cNvPr id="1" name=""/>
+        <p:cNvGrpSpPr/>
+        <p:nvPr/>
+      </p:nvGrpSpPr>
+      <p:grpSpPr>
+        <a:xfrm>
+          <a:off x="0" y="0"/>
+          <a:ext cx="0" cy="0"/>
+          <a:chOff x="0" y="0"/>
+          <a:chExt cx="0" cy="0"/>
+        </a:xfrm>
+      </p:grpSpPr>
+      <p:sp>
+        <p:nvSpPr>
+          <p:cNvPr id="2" name="Title 1">
+            <a:extLst>
+              <a:ext uri="{FF2B5EF4-FFF2-40B4-BE49-F238E27FC236}">
                 <a16:creationId xmlns:a16="http://schemas.microsoft.com/office/drawing/2014/main" id="{1D1E179D-8CF1-679E-FD5D-AFDE7EF74FDB}"/>
               </a:ext>
             </a:extLst>
@@ -3063,13 +4523,6 @@
             <a:r>
               <a:rPr lang="en-US"/>
               <a:t>6-hour pump heat up</a:t>
-            </a:r>
-            <a:br>
-              <a:rPr lang="en-US"/>
-            </a:br>
-            <a:r>
-              <a:rPr lang="en-US"/>
-              <a:t>(valves open)</a:t>
             </a:r>
           </a:p>
         </p:txBody>
@@ -3098,12 +4551,12 @@
           <a:lstStyle/>
           <a:p>
             <a:r>
-              <a:rPr lang="en-US">
+              <a:rPr lang="en-US" dirty="0">
                 <a:hlinkClick r:id="rId2"/>
               </a:rPr>
-              <a:t>PDF graph download</a:t>
-            </a:r>
-            <a:endParaRPr lang="en-US"/>
+              <a:t>PDF Graph Download</a:t>
+            </a:r>
+            <a:endParaRPr lang="en-US" dirty="0"/>
           </a:p>
         </p:txBody>
       </p:sp>
@@ -3120,7 +4573,7 @@
 </p:sld>
 </file>
 
-<file path=ppt/slides/slide3.xml><?xml version="1.0" encoding="utf-8"?>
+<file path=ppt/slides/slide5.xml><?xml version="1.0" encoding="utf-8"?>
 <p:sld xmlns:a="http://schemas.openxmlformats.org/drawingml/2006/main" xmlns:r="http://schemas.openxmlformats.org/officeDocument/2006/relationships" xmlns:p="http://schemas.openxmlformats.org/presentationml/2006/main">
   <p:cSld>
     <p:spTree>
@@ -3180,7 +4633,7 @@
 </p:sld>
 </file>
 
-<file path=ppt/slides/slide4.xml><?xml version="1.0" encoding="utf-8"?>
+<file path=ppt/slides/slide6.xml><?xml version="1.0" encoding="utf-8"?>
 <p:sld xmlns:a="http://schemas.openxmlformats.org/drawingml/2006/main" xmlns:r="http://schemas.openxmlformats.org/officeDocument/2006/relationships" xmlns:p="http://schemas.openxmlformats.org/presentationml/2006/main">
   <p:cSld>
     <p:spTree>
@@ -3226,7 +4679,7 @@
           <a:p>
             <a:r>
               <a:rPr lang="en-US"/>
-              <a:t>Integral heat exchange flow rates</a:t>
+              <a:t>0.5 gal/min  increments Heat Exchanger</a:t>
             </a:r>
           </a:p>
         </p:txBody>
@@ -3249,16 +4702,18 @@
         </p:nvSpPr>
         <p:spPr/>
         <p:txBody>
-          <a:bodyPr/>
-          <a:lstStyle/>
-          <a:p>
-            <a:r>
-              <a:rPr lang="en-US">
+          <a:bodyPr vert="horz" lIns="91440" tIns="45720" rIns="91440" bIns="45720" rtlCol="0" anchor="t">
+            <a:normAutofit/>
+          </a:bodyPr>
+          <a:lstStyle/>
+          <a:p>
+            <a:r>
+              <a:rPr lang="en-US" dirty="0">
                 <a:hlinkClick r:id="rId2"/>
               </a:rPr>
-              <a:t>PDF graph download</a:t>
-            </a:r>
-            <a:endParaRPr lang="en-US"/>
+              <a:t>PDF Graph Download</a:t>
+            </a:r>
+            <a:endParaRPr lang="en-US" dirty="0"/>
           </a:p>
         </p:txBody>
       </p:sp>
@@ -3275,7 +4730,7 @@
 </p:sld>
 </file>
 
-<file path=ppt/slides/slide5.xml><?xml version="1.0" encoding="utf-8"?>
+<file path=ppt/slides/slide7.xml><?xml version="1.0" encoding="utf-8"?>
 <p:sld xmlns:a="http://schemas.openxmlformats.org/drawingml/2006/main" xmlns:r="http://schemas.openxmlformats.org/officeDocument/2006/relationships" xmlns:p="http://schemas.openxmlformats.org/presentationml/2006/main">
   <p:cSld>
     <p:spTree>
@@ -3649,7 +5104,7 @@
 </p:sld>
 </file>
 
-<file path=ppt/slides/slide6.xml><?xml version="1.0" encoding="utf-8"?>
+<file path=ppt/slides/slide8.xml><?xml version="1.0" encoding="utf-8"?>
 <p:sld xmlns:a="http://schemas.openxmlformats.org/drawingml/2006/main" xmlns:r="http://schemas.openxmlformats.org/officeDocument/2006/relationships" xmlns:p="http://schemas.openxmlformats.org/presentationml/2006/main">
   <p:cSld>
     <p:spTree>
@@ -3716,7 +5171,7 @@
             </a:br>
             <a:r>
               <a:rPr lang="en-US"/>
-              <a:t>integral heat exchange flow rates</a:t>
+              <a:t>Heat Exchange</a:t>
             </a:r>
           </a:p>
         </p:txBody>
@@ -3739,25 +5194,27 @@
         </p:nvSpPr>
         <p:spPr/>
         <p:txBody>
-          <a:bodyPr/>
-          <a:lstStyle/>
-          <a:p>
-            <a:r>
-              <a:rPr lang="en-US">
+          <a:bodyPr vert="horz" lIns="91440" tIns="45720" rIns="91440" bIns="45720" rtlCol="0" anchor="t">
+            <a:normAutofit/>
+          </a:bodyPr>
+          <a:lstStyle/>
+          <a:p>
+            <a:r>
+              <a:rPr lang="en-US" dirty="0">
                 <a:hlinkClick r:id="rId2"/>
               </a:rPr>
-              <a:t>PDF graph Download</a:t>
-            </a:r>
-            <a:endParaRPr lang="en-US"/>
-          </a:p>
-          <a:p>
-            <a:r>
-              <a:rPr lang="en-US">
+              <a:t>PDF Graph Download</a:t>
+            </a:r>
+            <a:endParaRPr lang="en-US" dirty="0"/>
+          </a:p>
+          <a:p>
+            <a:r>
+              <a:rPr lang="en-US" dirty="0">
                 <a:hlinkClick r:id="rId3"/>
               </a:rPr>
               <a:t>Raw Data File Download</a:t>
             </a:r>
-            <a:endParaRPr lang="en-US"/>
+            <a:endParaRPr lang="en-US" dirty="0"/>
           </a:p>
         </p:txBody>
       </p:sp>
@@ -3774,7 +5231,7 @@
 </p:sld>
 </file>
 
-<file path=ppt/slides/slide7.xml><?xml version="1.0" encoding="utf-8"?>
+<file path=ppt/slides/slide9.xml><?xml version="1.0" encoding="utf-8"?>
 <p:sld xmlns:a="http://schemas.openxmlformats.org/drawingml/2006/main" xmlns:r="http://schemas.openxmlformats.org/officeDocument/2006/relationships" xmlns:p="http://schemas.openxmlformats.org/presentationml/2006/main">
   <p:cSld>
     <p:spTree>

--- a/resources/Thermal_loop_data/Thermal Loop Data Graphs.pptx
+++ b/resources/Thermal_loop_data/Thermal Loop Data Graphs.pptx
@@ -139,6 +139,7 @@
   <p1510:revLst>
     <p1510:client id="{1A9F580B-8D25-E87E-9F25-5CFA58A26164}" v="872" dt="2025-07-22T19:02:02.483"/>
     <p1510:client id="{3D7E9EA9-2484-D84D-929C-E4B2F03CBF6D}" v="15" dt="2025-07-22T19:14:33.991"/>
+    <p1510:client id="{4F603E76-1197-D0B5-5191-D2D5D4848DC7}" v="44" dt="2025-07-22T19:21:43.423"/>
   </p1510:revLst>
 </p1510:revInfo>
 </file>
@@ -3452,6 +3453,83 @@
           </a:prstGeom>
         </p:spPr>
       </p:pic>
+      <p:sp>
+        <p:nvSpPr>
+          <p:cNvPr id="3" name="TextBox 2">
+            <a:extLst>
+              <a:ext uri="{FF2B5EF4-FFF2-40B4-BE49-F238E27FC236}">
+                <a16:creationId xmlns:a16="http://schemas.microsoft.com/office/drawing/2014/main" id="{C2BD4145-C9C2-9C44-D095-AFB7A328E292}"/>
+              </a:ext>
+            </a:extLst>
+          </p:cNvPr>
+          <p:cNvSpPr txBox="1"/>
+          <p:nvPr/>
+        </p:nvSpPr>
+        <p:spPr>
+          <a:xfrm>
+            <a:off x="3820020" y="1216594"/>
+            <a:ext cx="2712203" cy="369332"/>
+          </a:xfrm>
+          <a:prstGeom prst="rect">
+            <a:avLst/>
+          </a:prstGeom>
+          <a:noFill/>
+        </p:spPr>
+        <p:txBody>
+          <a:bodyPr rot="0" spcFirstLastPara="0" vertOverflow="overflow" horzOverflow="overflow" vert="horz" wrap="square" lIns="91440" tIns="45720" rIns="91440" bIns="45720" numCol="1" spcCol="0" rtlCol="0" fromWordArt="0" anchor="t" anchorCtr="0" forceAA="0" compatLnSpc="1">
+            <a:prstTxWarp prst="textNoShape">
+              <a:avLst/>
+            </a:prstTxWarp>
+            <a:spAutoFit/>
+          </a:bodyPr>
+          <a:lstStyle/>
+          <a:p>
+            <a:r>
+              <a:rPr lang="en-US" dirty="0"/>
+              <a:t>0.511 gal/min flow rate</a:t>
+            </a:r>
+          </a:p>
+        </p:txBody>
+      </p:sp>
+      <p:cxnSp>
+        <p:nvCxnSpPr>
+          <p:cNvPr id="4" name="Straight Arrow Connector 3">
+            <a:extLst>
+              <a:ext uri="{FF2B5EF4-FFF2-40B4-BE49-F238E27FC236}">
+                <a16:creationId xmlns:a16="http://schemas.microsoft.com/office/drawing/2014/main" id="{F53F094F-DD5F-304B-1E22-BD06E0FECFB0}"/>
+              </a:ext>
+            </a:extLst>
+          </p:cNvPr>
+          <p:cNvCxnSpPr/>
+          <p:nvPr/>
+        </p:nvCxnSpPr>
+        <p:spPr>
+          <a:xfrm flipH="1" flipV="1">
+            <a:off x="2564435" y="314620"/>
+            <a:ext cx="793531" cy="563617"/>
+          </a:xfrm>
+          <a:prstGeom prst="straightConnector1">
+            <a:avLst/>
+          </a:prstGeom>
+          <a:ln>
+            <a:tailEnd type="triangle"/>
+          </a:ln>
+        </p:spPr>
+        <p:style>
+          <a:lnRef idx="2">
+            <a:schemeClr val="accent1"/>
+          </a:lnRef>
+          <a:fillRef idx="0">
+            <a:schemeClr val="accent1"/>
+          </a:fillRef>
+          <a:effectRef idx="1">
+            <a:schemeClr val="accent1"/>
+          </a:effectRef>
+          <a:fontRef idx="minor">
+            <a:schemeClr val="tx1"/>
+          </a:fontRef>
+        </p:style>
+      </p:cxnSp>
     </p:spTree>
     <p:extLst>
       <p:ext uri="{BB962C8B-B14F-4D97-AF65-F5344CB8AC3E}">
@@ -4169,6 +4247,83 @@
           </a:prstGeom>
         </p:spPr>
       </p:pic>
+      <p:sp>
+        <p:nvSpPr>
+          <p:cNvPr id="4" name="TextBox 3">
+            <a:extLst>
+              <a:ext uri="{FF2B5EF4-FFF2-40B4-BE49-F238E27FC236}">
+                <a16:creationId xmlns:a16="http://schemas.microsoft.com/office/drawing/2014/main" id="{6B71F4AD-8B4E-D5B6-5549-57C383A5A352}"/>
+              </a:ext>
+            </a:extLst>
+          </p:cNvPr>
+          <p:cNvSpPr txBox="1"/>
+          <p:nvPr/>
+        </p:nvSpPr>
+        <p:spPr>
+          <a:xfrm>
+            <a:off x="4201020" y="776473"/>
+            <a:ext cx="2712203" cy="369332"/>
+          </a:xfrm>
+          <a:prstGeom prst="rect">
+            <a:avLst/>
+          </a:prstGeom>
+          <a:noFill/>
+        </p:spPr>
+        <p:txBody>
+          <a:bodyPr rot="0" spcFirstLastPara="0" vertOverflow="overflow" horzOverflow="overflow" vert="horz" wrap="square" lIns="91440" tIns="45720" rIns="91440" bIns="45720" numCol="1" spcCol="0" rtlCol="0" fromWordArt="0" anchor="t" anchorCtr="0" forceAA="0" compatLnSpc="1">
+            <a:prstTxWarp prst="textNoShape">
+              <a:avLst/>
+            </a:prstTxWarp>
+            <a:spAutoFit/>
+          </a:bodyPr>
+          <a:lstStyle/>
+          <a:p>
+            <a:r>
+              <a:rPr lang="en-US" dirty="0"/>
+              <a:t>0.511 gal/min flow rate</a:t>
+            </a:r>
+          </a:p>
+        </p:txBody>
+      </p:sp>
+      <p:cxnSp>
+        <p:nvCxnSpPr>
+          <p:cNvPr id="5" name="Straight Arrow Connector 4">
+            <a:extLst>
+              <a:ext uri="{FF2B5EF4-FFF2-40B4-BE49-F238E27FC236}">
+                <a16:creationId xmlns:a16="http://schemas.microsoft.com/office/drawing/2014/main" id="{4BCD7A13-DBC8-40B1-2CB3-0775AD25A95E}"/>
+              </a:ext>
+            </a:extLst>
+          </p:cNvPr>
+          <p:cNvCxnSpPr/>
+          <p:nvPr/>
+        </p:nvCxnSpPr>
+        <p:spPr>
+          <a:xfrm flipH="1" flipV="1">
+            <a:off x="3622706" y="805956"/>
+            <a:ext cx="570186" cy="130066"/>
+          </a:xfrm>
+          <a:prstGeom prst="straightConnector1">
+            <a:avLst/>
+          </a:prstGeom>
+          <a:ln>
+            <a:tailEnd type="triangle"/>
+          </a:ln>
+        </p:spPr>
+        <p:style>
+          <a:lnRef idx="2">
+            <a:schemeClr val="accent1"/>
+          </a:lnRef>
+          <a:fillRef idx="0">
+            <a:schemeClr val="accent1"/>
+          </a:fillRef>
+          <a:effectRef idx="1">
+            <a:schemeClr val="accent1"/>
+          </a:effectRef>
+          <a:fontRef idx="minor">
+            <a:schemeClr val="tx1"/>
+          </a:fontRef>
+        </p:style>
+      </p:cxnSp>
     </p:spTree>
     <p:extLst>
       <p:ext uri="{BB962C8B-B14F-4D97-AF65-F5344CB8AC3E}">

--- a/resources/Thermal_loop_data/Thermal Loop Data Graphs.pptx
+++ b/resources/Thermal_loop_data/Thermal Loop Data Graphs.pptx
@@ -4598,7 +4598,7 @@
               <a:buChar char="-"/>
             </a:pPr>
             <a:r>
-              <a:rPr lang="en-US"/>
+              <a:rPr lang="en-US" dirty="0"/>
               <a:t>Middle valve open</a:t>
             </a:r>
           </a:p>
@@ -4608,7 +4608,7 @@
               <a:buChar char="-"/>
             </a:pPr>
             <a:r>
-              <a:rPr lang="en-US"/>
+              <a:rPr lang="en-US" dirty="0"/>
               <a:t>Upper valve open</a:t>
             </a:r>
           </a:p>
@@ -4618,7 +4618,7 @@
               <a:buChar char="-"/>
             </a:pPr>
             <a:r>
-              <a:rPr lang="en-US"/>
+              <a:rPr lang="en-US" dirty="0"/>
               <a:t>Heat exchange increments of 0.5 gal/min</a:t>
             </a:r>
           </a:p>
@@ -4670,14 +4670,22 @@
             <p:ph type="ctrTitle"/>
           </p:nvPr>
         </p:nvSpPr>
-        <p:spPr/>
-        <p:txBody>
-          <a:bodyPr/>
-          <a:lstStyle/>
-          <a:p>
-            <a:r>
-              <a:rPr lang="en-US"/>
-              <a:t>6-hour pump heat up</a:t>
+        <p:spPr>
+          <a:xfrm>
+            <a:off x="838200" y="415577"/>
+            <a:ext cx="9144000" cy="941827"/>
+          </a:xfrm>
+        </p:spPr>
+        <p:txBody>
+          <a:bodyPr>
+            <a:normAutofit fontScale="90000"/>
+          </a:bodyPr>
+          <a:lstStyle/>
+          <a:p>
+            <a:pPr algn="l"/>
+            <a:r>
+              <a:rPr lang="en-US" dirty="0"/>
+              <a:t>Test #1: 6-hour pump heat up</a:t>
             </a:r>
           </a:p>
         </p:txBody>
@@ -4698,7 +4706,12 @@
             <p:ph type="subTitle" idx="1"/>
           </p:nvPr>
         </p:nvSpPr>
-        <p:spPr/>
+        <p:spPr>
+          <a:xfrm>
+            <a:off x="-1042219" y="5460335"/>
+            <a:ext cx="9144000" cy="1655762"/>
+          </a:xfrm>
+        </p:spPr>
         <p:txBody>
           <a:bodyPr vert="horz" lIns="91440" tIns="45720" rIns="91440" bIns="45720" rtlCol="0" anchor="t">
             <a:normAutofit/>
@@ -4715,6 +4728,259 @@
           </a:p>
         </p:txBody>
       </p:sp>
+      <p:sp>
+        <p:nvSpPr>
+          <p:cNvPr id="5" name="Content Placeholder 2">
+            <a:extLst>
+              <a:ext uri="{FF2B5EF4-FFF2-40B4-BE49-F238E27FC236}">
+                <a16:creationId xmlns:a16="http://schemas.microsoft.com/office/drawing/2014/main" id="{7753F99E-0896-43BA-739A-5E4CC5A08380}"/>
+              </a:ext>
+            </a:extLst>
+          </p:cNvPr>
+          <p:cNvSpPr txBox="1">
+            <a:spLocks/>
+          </p:cNvSpPr>
+          <p:nvPr/>
+        </p:nvSpPr>
+        <p:spPr>
+          <a:xfrm>
+            <a:off x="838200" y="1825625"/>
+            <a:ext cx="4702521" cy="4351338"/>
+          </a:xfrm>
+          <a:prstGeom prst="rect">
+            <a:avLst/>
+          </a:prstGeom>
+        </p:spPr>
+        <p:txBody>
+          <a:bodyPr vert="horz" lIns="91440" tIns="45720" rIns="91440" bIns="45720" rtlCol="0" anchor="t">
+            <a:normAutofit/>
+          </a:bodyPr>
+          <a:lstStyle>
+            <a:lvl1pPr marL="0" indent="0" algn="ctr" defTabSz="914400" rtl="0" eaLnBrk="1" latinLnBrk="0" hangingPunct="1">
+              <a:lnSpc>
+                <a:spcPct val="90000"/>
+              </a:lnSpc>
+              <a:spcBef>
+                <a:spcPts val="1000"/>
+              </a:spcBef>
+              <a:buFont typeface="Arial" panose="020B0604020202020204" pitchFamily="34" charset="0"/>
+              <a:buNone/>
+              <a:defRPr sz="2400" kern="1200">
+                <a:solidFill>
+                  <a:schemeClr val="tx1"/>
+                </a:solidFill>
+                <a:latin typeface="+mn-lt"/>
+                <a:ea typeface="+mn-ea"/>
+                <a:cs typeface="+mn-cs"/>
+              </a:defRPr>
+            </a:lvl1pPr>
+            <a:lvl2pPr marL="457200" indent="0" algn="ctr" defTabSz="914400" rtl="0" eaLnBrk="1" latinLnBrk="0" hangingPunct="1">
+              <a:lnSpc>
+                <a:spcPct val="90000"/>
+              </a:lnSpc>
+              <a:spcBef>
+                <a:spcPts val="500"/>
+              </a:spcBef>
+              <a:buFont typeface="Arial" panose="020B0604020202020204" pitchFamily="34" charset="0"/>
+              <a:buNone/>
+              <a:defRPr sz="2000" kern="1200">
+                <a:solidFill>
+                  <a:schemeClr val="tx1"/>
+                </a:solidFill>
+                <a:latin typeface="+mn-lt"/>
+                <a:ea typeface="+mn-ea"/>
+                <a:cs typeface="+mn-cs"/>
+              </a:defRPr>
+            </a:lvl2pPr>
+            <a:lvl3pPr marL="914400" indent="0" algn="ctr" defTabSz="914400" rtl="0" eaLnBrk="1" latinLnBrk="0" hangingPunct="1">
+              <a:lnSpc>
+                <a:spcPct val="90000"/>
+              </a:lnSpc>
+              <a:spcBef>
+                <a:spcPts val="500"/>
+              </a:spcBef>
+              <a:buFont typeface="Arial" panose="020B0604020202020204" pitchFamily="34" charset="0"/>
+              <a:buNone/>
+              <a:defRPr sz="1800" kern="1200">
+                <a:solidFill>
+                  <a:schemeClr val="tx1"/>
+                </a:solidFill>
+                <a:latin typeface="+mn-lt"/>
+                <a:ea typeface="+mn-ea"/>
+                <a:cs typeface="+mn-cs"/>
+              </a:defRPr>
+            </a:lvl3pPr>
+            <a:lvl4pPr marL="1371600" indent="0" algn="ctr" defTabSz="914400" rtl="0" eaLnBrk="1" latinLnBrk="0" hangingPunct="1">
+              <a:lnSpc>
+                <a:spcPct val="90000"/>
+              </a:lnSpc>
+              <a:spcBef>
+                <a:spcPts val="500"/>
+              </a:spcBef>
+              <a:buFont typeface="Arial" panose="020B0604020202020204" pitchFamily="34" charset="0"/>
+              <a:buNone/>
+              <a:defRPr sz="1600" kern="1200">
+                <a:solidFill>
+                  <a:schemeClr val="tx1"/>
+                </a:solidFill>
+                <a:latin typeface="+mn-lt"/>
+                <a:ea typeface="+mn-ea"/>
+                <a:cs typeface="+mn-cs"/>
+              </a:defRPr>
+            </a:lvl4pPr>
+            <a:lvl5pPr marL="1828800" indent="0" algn="ctr" defTabSz="914400" rtl="0" eaLnBrk="1" latinLnBrk="0" hangingPunct="1">
+              <a:lnSpc>
+                <a:spcPct val="90000"/>
+              </a:lnSpc>
+              <a:spcBef>
+                <a:spcPts val="500"/>
+              </a:spcBef>
+              <a:buFont typeface="Arial" panose="020B0604020202020204" pitchFamily="34" charset="0"/>
+              <a:buNone/>
+              <a:defRPr sz="1600" kern="1200">
+                <a:solidFill>
+                  <a:schemeClr val="tx1"/>
+                </a:solidFill>
+                <a:latin typeface="+mn-lt"/>
+                <a:ea typeface="+mn-ea"/>
+                <a:cs typeface="+mn-cs"/>
+              </a:defRPr>
+            </a:lvl5pPr>
+            <a:lvl6pPr marL="2286000" indent="0" algn="ctr" defTabSz="914400" rtl="0" eaLnBrk="1" latinLnBrk="0" hangingPunct="1">
+              <a:lnSpc>
+                <a:spcPct val="90000"/>
+              </a:lnSpc>
+              <a:spcBef>
+                <a:spcPts val="500"/>
+              </a:spcBef>
+              <a:buFont typeface="Arial" panose="020B0604020202020204" pitchFamily="34" charset="0"/>
+              <a:buNone/>
+              <a:defRPr sz="1600" kern="1200">
+                <a:solidFill>
+                  <a:schemeClr val="tx1"/>
+                </a:solidFill>
+                <a:latin typeface="+mn-lt"/>
+                <a:ea typeface="+mn-ea"/>
+                <a:cs typeface="+mn-cs"/>
+              </a:defRPr>
+            </a:lvl6pPr>
+            <a:lvl7pPr marL="2743200" indent="0" algn="ctr" defTabSz="914400" rtl="0" eaLnBrk="1" latinLnBrk="0" hangingPunct="1">
+              <a:lnSpc>
+                <a:spcPct val="90000"/>
+              </a:lnSpc>
+              <a:spcBef>
+                <a:spcPts val="500"/>
+              </a:spcBef>
+              <a:buFont typeface="Arial" panose="020B0604020202020204" pitchFamily="34" charset="0"/>
+              <a:buNone/>
+              <a:defRPr sz="1600" kern="1200">
+                <a:solidFill>
+                  <a:schemeClr val="tx1"/>
+                </a:solidFill>
+                <a:latin typeface="+mn-lt"/>
+                <a:ea typeface="+mn-ea"/>
+                <a:cs typeface="+mn-cs"/>
+              </a:defRPr>
+            </a:lvl7pPr>
+            <a:lvl8pPr marL="3200400" indent="0" algn="ctr" defTabSz="914400" rtl="0" eaLnBrk="1" latinLnBrk="0" hangingPunct="1">
+              <a:lnSpc>
+                <a:spcPct val="90000"/>
+              </a:lnSpc>
+              <a:spcBef>
+                <a:spcPts val="500"/>
+              </a:spcBef>
+              <a:buFont typeface="Arial" panose="020B0604020202020204" pitchFamily="34" charset="0"/>
+              <a:buNone/>
+              <a:defRPr sz="1600" kern="1200">
+                <a:solidFill>
+                  <a:schemeClr val="tx1"/>
+                </a:solidFill>
+                <a:latin typeface="+mn-lt"/>
+                <a:ea typeface="+mn-ea"/>
+                <a:cs typeface="+mn-cs"/>
+              </a:defRPr>
+            </a:lvl8pPr>
+            <a:lvl9pPr marL="3657600" indent="0" algn="ctr" defTabSz="914400" rtl="0" eaLnBrk="1" latinLnBrk="0" hangingPunct="1">
+              <a:lnSpc>
+                <a:spcPct val="90000"/>
+              </a:lnSpc>
+              <a:spcBef>
+                <a:spcPts val="500"/>
+              </a:spcBef>
+              <a:buFont typeface="Arial" panose="020B0604020202020204" pitchFamily="34" charset="0"/>
+              <a:buNone/>
+              <a:defRPr sz="1600" kern="1200">
+                <a:solidFill>
+                  <a:schemeClr val="tx1"/>
+                </a:solidFill>
+                <a:latin typeface="+mn-lt"/>
+                <a:ea typeface="+mn-ea"/>
+                <a:cs typeface="+mn-cs"/>
+              </a:defRPr>
+            </a:lvl9pPr>
+          </a:lstStyle>
+          <a:p>
+            <a:pPr marL="342900" indent="-342900" algn="l">
+              <a:buFont typeface="Arial" panose="020B0604020202020204" pitchFamily="34" charset="0"/>
+              <a:buChar char="•"/>
+            </a:pPr>
+            <a:r>
+              <a:rPr lang="en-US" dirty="0"/>
+              <a:t>Middle valve open</a:t>
+            </a:r>
+          </a:p>
+          <a:p>
+            <a:pPr marL="342900" indent="-342900" algn="l">
+              <a:buFont typeface="Arial" panose="020B0604020202020204" pitchFamily="34" charset="0"/>
+              <a:buChar char="•"/>
+            </a:pPr>
+            <a:r>
+              <a:rPr lang="en-US" dirty="0"/>
+              <a:t>Upper valve open</a:t>
+            </a:r>
+          </a:p>
+          <a:p>
+            <a:pPr marL="342900" indent="-342900" algn="l">
+              <a:buFont typeface="Arial" panose="020B0604020202020204" pitchFamily="34" charset="0"/>
+              <a:buChar char="•"/>
+            </a:pPr>
+            <a:r>
+              <a:rPr lang="en-US" dirty="0"/>
+              <a:t>Heat exchange increments of 0.5 gal/min</a:t>
+            </a:r>
+          </a:p>
+        </p:txBody>
+      </p:sp>
+      <p:pic>
+        <p:nvPicPr>
+          <p:cNvPr id="6" name="Picture 5" descr="A graph of a temperature&#10;&#10;AI-generated content may be incorrect.">
+            <a:extLst>
+              <a:ext uri="{FF2B5EF4-FFF2-40B4-BE49-F238E27FC236}">
+                <a16:creationId xmlns:a16="http://schemas.microsoft.com/office/drawing/2014/main" id="{954AFF80-188C-AF7F-BFF2-18DB14683BCA}"/>
+              </a:ext>
+            </a:extLst>
+          </p:cNvPr>
+          <p:cNvPicPr>
+            <a:picLocks noChangeAspect="1"/>
+          </p:cNvPicPr>
+          <p:nvPr/>
+        </p:nvPicPr>
+        <p:blipFill>
+          <a:blip r:embed="rId3"/>
+          <a:stretch>
+            <a:fillRect/>
+          </a:stretch>
+        </p:blipFill>
+        <p:spPr>
+          <a:xfrm>
+            <a:off x="5776111" y="1363517"/>
+            <a:ext cx="5930019" cy="3883225"/>
+          </a:xfrm>
+          <a:prstGeom prst="rect">
+            <a:avLst/>
+          </a:prstGeom>
+        </p:spPr>
+      </p:pic>
     </p:spTree>
     <p:extLst>
       <p:ext uri="{BB962C8B-B14F-4D97-AF65-F5344CB8AC3E}">
@@ -4745,12 +5011,66 @@
           <a:chExt cx="0" cy="0"/>
         </a:xfrm>
       </p:grpSpPr>
+      <p:sp>
+        <p:nvSpPr>
+          <p:cNvPr id="3" name="Title 1">
+            <a:extLst>
+              <a:ext uri="{FF2B5EF4-FFF2-40B4-BE49-F238E27FC236}">
+                <a16:creationId xmlns:a16="http://schemas.microsoft.com/office/drawing/2014/main" id="{2C478BE5-06DD-42AD-ED22-AA822C3994B7}"/>
+              </a:ext>
+            </a:extLst>
+          </p:cNvPr>
+          <p:cNvSpPr txBox="1">
+            <a:spLocks/>
+          </p:cNvSpPr>
+          <p:nvPr/>
+        </p:nvSpPr>
+        <p:spPr>
+          <a:xfrm>
+            <a:off x="838200" y="415577"/>
+            <a:ext cx="9144000" cy="941827"/>
+          </a:xfrm>
+          <a:prstGeom prst="rect">
+            <a:avLst/>
+          </a:prstGeom>
+        </p:spPr>
+        <p:txBody>
+          <a:bodyPr>
+            <a:normAutofit fontScale="97500"/>
+          </a:bodyPr>
+          <a:lstStyle>
+            <a:lvl1pPr algn="l" defTabSz="914400" rtl="0" eaLnBrk="1" latinLnBrk="0" hangingPunct="1">
+              <a:lnSpc>
+                <a:spcPct val="90000"/>
+              </a:lnSpc>
+              <a:spcBef>
+                <a:spcPct val="0"/>
+              </a:spcBef>
+              <a:buNone/>
+              <a:defRPr sz="4400" kern="1200">
+                <a:solidFill>
+                  <a:schemeClr val="tx1"/>
+                </a:solidFill>
+                <a:latin typeface="+mj-lt"/>
+                <a:ea typeface="+mj-ea"/>
+                <a:cs typeface="+mj-cs"/>
+              </a:defRPr>
+            </a:lvl1pPr>
+          </a:lstStyle>
+          <a:p>
+            <a:r>
+              <a:rPr lang="en-US" dirty="0"/>
+              <a:t>Test #1: Additional Slide</a:t>
+            </a:r>
+          </a:p>
+        </p:txBody>
+      </p:sp>
       <p:pic>
         <p:nvPicPr>
-          <p:cNvPr id="2" name="Picture 1" descr="A graph of a temperature&#10;&#10;AI-generated content may be incorrect.">
+          <p:cNvPr id="4" name="Picture 3" descr="A graph of a temperature&#10;&#10;AI-generated content may be incorrect.">
             <a:extLst>
               <a:ext uri="{FF2B5EF4-FFF2-40B4-BE49-F238E27FC236}">
-                <a16:creationId xmlns:a16="http://schemas.microsoft.com/office/drawing/2014/main" id="{DECCEA62-6FD4-7FAC-BE7B-36040B266B5A}"/>
+                <a16:creationId xmlns:a16="http://schemas.microsoft.com/office/drawing/2014/main" id="{F0E7EDE5-FEE4-C0D4-EA4E-2BCB3CA63447}"/>
               </a:ext>
             </a:extLst>
           </p:cNvPr>
@@ -4767,8 +5087,8 @@
         </p:blipFill>
         <p:spPr>
           <a:xfrm>
-            <a:off x="881062" y="0"/>
-            <a:ext cx="10429875" cy="6858000"/>
+            <a:off x="5884239" y="1648632"/>
+            <a:ext cx="6066141" cy="3988696"/>
           </a:xfrm>
           <a:prstGeom prst="rect">
             <a:avLst/>
@@ -4930,8 +5250,8 @@
         </p:blipFill>
         <p:spPr>
           <a:xfrm>
-            <a:off x="904609" y="0"/>
-            <a:ext cx="10382782" cy="6858000"/>
+            <a:off x="805758" y="-1"/>
+            <a:ext cx="10481633" cy="6923293"/>
           </a:xfrm>
           <a:prstGeom prst="rect">
             <a:avLst/>

--- a/resources/Thermal_loop_data/Thermal Loop Data Graphs.pptx
+++ b/resources/Thermal_loop_data/Thermal Loop Data Graphs.pptx
@@ -6,28 +6,12 @@
   </p:sldMasterIdLst>
   <p:sldIdLst>
     <p:sldId id="256" r:id="rId2"/>
-    <p:sldId id="263" r:id="rId3"/>
-    <p:sldId id="276" r:id="rId4"/>
-    <p:sldId id="257" r:id="rId5"/>
-    <p:sldId id="260" r:id="rId6"/>
-    <p:sldId id="259" r:id="rId7"/>
-    <p:sldId id="261" r:id="rId8"/>
-    <p:sldId id="258" r:id="rId9"/>
-    <p:sldId id="262" r:id="rId10"/>
-    <p:sldId id="277" r:id="rId11"/>
-    <p:sldId id="264" r:id="rId12"/>
-    <p:sldId id="267" r:id="rId13"/>
-    <p:sldId id="265" r:id="rId14"/>
-    <p:sldId id="268" r:id="rId15"/>
-    <p:sldId id="266" r:id="rId16"/>
-    <p:sldId id="269" r:id="rId17"/>
-    <p:sldId id="278" r:id="rId18"/>
-    <p:sldId id="270" r:id="rId19"/>
-    <p:sldId id="271" r:id="rId20"/>
-    <p:sldId id="272" r:id="rId21"/>
-    <p:sldId id="274" r:id="rId22"/>
-    <p:sldId id="273" r:id="rId23"/>
-    <p:sldId id="275" r:id="rId24"/>
+    <p:sldId id="257" r:id="rId3"/>
+    <p:sldId id="261" r:id="rId4"/>
+    <p:sldId id="279" r:id="rId5"/>
+    <p:sldId id="280" r:id="rId6"/>
+    <p:sldId id="281" r:id="rId7"/>
+    <p:sldId id="282" r:id="rId8"/>
   </p:sldIdLst>
   <p:sldSz cx="12192000" cy="6858000"/>
   <p:notesSz cx="6858000" cy="9144000"/>
@@ -139,7 +123,7 @@
   <p1510:revLst>
     <p1510:client id="{1A9F580B-8D25-E87E-9F25-5CFA58A26164}" v="872" dt="2025-07-22T19:02:02.483"/>
     <p1510:client id="{3D7E9EA9-2484-D84D-929C-E4B2F03CBF6D}" v="15" dt="2025-07-22T19:14:33.991"/>
-    <p1510:client id="{4F603E76-1197-D0B5-5191-D2D5D4848DC7}" v="44" dt="2025-07-22T19:21:43.423"/>
+    <p1510:client id="{4F603E76-1197-D0B5-5191-D2D5D4848DC7}" v="617" dt="2025-07-22T20:24:25.414"/>
   </p1510:revLst>
 </p1510:revInfo>
 </file>
@@ -3039,113 +3023,7 @@
 </p:sld>
 </file>
 
-<file path=ppt/slides/slide10.xml><?xml version="1.0" encoding="utf-8"?>
-<p:sld xmlns:a="http://schemas.openxmlformats.org/drawingml/2006/main" xmlns:r="http://schemas.openxmlformats.org/officeDocument/2006/relationships" xmlns:p="http://schemas.openxmlformats.org/presentationml/2006/main">
-  <p:cSld>
-    <p:spTree>
-      <p:nvGrpSpPr>
-        <p:cNvPr id="1" name="">
-          <a:extLst>
-            <a:ext uri="{FF2B5EF4-FFF2-40B4-BE49-F238E27FC236}">
-              <a16:creationId xmlns:a16="http://schemas.microsoft.com/office/drawing/2014/main" id="{D8AC270A-1C18-8584-3CDC-5197BF8B00A9}"/>
-            </a:ext>
-          </a:extLst>
-        </p:cNvPr>
-        <p:cNvGrpSpPr/>
-        <p:nvPr/>
-      </p:nvGrpSpPr>
-      <p:grpSpPr>
-        <a:xfrm>
-          <a:off x="0" y="0"/>
-          <a:ext cx="0" cy="0"/>
-          <a:chOff x="0" y="0"/>
-          <a:chExt cx="0" cy="0"/>
-        </a:xfrm>
-      </p:grpSpPr>
-      <p:sp>
-        <p:nvSpPr>
-          <p:cNvPr id="2" name="Title 1">
-            <a:extLst>
-              <a:ext uri="{FF2B5EF4-FFF2-40B4-BE49-F238E27FC236}">
-                <a16:creationId xmlns:a16="http://schemas.microsoft.com/office/drawing/2014/main" id="{AFD2806E-E06C-3D5D-B7CC-3B0241CB6B8D}"/>
-              </a:ext>
-            </a:extLst>
-          </p:cNvPr>
-          <p:cNvSpPr>
-            <a:spLocks noGrp="1"/>
-          </p:cNvSpPr>
-          <p:nvPr>
-            <p:ph type="title"/>
-          </p:nvPr>
-        </p:nvSpPr>
-        <p:spPr/>
-        <p:txBody>
-          <a:bodyPr/>
-          <a:lstStyle/>
-          <a:p>
-            <a:r>
-              <a:rPr lang="en-US"/>
-              <a:t>Pump Heat Up Data (slides 11-16)</a:t>
-            </a:r>
-          </a:p>
-        </p:txBody>
-      </p:sp>
-      <p:sp>
-        <p:nvSpPr>
-          <p:cNvPr id="3" name="Content Placeholder 2">
-            <a:extLst>
-              <a:ext uri="{FF2B5EF4-FFF2-40B4-BE49-F238E27FC236}">
-                <a16:creationId xmlns:a16="http://schemas.microsoft.com/office/drawing/2014/main" id="{2C99DD7A-F29D-D7BE-6D84-E0EF6E925CB5}"/>
-              </a:ext>
-            </a:extLst>
-          </p:cNvPr>
-          <p:cNvSpPr>
-            <a:spLocks noGrp="1"/>
-          </p:cNvSpPr>
-          <p:nvPr>
-            <p:ph idx="1"/>
-          </p:nvPr>
-        </p:nvSpPr>
-        <p:spPr/>
-        <p:txBody>
-          <a:bodyPr vert="horz" lIns="91440" tIns="45720" rIns="91440" bIns="45720" rtlCol="0" anchor="t">
-            <a:normAutofit/>
-          </a:bodyPr>
-          <a:lstStyle/>
-          <a:p>
-            <a:r>
-              <a:rPr lang="en-US"/>
-              <a:t>Middle valve closed</a:t>
-            </a:r>
-          </a:p>
-          <a:p>
-            <a:r>
-              <a:rPr lang="en-US"/>
-              <a:t>Upper valve open</a:t>
-            </a:r>
-          </a:p>
-          <a:p>
-            <a:r>
-              <a:rPr lang="en-US"/>
-              <a:t>Heat exchanger 0.5 gal/min at 6 hours</a:t>
-            </a:r>
-          </a:p>
-        </p:txBody>
-      </p:sp>
-    </p:spTree>
-    <p:extLst>
-      <p:ext uri="{BB962C8B-B14F-4D97-AF65-F5344CB8AC3E}">
-        <p14:creationId xmlns:p14="http://schemas.microsoft.com/office/powerpoint/2010/main" val="388464789"/>
-      </p:ext>
-    </p:extLst>
-  </p:cSld>
-  <p:clrMapOvr>
-    <a:masterClrMapping/>
-  </p:clrMapOvr>
-</p:sld>
-</file>
-
-<file path=ppt/slides/slide11.xml><?xml version="1.0" encoding="utf-8"?>
+<file path=ppt/slides/slide2.xml><?xml version="1.0" encoding="utf-8"?>
 <p:sld xmlns:a="http://schemas.openxmlformats.org/drawingml/2006/main" xmlns:r="http://schemas.openxmlformats.org/officeDocument/2006/relationships" xmlns:p="http://schemas.openxmlformats.org/presentationml/2006/main">
   <p:cSld>
     <p:spTree>
@@ -3167,7 +3045,7 @@
           <p:cNvPr id="2" name="Title 1">
             <a:extLst>
               <a:ext uri="{FF2B5EF4-FFF2-40B4-BE49-F238E27FC236}">
-                <a16:creationId xmlns:a16="http://schemas.microsoft.com/office/drawing/2014/main" id="{BF21C3F9-0172-AF2A-9893-9EF3F3CFE8BF}"/>
+                <a16:creationId xmlns:a16="http://schemas.microsoft.com/office/drawing/2014/main" id="{1D1E179D-8CF1-679E-FD5D-AFDE7EF74FDB}"/>
               </a:ext>
             </a:extLst>
           </p:cNvPr>
@@ -3178,87 +3056,257 @@
             <p:ph type="ctrTitle"/>
           </p:nvPr>
         </p:nvSpPr>
-        <p:spPr/>
-        <p:txBody>
-          <a:bodyPr/>
-          <a:lstStyle/>
-          <a:p>
-            <a:r>
-              <a:rPr lang="en-US"/>
-              <a:t>6-hour pump heat up</a:t>
-            </a:r>
-          </a:p>
-        </p:txBody>
-      </p:sp>
-      <p:sp>
-        <p:nvSpPr>
-          <p:cNvPr id="3" name="Subtitle 2">
+        <p:spPr>
+          <a:xfrm>
+            <a:off x="-162526" y="174073"/>
+            <a:ext cx="12155424" cy="985520"/>
+          </a:xfrm>
+        </p:spPr>
+        <p:txBody>
+          <a:bodyPr>
+            <a:normAutofit/>
+          </a:bodyPr>
+          <a:lstStyle/>
+          <a:p>
+            <a:r>
+              <a:rPr lang="en-US" dirty="0"/>
+              <a:t>Test #1: Pump Heat up</a:t>
+            </a:r>
+          </a:p>
+        </p:txBody>
+      </p:sp>
+      <p:sp>
+        <p:nvSpPr>
+          <p:cNvPr id="5" name="Content Placeholder 2">
             <a:extLst>
               <a:ext uri="{FF2B5EF4-FFF2-40B4-BE49-F238E27FC236}">
-                <a16:creationId xmlns:a16="http://schemas.microsoft.com/office/drawing/2014/main" id="{4EF39B82-2759-3936-F868-278CA0DCD0D4}"/>
+                <a16:creationId xmlns:a16="http://schemas.microsoft.com/office/drawing/2014/main" id="{99121C12-D473-6940-FFEF-6D8C11156B43}"/>
               </a:ext>
             </a:extLst>
           </p:cNvPr>
-          <p:cNvSpPr>
-            <a:spLocks noGrp="1"/>
-          </p:cNvSpPr>
-          <p:nvPr>
-            <p:ph type="subTitle" idx="1"/>
-          </p:nvPr>
-        </p:nvSpPr>
-        <p:spPr/>
+          <p:cNvSpPr txBox="1">
+            <a:spLocks/>
+          </p:cNvSpPr>
+          <p:nvPr/>
+        </p:nvSpPr>
+        <p:spPr>
+          <a:xfrm>
+            <a:off x="-102" y="2203887"/>
+            <a:ext cx="5750542" cy="3583862"/>
+          </a:xfrm>
+          <a:prstGeom prst="rect">
+            <a:avLst/>
+          </a:prstGeom>
+        </p:spPr>
         <p:txBody>
           <a:bodyPr vert="horz" lIns="91440" tIns="45720" rIns="91440" bIns="45720" rtlCol="0" anchor="t">
             <a:normAutofit/>
           </a:bodyPr>
-          <a:lstStyle/>
-          <a:p>
-            <a:r>
-              <a:rPr lang="en-US" dirty="0">
-                <a:hlinkClick r:id="rId2"/>
-              </a:rPr>
-              <a:t>PDF Graph Download</a:t>
-            </a:r>
+          <a:lstStyle>
+            <a:lvl1pPr marL="0" indent="0" algn="ctr" defTabSz="914400" rtl="0" eaLnBrk="1" latinLnBrk="0" hangingPunct="1">
+              <a:lnSpc>
+                <a:spcPct val="90000"/>
+              </a:lnSpc>
+              <a:spcBef>
+                <a:spcPts val="1000"/>
+              </a:spcBef>
+              <a:buFont typeface="Arial" panose="020B0604020202020204" pitchFamily="34" charset="0"/>
+              <a:buNone/>
+              <a:defRPr sz="2400" kern="1200">
+                <a:solidFill>
+                  <a:schemeClr val="tx1"/>
+                </a:solidFill>
+                <a:latin typeface="+mn-lt"/>
+                <a:ea typeface="+mn-ea"/>
+                <a:cs typeface="+mn-cs"/>
+              </a:defRPr>
+            </a:lvl1pPr>
+            <a:lvl2pPr marL="457200" indent="0" algn="ctr" defTabSz="914400" rtl="0" eaLnBrk="1" latinLnBrk="0" hangingPunct="1">
+              <a:lnSpc>
+                <a:spcPct val="90000"/>
+              </a:lnSpc>
+              <a:spcBef>
+                <a:spcPts val="500"/>
+              </a:spcBef>
+              <a:buFont typeface="Arial" panose="020B0604020202020204" pitchFamily="34" charset="0"/>
+              <a:buNone/>
+              <a:defRPr sz="2000" kern="1200">
+                <a:solidFill>
+                  <a:schemeClr val="tx1"/>
+                </a:solidFill>
+                <a:latin typeface="+mn-lt"/>
+                <a:ea typeface="+mn-ea"/>
+                <a:cs typeface="+mn-cs"/>
+              </a:defRPr>
+            </a:lvl2pPr>
+            <a:lvl3pPr marL="914400" indent="0" algn="ctr" defTabSz="914400" rtl="0" eaLnBrk="1" latinLnBrk="0" hangingPunct="1">
+              <a:lnSpc>
+                <a:spcPct val="90000"/>
+              </a:lnSpc>
+              <a:spcBef>
+                <a:spcPts val="500"/>
+              </a:spcBef>
+              <a:buFont typeface="Arial" panose="020B0604020202020204" pitchFamily="34" charset="0"/>
+              <a:buNone/>
+              <a:defRPr sz="1800" kern="1200">
+                <a:solidFill>
+                  <a:schemeClr val="tx1"/>
+                </a:solidFill>
+                <a:latin typeface="+mn-lt"/>
+                <a:ea typeface="+mn-ea"/>
+                <a:cs typeface="+mn-cs"/>
+              </a:defRPr>
+            </a:lvl3pPr>
+            <a:lvl4pPr marL="1371600" indent="0" algn="ctr" defTabSz="914400" rtl="0" eaLnBrk="1" latinLnBrk="0" hangingPunct="1">
+              <a:lnSpc>
+                <a:spcPct val="90000"/>
+              </a:lnSpc>
+              <a:spcBef>
+                <a:spcPts val="500"/>
+              </a:spcBef>
+              <a:buFont typeface="Arial" panose="020B0604020202020204" pitchFamily="34" charset="0"/>
+              <a:buNone/>
+              <a:defRPr sz="1600" kern="1200">
+                <a:solidFill>
+                  <a:schemeClr val="tx1"/>
+                </a:solidFill>
+                <a:latin typeface="+mn-lt"/>
+                <a:ea typeface="+mn-ea"/>
+                <a:cs typeface="+mn-cs"/>
+              </a:defRPr>
+            </a:lvl4pPr>
+            <a:lvl5pPr marL="1828800" indent="0" algn="ctr" defTabSz="914400" rtl="0" eaLnBrk="1" latinLnBrk="0" hangingPunct="1">
+              <a:lnSpc>
+                <a:spcPct val="90000"/>
+              </a:lnSpc>
+              <a:spcBef>
+                <a:spcPts val="500"/>
+              </a:spcBef>
+              <a:buFont typeface="Arial" panose="020B0604020202020204" pitchFamily="34" charset="0"/>
+              <a:buNone/>
+              <a:defRPr sz="1600" kern="1200">
+                <a:solidFill>
+                  <a:schemeClr val="tx1"/>
+                </a:solidFill>
+                <a:latin typeface="+mn-lt"/>
+                <a:ea typeface="+mn-ea"/>
+                <a:cs typeface="+mn-cs"/>
+              </a:defRPr>
+            </a:lvl5pPr>
+            <a:lvl6pPr marL="2286000" indent="0" algn="ctr" defTabSz="914400" rtl="0" eaLnBrk="1" latinLnBrk="0" hangingPunct="1">
+              <a:lnSpc>
+                <a:spcPct val="90000"/>
+              </a:lnSpc>
+              <a:spcBef>
+                <a:spcPts val="500"/>
+              </a:spcBef>
+              <a:buFont typeface="Arial" panose="020B0604020202020204" pitchFamily="34" charset="0"/>
+              <a:buNone/>
+              <a:defRPr sz="1600" kern="1200">
+                <a:solidFill>
+                  <a:schemeClr val="tx1"/>
+                </a:solidFill>
+                <a:latin typeface="+mn-lt"/>
+                <a:ea typeface="+mn-ea"/>
+                <a:cs typeface="+mn-cs"/>
+              </a:defRPr>
+            </a:lvl6pPr>
+            <a:lvl7pPr marL="2743200" indent="0" algn="ctr" defTabSz="914400" rtl="0" eaLnBrk="1" latinLnBrk="0" hangingPunct="1">
+              <a:lnSpc>
+                <a:spcPct val="90000"/>
+              </a:lnSpc>
+              <a:spcBef>
+                <a:spcPts val="500"/>
+              </a:spcBef>
+              <a:buFont typeface="Arial" panose="020B0604020202020204" pitchFamily="34" charset="0"/>
+              <a:buNone/>
+              <a:defRPr sz="1600" kern="1200">
+                <a:solidFill>
+                  <a:schemeClr val="tx1"/>
+                </a:solidFill>
+                <a:latin typeface="+mn-lt"/>
+                <a:ea typeface="+mn-ea"/>
+                <a:cs typeface="+mn-cs"/>
+              </a:defRPr>
+            </a:lvl7pPr>
+            <a:lvl8pPr marL="3200400" indent="0" algn="ctr" defTabSz="914400" rtl="0" eaLnBrk="1" latinLnBrk="0" hangingPunct="1">
+              <a:lnSpc>
+                <a:spcPct val="90000"/>
+              </a:lnSpc>
+              <a:spcBef>
+                <a:spcPts val="500"/>
+              </a:spcBef>
+              <a:buFont typeface="Arial" panose="020B0604020202020204" pitchFamily="34" charset="0"/>
+              <a:buNone/>
+              <a:defRPr sz="1600" kern="1200">
+                <a:solidFill>
+                  <a:schemeClr val="tx1"/>
+                </a:solidFill>
+                <a:latin typeface="+mn-lt"/>
+                <a:ea typeface="+mn-ea"/>
+                <a:cs typeface="+mn-cs"/>
+              </a:defRPr>
+            </a:lvl8pPr>
+            <a:lvl9pPr marL="3657600" indent="0" algn="ctr" defTabSz="914400" rtl="0" eaLnBrk="1" latinLnBrk="0" hangingPunct="1">
+              <a:lnSpc>
+                <a:spcPct val="90000"/>
+              </a:lnSpc>
+              <a:spcBef>
+                <a:spcPts val="500"/>
+              </a:spcBef>
+              <a:buFont typeface="Arial" panose="020B0604020202020204" pitchFamily="34" charset="0"/>
+              <a:buNone/>
+              <a:defRPr sz="1600" kern="1200">
+                <a:solidFill>
+                  <a:schemeClr val="tx1"/>
+                </a:solidFill>
+                <a:latin typeface="+mn-lt"/>
+                <a:ea typeface="+mn-ea"/>
+                <a:cs typeface="+mn-cs"/>
+              </a:defRPr>
+            </a:lvl9pPr>
+          </a:lstStyle>
+          <a:p>
+            <a:pPr>
+              <a:buFont typeface="Calibri" panose="020B0604020202020204" pitchFamily="34" charset="0"/>
+              <a:buChar char="-"/>
+            </a:pPr>
+            <a:r>
+              <a:rPr lang="en-US" sz="2800" dirty="0"/>
+              <a:t>Middle valve open</a:t>
+            </a:r>
+          </a:p>
+          <a:p>
+            <a:pPr>
+              <a:buFont typeface="Calibri" panose="020B0604020202020204" pitchFamily="34" charset="0"/>
+              <a:buChar char="-"/>
+            </a:pPr>
+            <a:r>
+              <a:rPr lang="en-US" sz="2800" dirty="0"/>
+              <a:t>Upper valve open</a:t>
+            </a:r>
+          </a:p>
+          <a:p>
+            <a:pPr>
+              <a:buFont typeface="Calibri" panose="020B0604020202020204" pitchFamily="34" charset="0"/>
+              <a:buChar char="-"/>
+            </a:pPr>
+            <a:r>
+              <a:rPr lang="en-US" sz="2800" dirty="0"/>
+              <a:t>Heat exchange increments of 0.5 gal/min every 30 mins starting at hour 6</a:t>
+            </a:r>
+          </a:p>
+          <a:p>
             <a:endParaRPr lang="en-US" dirty="0"/>
           </a:p>
         </p:txBody>
       </p:sp>
-    </p:spTree>
-    <p:extLst>
-      <p:ext uri="{BB962C8B-B14F-4D97-AF65-F5344CB8AC3E}">
-        <p14:creationId xmlns:p14="http://schemas.microsoft.com/office/powerpoint/2010/main" val="2735073065"/>
-      </p:ext>
-    </p:extLst>
-  </p:cSld>
-  <p:clrMapOvr>
-    <a:masterClrMapping/>
-  </p:clrMapOvr>
-</p:sld>
-</file>
-
-<file path=ppt/slides/slide12.xml><?xml version="1.0" encoding="utf-8"?>
-<p:sld xmlns:a="http://schemas.openxmlformats.org/drawingml/2006/main" xmlns:r="http://schemas.openxmlformats.org/officeDocument/2006/relationships" xmlns:p="http://schemas.openxmlformats.org/presentationml/2006/main">
-  <p:cSld>
-    <p:spTree>
-      <p:nvGrpSpPr>
-        <p:cNvPr id="1" name=""/>
-        <p:cNvGrpSpPr/>
-        <p:nvPr/>
-      </p:nvGrpSpPr>
-      <p:grpSpPr>
-        <a:xfrm>
-          <a:off x="0" y="0"/>
-          <a:ext cx="0" cy="0"/>
-          <a:chOff x="0" y="0"/>
-          <a:chExt cx="0" cy="0"/>
-        </a:xfrm>
-      </p:grpSpPr>
       <p:pic>
         <p:nvPicPr>
-          <p:cNvPr id="2" name="Picture 1">
+          <p:cNvPr id="6" name="Picture 5" descr="A graph of a temperature&#10;&#10;AI-generated content may be incorrect.">
             <a:extLst>
               <a:ext uri="{FF2B5EF4-FFF2-40B4-BE49-F238E27FC236}">
-                <a16:creationId xmlns:a16="http://schemas.microsoft.com/office/drawing/2014/main" id="{20F681E8-3B12-7D14-7737-3AC1992151DB}"/>
+                <a16:creationId xmlns:a16="http://schemas.microsoft.com/office/drawing/2014/main" id="{FDDB20E8-DAD8-3E7F-6A43-201AE8C5F07B}"/>
               </a:ext>
             </a:extLst>
           </p:cNvPr>
@@ -3275,18 +3323,139 @@
         </p:blipFill>
         <p:spPr>
           <a:xfrm>
-            <a:off x="886639" y="0"/>
-            <a:ext cx="10418721" cy="6858000"/>
+            <a:off x="5715762" y="1426464"/>
+            <a:ext cx="6460236" cy="4248912"/>
           </a:xfrm>
           <a:prstGeom prst="rect">
             <a:avLst/>
           </a:prstGeom>
         </p:spPr>
       </p:pic>
+      <p:sp>
+        <p:nvSpPr>
+          <p:cNvPr id="7" name="TextBox 6">
+            <a:extLst>
+              <a:ext uri="{FF2B5EF4-FFF2-40B4-BE49-F238E27FC236}">
+                <a16:creationId xmlns:a16="http://schemas.microsoft.com/office/drawing/2014/main" id="{45ED268D-CF2C-0497-0443-600681C69B51}"/>
+              </a:ext>
+            </a:extLst>
+          </p:cNvPr>
+          <p:cNvSpPr txBox="1"/>
+          <p:nvPr/>
+        </p:nvSpPr>
+        <p:spPr>
+          <a:xfrm>
+            <a:off x="6554491" y="5676254"/>
+            <a:ext cx="5437321" cy="369332"/>
+          </a:xfrm>
+          <a:prstGeom prst="rect">
+            <a:avLst/>
+          </a:prstGeom>
+          <a:noFill/>
+        </p:spPr>
+        <p:txBody>
+          <a:bodyPr rot="0" spcFirstLastPara="0" vertOverflow="overflow" horzOverflow="overflow" vert="horz" wrap="square" lIns="91440" tIns="45720" rIns="91440" bIns="45720" numCol="1" spcCol="0" rtlCol="0" fromWordArt="0" anchor="t" anchorCtr="0" forceAA="0" compatLnSpc="1">
+            <a:prstTxWarp prst="textNoShape">
+              <a:avLst/>
+            </a:prstTxWarp>
+            <a:spAutoFit/>
+          </a:bodyPr>
+          <a:lstStyle/>
+          <a:p>
+            <a:r>
+              <a:rPr lang="en-US" dirty="0"/>
+              <a:t>PDF name- </a:t>
+            </a:r>
+            <a:r>
+              <a:rPr lang="en-US" dirty="0" err="1">
+                <a:ea typeface="+mn-lt"/>
+                <a:cs typeface="+mn-lt"/>
+              </a:rPr>
+              <a:t>Full_PumpHeat</a:t>
+            </a:r>
+            <a:r>
+              <a:rPr lang="en-US" dirty="0">
+                <a:ea typeface="+mn-lt"/>
+                <a:cs typeface="+mn-lt"/>
+              </a:rPr>
+              <a:t>(</a:t>
+            </a:r>
+            <a:r>
+              <a:rPr lang="en-US" dirty="0" err="1">
+                <a:ea typeface="+mn-lt"/>
+                <a:cs typeface="+mn-lt"/>
+              </a:rPr>
+              <a:t>HeatExchange.flow.vo</a:t>
+            </a:r>
+            <a:r>
+              <a:rPr lang="en-US" dirty="0">
+                <a:ea typeface="+mn-lt"/>
+                <a:cs typeface="+mn-lt"/>
+              </a:rPr>
+              <a:t>)</a:t>
+            </a:r>
+            <a:endParaRPr lang="en-US" dirty="0"/>
+          </a:p>
+        </p:txBody>
+      </p:sp>
+      <p:sp>
+        <p:nvSpPr>
+          <p:cNvPr id="8" name="TextBox 7">
+            <a:extLst>
+              <a:ext uri="{FF2B5EF4-FFF2-40B4-BE49-F238E27FC236}">
+                <a16:creationId xmlns:a16="http://schemas.microsoft.com/office/drawing/2014/main" id="{1C833463-40D4-3465-4A18-29C222A9C515}"/>
+              </a:ext>
+            </a:extLst>
+          </p:cNvPr>
+          <p:cNvSpPr txBox="1"/>
+          <p:nvPr/>
+        </p:nvSpPr>
+        <p:spPr>
+          <a:xfrm>
+            <a:off x="71033" y="4462219"/>
+            <a:ext cx="5605219" cy="646331"/>
+          </a:xfrm>
+          <a:prstGeom prst="rect">
+            <a:avLst/>
+          </a:prstGeom>
+          <a:noFill/>
+        </p:spPr>
+        <p:txBody>
+          <a:bodyPr rot="0" spcFirstLastPara="0" vertOverflow="overflow" horzOverflow="overflow" vert="horz" wrap="square" lIns="91440" tIns="45720" rIns="91440" bIns="45720" numCol="1" spcCol="0" rtlCol="0" fromWordArt="0" anchor="t" anchorCtr="0" forceAA="0" compatLnSpc="1">
+            <a:prstTxWarp prst="textNoShape">
+              <a:avLst/>
+            </a:prstTxWarp>
+            <a:spAutoFit/>
+          </a:bodyPr>
+          <a:lstStyle/>
+          <a:p>
+            <a:pPr algn="ctr"/>
+            <a:r>
+              <a:rPr lang="en-US" dirty="0"/>
+              <a:t>Raw Data File name</a:t>
+            </a:r>
+          </a:p>
+          <a:p>
+            <a:pPr algn="ctr"/>
+            <a:r>
+              <a:rPr lang="en-US" dirty="0" err="1"/>
+              <a:t>PumpHeat</a:t>
+            </a:r>
+            <a:r>
+              <a:rPr lang="en-US" dirty="0" err="1">
+                <a:ea typeface="+mn-lt"/>
+                <a:cs typeface="+mn-lt"/>
+              </a:rPr>
+              <a:t>_HeatExhanger.flow.vo</a:t>
+            </a:r>
+            <a:endParaRPr lang="en-US" dirty="0" err="1"/>
+          </a:p>
+        </p:txBody>
+      </p:sp>
     </p:spTree>
     <p:extLst>
       <p:ext uri="{BB962C8B-B14F-4D97-AF65-F5344CB8AC3E}">
-        <p14:creationId xmlns:p14="http://schemas.microsoft.com/office/powerpoint/2010/main" val="3075340539"/>
+        <p14:creationId xmlns:p14="http://schemas.microsoft.com/office/powerpoint/2010/main" val="1081941887"/>
       </p:ext>
     </p:extLst>
   </p:cSld>
@@ -3296,7 +3465,7 @@
 </p:sld>
 </file>
 
-<file path=ppt/slides/slide13.xml><?xml version="1.0" encoding="utf-8"?>
+<file path=ppt/slides/slide3.xml><?xml version="1.0" encoding="utf-8"?>
 <p:sld xmlns:a="http://schemas.openxmlformats.org/drawingml/2006/main" xmlns:r="http://schemas.openxmlformats.org/officeDocument/2006/relationships" xmlns:p="http://schemas.openxmlformats.org/presentationml/2006/main">
   <p:cSld>
     <p:spTree>
@@ -3304,7 +3473,7 @@
         <p:cNvPr id="1" name="">
           <a:extLst>
             <a:ext uri="{FF2B5EF4-FFF2-40B4-BE49-F238E27FC236}">
-              <a16:creationId xmlns:a16="http://schemas.microsoft.com/office/drawing/2014/main" id="{C56FAF4A-3923-8D59-E148-2251A2FBAA0F}"/>
+              <a16:creationId xmlns:a16="http://schemas.microsoft.com/office/drawing/2014/main" id="{A471A5F5-29E4-902F-F60A-835ABDE80628}"/>
             </a:ext>
           </a:extLst>
         </p:cNvPr>
@@ -3319,78 +3488,541 @@
           <a:chExt cx="0" cy="0"/>
         </a:xfrm>
       </p:grpSpPr>
-      <p:sp>
-        <p:nvSpPr>
-          <p:cNvPr id="2" name="Title 1">
+      <p:grpSp>
+        <p:nvGrpSpPr>
+          <p:cNvPr id="2" name="Group 1">
             <a:extLst>
               <a:ext uri="{FF2B5EF4-FFF2-40B4-BE49-F238E27FC236}">
-                <a16:creationId xmlns:a16="http://schemas.microsoft.com/office/drawing/2014/main" id="{2FD9C8E2-7F03-AD75-EA12-2B8F628CA5CB}"/>
+                <a16:creationId xmlns:a16="http://schemas.microsoft.com/office/drawing/2014/main" id="{EECE29C5-5C9F-547A-E472-5207FB250325}"/>
               </a:ext>
             </a:extLst>
           </p:cNvPr>
-          <p:cNvSpPr>
-            <a:spLocks noGrp="1"/>
-          </p:cNvSpPr>
-          <p:nvPr>
-            <p:ph type="ctrTitle"/>
-          </p:nvPr>
-        </p:nvSpPr>
-        <p:spPr/>
-        <p:txBody>
-          <a:bodyPr>
-            <a:normAutofit/>
-          </a:bodyPr>
-          <a:lstStyle/>
-          <a:p>
-            <a:r>
-              <a:rPr lang="en-US" dirty="0"/>
-              <a:t>0.5 gal/min Heat </a:t>
-            </a:r>
-            <a:r>
-              <a:rPr lang="en-US" dirty="0" err="1"/>
-              <a:t>Exhanger</a:t>
-            </a:r>
-            <a:endParaRPr lang="en-US" dirty="0"/>
-          </a:p>
-        </p:txBody>
-      </p:sp>
-      <p:sp>
-        <p:nvSpPr>
-          <p:cNvPr id="3" name="Subtitle 2">
+          <p:cNvGrpSpPr/>
+          <p:nvPr/>
+        </p:nvGrpSpPr>
+        <p:grpSpPr>
+          <a:xfrm>
+            <a:off x="6102999" y="1724186"/>
+            <a:ext cx="6090373" cy="4003730"/>
+            <a:chOff x="904609" y="0"/>
+            <a:chExt cx="10385513" cy="6858000"/>
+          </a:xfrm>
+        </p:grpSpPr>
+        <p:pic>
+          <p:nvPicPr>
+            <p:cNvPr id="3" name="Picture 2" descr="A graph with blue and red lines&#10;&#10;AI-generated content may be incorrect.">
+              <a:extLst>
+                <a:ext uri="{FF2B5EF4-FFF2-40B4-BE49-F238E27FC236}">
+                  <a16:creationId xmlns:a16="http://schemas.microsoft.com/office/drawing/2014/main" id="{F97B299B-D0AD-D1AB-4AA1-EEC4CA2D8151}"/>
+                </a:ext>
+              </a:extLst>
+            </p:cNvPr>
+            <p:cNvPicPr>
+              <a:picLocks noChangeAspect="1"/>
+            </p:cNvPicPr>
+            <p:nvPr/>
+          </p:nvPicPr>
+          <p:blipFill>
+            <a:blip r:embed="rId2"/>
+            <a:stretch>
+              <a:fillRect/>
+            </a:stretch>
+          </p:blipFill>
+          <p:spPr>
+            <a:xfrm>
+              <a:off x="904609" y="0"/>
+              <a:ext cx="10382782" cy="6858000"/>
+            </a:xfrm>
+            <a:prstGeom prst="rect">
+              <a:avLst/>
+            </a:prstGeom>
+          </p:spPr>
+        </p:pic>
+        <p:sp>
+          <p:nvSpPr>
+            <p:cNvPr id="4" name="TextBox 3">
+              <a:extLst>
+                <a:ext uri="{FF2B5EF4-FFF2-40B4-BE49-F238E27FC236}">
+                  <a16:creationId xmlns:a16="http://schemas.microsoft.com/office/drawing/2014/main" id="{0674D836-D5E3-C8CD-39AA-A7D62102A287}"/>
+                </a:ext>
+              </a:extLst>
+            </p:cNvPr>
+            <p:cNvSpPr txBox="1"/>
+            <p:nvPr/>
+          </p:nvSpPr>
+          <p:spPr>
+            <a:xfrm>
+              <a:off x="2995811" y="613385"/>
+              <a:ext cx="3099836" cy="421753"/>
+            </a:xfrm>
+            <a:prstGeom prst="rect">
+              <a:avLst/>
+            </a:prstGeom>
+            <a:noFill/>
+          </p:spPr>
+          <p:txBody>
+            <a:bodyPr rot="0" spcFirstLastPara="0" vertOverflow="overflow" horzOverflow="overflow" vert="horz" wrap="square" lIns="91440" tIns="45720" rIns="91440" bIns="45720" numCol="1" spcCol="0" rtlCol="0" fromWordArt="0" anchor="t" anchorCtr="0" forceAA="0" compatLnSpc="1">
+              <a:prstTxWarp prst="textNoShape">
+                <a:avLst/>
+              </a:prstTxWarp>
+              <a:spAutoFit/>
+            </a:bodyPr>
+            <a:lstStyle/>
+            <a:p>
+              <a:r>
+                <a:rPr lang="en-US" sz="1000" dirty="0"/>
+                <a:t>0.511 gal/min flow rate</a:t>
+              </a:r>
+            </a:p>
+          </p:txBody>
+        </p:sp>
+        <p:cxnSp>
+          <p:nvCxnSpPr>
+            <p:cNvPr id="5" name="Straight Arrow Connector 4">
+              <a:extLst>
+                <a:ext uri="{FF2B5EF4-FFF2-40B4-BE49-F238E27FC236}">
+                  <a16:creationId xmlns:a16="http://schemas.microsoft.com/office/drawing/2014/main" id="{D6D53E67-06D4-27DC-47BB-1EE38DC63DAD}"/>
+                </a:ext>
+              </a:extLst>
+            </p:cNvPr>
+            <p:cNvCxnSpPr/>
+            <p:nvPr/>
+          </p:nvCxnSpPr>
+          <p:spPr>
+            <a:xfrm flipH="1" flipV="1">
+              <a:off x="2659250" y="804708"/>
+              <a:ext cx="388749" cy="15497"/>
+            </a:xfrm>
+            <a:prstGeom prst="straightConnector1">
+              <a:avLst/>
+            </a:prstGeom>
+            <a:ln>
+              <a:tailEnd type="triangle"/>
+            </a:ln>
+          </p:spPr>
+          <p:style>
+            <a:lnRef idx="2">
+              <a:schemeClr val="accent1"/>
+            </a:lnRef>
+            <a:fillRef idx="0">
+              <a:schemeClr val="accent1"/>
+            </a:fillRef>
+            <a:effectRef idx="1">
+              <a:schemeClr val="accent1"/>
+            </a:effectRef>
+            <a:fontRef idx="minor">
+              <a:schemeClr val="tx1"/>
+            </a:fontRef>
+          </p:style>
+        </p:cxnSp>
+        <p:sp>
+          <p:nvSpPr>
+            <p:cNvPr id="6" name="TextBox 5">
+              <a:extLst>
+                <a:ext uri="{FF2B5EF4-FFF2-40B4-BE49-F238E27FC236}">
+                  <a16:creationId xmlns:a16="http://schemas.microsoft.com/office/drawing/2014/main" id="{50B5607D-85B4-01BB-AE66-EE4DC3D857F5}"/>
+                </a:ext>
+              </a:extLst>
+            </p:cNvPr>
+            <p:cNvSpPr txBox="1"/>
+            <p:nvPr/>
+          </p:nvSpPr>
+          <p:spPr>
+            <a:xfrm>
+              <a:off x="4021169" y="4135612"/>
+              <a:ext cx="2477400" cy="421753"/>
+            </a:xfrm>
+            <a:prstGeom prst="rect">
+              <a:avLst/>
+            </a:prstGeom>
+            <a:noFill/>
+          </p:spPr>
+          <p:txBody>
+            <a:bodyPr rot="0" spcFirstLastPara="0" vertOverflow="overflow" horzOverflow="overflow" vert="horz" wrap="square" lIns="91440" tIns="45720" rIns="91440" bIns="45720" numCol="1" spcCol="0" rtlCol="0" fromWordArt="0" anchor="t" anchorCtr="0" forceAA="0" compatLnSpc="1">
+              <a:prstTxWarp prst="textNoShape">
+                <a:avLst/>
+              </a:prstTxWarp>
+              <a:spAutoFit/>
+            </a:bodyPr>
+            <a:lstStyle/>
+            <a:p>
+              <a:r>
+                <a:rPr lang="en-US" sz="1000" dirty="0"/>
+                <a:t>1.022 gal/min flow rate</a:t>
+              </a:r>
+            </a:p>
+          </p:txBody>
+        </p:sp>
+        <p:cxnSp>
+          <p:nvCxnSpPr>
+            <p:cNvPr id="7" name="Straight Arrow Connector 6">
+              <a:extLst>
+                <a:ext uri="{FF2B5EF4-FFF2-40B4-BE49-F238E27FC236}">
+                  <a16:creationId xmlns:a16="http://schemas.microsoft.com/office/drawing/2014/main" id="{4DF0B73D-9625-BBAC-F1A2-97D3DA7FF587}"/>
+                </a:ext>
+              </a:extLst>
+            </p:cNvPr>
+            <p:cNvCxnSpPr/>
+            <p:nvPr/>
+          </p:nvCxnSpPr>
+          <p:spPr>
+            <a:xfrm flipH="1">
+              <a:off x="4634212" y="4609735"/>
+              <a:ext cx="351295" cy="475281"/>
+            </a:xfrm>
+            <a:prstGeom prst="straightConnector1">
+              <a:avLst/>
+            </a:prstGeom>
+            <a:ln>
+              <a:tailEnd type="triangle"/>
+            </a:ln>
+          </p:spPr>
+          <p:style>
+            <a:lnRef idx="2">
+              <a:schemeClr val="accent1"/>
+            </a:lnRef>
+            <a:fillRef idx="0">
+              <a:schemeClr val="accent1"/>
+            </a:fillRef>
+            <a:effectRef idx="1">
+              <a:schemeClr val="accent1"/>
+            </a:effectRef>
+            <a:fontRef idx="minor">
+              <a:schemeClr val="tx1"/>
+            </a:fontRef>
+          </p:style>
+        </p:cxnSp>
+        <p:sp>
+          <p:nvSpPr>
+            <p:cNvPr id="8" name="TextBox 7">
+              <a:extLst>
+                <a:ext uri="{FF2B5EF4-FFF2-40B4-BE49-F238E27FC236}">
+                  <a16:creationId xmlns:a16="http://schemas.microsoft.com/office/drawing/2014/main" id="{A73F0EA3-1A03-320A-6436-14CC5E15E5BA}"/>
+                </a:ext>
+              </a:extLst>
+            </p:cNvPr>
+            <p:cNvSpPr txBox="1"/>
+            <p:nvPr/>
+          </p:nvSpPr>
+          <p:spPr>
+            <a:xfrm>
+              <a:off x="6093325" y="4650925"/>
+              <a:ext cx="2640376" cy="421753"/>
+            </a:xfrm>
+            <a:prstGeom prst="rect">
+              <a:avLst/>
+            </a:prstGeom>
+            <a:noFill/>
+          </p:spPr>
+          <p:txBody>
+            <a:bodyPr rot="0" spcFirstLastPara="0" vertOverflow="overflow" horzOverflow="overflow" vert="horz" wrap="square" lIns="91440" tIns="45720" rIns="91440" bIns="45720" numCol="1" spcCol="0" rtlCol="0" fromWordArt="0" anchor="t" anchorCtr="0" forceAA="0" compatLnSpc="1">
+              <a:prstTxWarp prst="textNoShape">
+                <a:avLst/>
+              </a:prstTxWarp>
+              <a:spAutoFit/>
+            </a:bodyPr>
+            <a:lstStyle/>
+            <a:p>
+              <a:r>
+                <a:rPr lang="en-US" sz="1000" dirty="0"/>
+                <a:t>1.500 gal/min flow rate</a:t>
+              </a:r>
+            </a:p>
+          </p:txBody>
+        </p:sp>
+        <p:cxnSp>
+          <p:nvCxnSpPr>
+            <p:cNvPr id="9" name="Straight Arrow Connector 8">
+              <a:extLst>
+                <a:ext uri="{FF2B5EF4-FFF2-40B4-BE49-F238E27FC236}">
+                  <a16:creationId xmlns:a16="http://schemas.microsoft.com/office/drawing/2014/main" id="{83335F1B-871C-EF5A-F501-6E0CDB18B329}"/>
+                </a:ext>
+              </a:extLst>
+            </p:cNvPr>
+            <p:cNvCxnSpPr/>
+            <p:nvPr/>
+          </p:nvCxnSpPr>
+          <p:spPr>
+            <a:xfrm flipH="1">
+              <a:off x="6691692" y="5113649"/>
+              <a:ext cx="247973" cy="352587"/>
+            </a:xfrm>
+            <a:prstGeom prst="straightConnector1">
+              <a:avLst/>
+            </a:prstGeom>
+            <a:ln>
+              <a:tailEnd type="triangle"/>
+            </a:ln>
+          </p:spPr>
+          <p:style>
+            <a:lnRef idx="2">
+              <a:schemeClr val="accent1"/>
+            </a:lnRef>
+            <a:fillRef idx="0">
+              <a:schemeClr val="accent1"/>
+            </a:fillRef>
+            <a:effectRef idx="1">
+              <a:schemeClr val="accent1"/>
+            </a:effectRef>
+            <a:fontRef idx="minor">
+              <a:schemeClr val="tx1"/>
+            </a:fontRef>
+          </p:style>
+        </p:cxnSp>
+        <p:sp>
+          <p:nvSpPr>
+            <p:cNvPr id="10" name="TextBox 9">
+              <a:extLst>
+                <a:ext uri="{FF2B5EF4-FFF2-40B4-BE49-F238E27FC236}">
+                  <a16:creationId xmlns:a16="http://schemas.microsoft.com/office/drawing/2014/main" id="{63AF13B4-A433-8D34-B4AD-E8BC81E5D20B}"/>
+                </a:ext>
+              </a:extLst>
+            </p:cNvPr>
+            <p:cNvSpPr txBox="1"/>
+            <p:nvPr/>
+          </p:nvSpPr>
+          <p:spPr>
+            <a:xfrm>
+              <a:off x="8649744" y="4682579"/>
+              <a:ext cx="2640378" cy="421753"/>
+            </a:xfrm>
+            <a:prstGeom prst="rect">
+              <a:avLst/>
+            </a:prstGeom>
+            <a:noFill/>
+          </p:spPr>
+          <p:txBody>
+            <a:bodyPr rot="0" spcFirstLastPara="0" vertOverflow="overflow" horzOverflow="overflow" vert="horz" wrap="square" lIns="91440" tIns="45720" rIns="91440" bIns="45720" numCol="1" spcCol="0" rtlCol="0" fromWordArt="0" anchor="t" anchorCtr="0" forceAA="0" compatLnSpc="1">
+              <a:prstTxWarp prst="textNoShape">
+                <a:avLst/>
+              </a:prstTxWarp>
+              <a:spAutoFit/>
+            </a:bodyPr>
+            <a:lstStyle/>
+            <a:p>
+              <a:r>
+                <a:rPr lang="en-US" sz="1000" dirty="0"/>
+                <a:t>2.001 gal/min flow rate</a:t>
+              </a:r>
+            </a:p>
+          </p:txBody>
+        </p:sp>
+        <p:cxnSp>
+          <p:nvCxnSpPr>
+            <p:cNvPr id="11" name="Straight Arrow Connector 10">
+              <a:extLst>
+                <a:ext uri="{FF2B5EF4-FFF2-40B4-BE49-F238E27FC236}">
+                  <a16:creationId xmlns:a16="http://schemas.microsoft.com/office/drawing/2014/main" id="{B648E4D1-07CB-C06E-B3C3-6655C21CDD02}"/>
+                </a:ext>
+              </a:extLst>
+            </p:cNvPr>
+            <p:cNvCxnSpPr/>
+            <p:nvPr/>
+          </p:nvCxnSpPr>
+          <p:spPr>
+            <a:xfrm flipH="1">
+              <a:off x="8608158" y="5120284"/>
+              <a:ext cx="254430" cy="359043"/>
+            </a:xfrm>
+            <a:prstGeom prst="straightConnector1">
+              <a:avLst/>
+            </a:prstGeom>
+            <a:ln>
+              <a:tailEnd type="triangle"/>
+            </a:ln>
+          </p:spPr>
+          <p:style>
+            <a:lnRef idx="2">
+              <a:schemeClr val="accent1"/>
+            </a:lnRef>
+            <a:fillRef idx="0">
+              <a:schemeClr val="accent1"/>
+            </a:fillRef>
+            <a:effectRef idx="1">
+              <a:schemeClr val="accent1"/>
+            </a:effectRef>
+            <a:fontRef idx="minor">
+              <a:schemeClr val="tx1"/>
+            </a:fontRef>
+          </p:style>
+        </p:cxnSp>
+      </p:grpSp>
+      <p:sp>
+        <p:nvSpPr>
+          <p:cNvPr id="13" name="Title 1">
             <a:extLst>
               <a:ext uri="{FF2B5EF4-FFF2-40B4-BE49-F238E27FC236}">
-                <a16:creationId xmlns:a16="http://schemas.microsoft.com/office/drawing/2014/main" id="{20852917-33A5-5221-720C-974EBFC1DFAD}"/>
+                <a16:creationId xmlns:a16="http://schemas.microsoft.com/office/drawing/2014/main" id="{A4E29862-45EF-EFCB-23C2-39535454C7B1}"/>
               </a:ext>
             </a:extLst>
           </p:cNvPr>
-          <p:cNvSpPr>
-            <a:spLocks noGrp="1"/>
-          </p:cNvSpPr>
-          <p:nvPr>
-            <p:ph type="subTitle" idx="1"/>
-          </p:nvPr>
-        </p:nvSpPr>
-        <p:spPr/>
-        <p:txBody>
-          <a:bodyPr vert="horz" lIns="91440" tIns="45720" rIns="91440" bIns="45720" rtlCol="0" anchor="t">
-            <a:normAutofit/>
+          <p:cNvSpPr txBox="1">
+            <a:spLocks/>
+          </p:cNvSpPr>
+          <p:nvPr/>
+        </p:nvSpPr>
+        <p:spPr>
+          <a:xfrm>
+            <a:off x="768458" y="373278"/>
+            <a:ext cx="10667998" cy="831312"/>
+          </a:xfrm>
+          <a:prstGeom prst="rect">
+            <a:avLst/>
+          </a:prstGeom>
+        </p:spPr>
+        <p:txBody>
+          <a:bodyPr lIns="91440" tIns="45720" rIns="91440" bIns="45720" anchor="t"/>
+          <a:lstStyle>
+            <a:lvl1pPr algn="l" defTabSz="914400" rtl="0" eaLnBrk="1" latinLnBrk="0" hangingPunct="1">
+              <a:lnSpc>
+                <a:spcPct val="90000"/>
+              </a:lnSpc>
+              <a:spcBef>
+                <a:spcPct val="0"/>
+              </a:spcBef>
+              <a:buNone/>
+              <a:defRPr sz="4400" kern="1200">
+                <a:solidFill>
+                  <a:schemeClr val="tx1"/>
+                </a:solidFill>
+                <a:latin typeface="+mj-lt"/>
+                <a:ea typeface="+mj-ea"/>
+                <a:cs typeface="+mj-cs"/>
+              </a:defRPr>
+            </a:lvl1pPr>
+          </a:lstStyle>
+          <a:p>
+            <a:r>
+              <a:rPr lang="en-US" sz="6000" dirty="0"/>
+              <a:t>Test #1: Additional close up data</a:t>
+            </a:r>
+          </a:p>
+        </p:txBody>
+      </p:sp>
+      <p:pic>
+        <p:nvPicPr>
+          <p:cNvPr id="15" name="Picture 14" descr="A graph of a temperature&#10;&#10;AI-generated content may be incorrect.">
+            <a:extLst>
+              <a:ext uri="{FF2B5EF4-FFF2-40B4-BE49-F238E27FC236}">
+                <a16:creationId xmlns:a16="http://schemas.microsoft.com/office/drawing/2014/main" id="{5E740EC8-E100-B532-4001-A1326779D3AD}"/>
+              </a:ext>
+            </a:extLst>
+          </p:cNvPr>
+          <p:cNvPicPr>
+            <a:picLocks noChangeAspect="1"/>
+          </p:cNvPicPr>
+          <p:nvPr/>
+        </p:nvPicPr>
+        <p:blipFill>
+          <a:blip r:embed="rId3"/>
+          <a:stretch>
+            <a:fillRect/>
+          </a:stretch>
+        </p:blipFill>
+        <p:spPr>
+          <a:xfrm>
+            <a:off x="2498" y="1712966"/>
+            <a:ext cx="6096025" cy="4016841"/>
+          </a:xfrm>
+          <a:prstGeom prst="rect">
+            <a:avLst/>
+          </a:prstGeom>
+        </p:spPr>
+      </p:pic>
+      <p:sp>
+        <p:nvSpPr>
+          <p:cNvPr id="17" name="TextBox 16">
+            <a:extLst>
+              <a:ext uri="{FF2B5EF4-FFF2-40B4-BE49-F238E27FC236}">
+                <a16:creationId xmlns:a16="http://schemas.microsoft.com/office/drawing/2014/main" id="{7761DCAB-57C9-4BC2-5725-EF01B9D00D0C}"/>
+              </a:ext>
+            </a:extLst>
+          </p:cNvPr>
+          <p:cNvSpPr txBox="1"/>
+          <p:nvPr/>
+        </p:nvSpPr>
+        <p:spPr>
+          <a:xfrm>
+            <a:off x="6554491" y="5863525"/>
+            <a:ext cx="5437321" cy="369332"/>
+          </a:xfrm>
+          <a:prstGeom prst="rect">
+            <a:avLst/>
+          </a:prstGeom>
+          <a:noFill/>
+        </p:spPr>
+        <p:txBody>
+          <a:bodyPr rot="0" spcFirstLastPara="0" vertOverflow="overflow" horzOverflow="overflow" vert="horz" wrap="square" lIns="91440" tIns="45720" rIns="91440" bIns="45720" numCol="1" spcCol="0" rtlCol="0" fromWordArt="0" anchor="t" anchorCtr="0" forceAA="0" compatLnSpc="1">
+            <a:prstTxWarp prst="textNoShape">
+              <a:avLst/>
+            </a:prstTxWarp>
+            <a:spAutoFit/>
           </a:bodyPr>
           <a:lstStyle/>
           <a:p>
             <a:r>
+              <a:rPr lang="en-US" dirty="0"/>
+              <a:t>PDF name- </a:t>
+            </a:r>
+            <a:r>
+              <a:rPr lang="en-US" dirty="0" err="1">
+                <a:ea typeface="+mn-lt"/>
+                <a:cs typeface="+mn-lt"/>
+              </a:rPr>
+              <a:t>PumpHeat_HeatExchange.flow.vo</a:t>
+            </a:r>
+          </a:p>
+        </p:txBody>
+      </p:sp>
+      <p:sp>
+        <p:nvSpPr>
+          <p:cNvPr id="19" name="TextBox 18">
+            <a:extLst>
+              <a:ext uri="{FF2B5EF4-FFF2-40B4-BE49-F238E27FC236}">
+                <a16:creationId xmlns:a16="http://schemas.microsoft.com/office/drawing/2014/main" id="{A856791C-E7FF-486D-AD36-4FF68C2878CA}"/>
+              </a:ext>
+            </a:extLst>
+          </p:cNvPr>
+          <p:cNvSpPr txBox="1"/>
+          <p:nvPr/>
+        </p:nvSpPr>
+        <p:spPr>
+          <a:xfrm>
+            <a:off x="1075840" y="5860942"/>
+            <a:ext cx="3952067" cy="369332"/>
+          </a:xfrm>
+          <a:prstGeom prst="rect">
+            <a:avLst/>
+          </a:prstGeom>
+          <a:noFill/>
+        </p:spPr>
+        <p:txBody>
+          <a:bodyPr rot="0" spcFirstLastPara="0" vertOverflow="overflow" horzOverflow="overflow" vert="horz" wrap="square" lIns="91440" tIns="45720" rIns="91440" bIns="45720" numCol="1" spcCol="0" rtlCol="0" fromWordArt="0" anchor="t" anchorCtr="0" forceAA="0" compatLnSpc="1">
+            <a:prstTxWarp prst="textNoShape">
+              <a:avLst/>
+            </a:prstTxWarp>
+            <a:spAutoFit/>
+          </a:bodyPr>
+          <a:lstStyle/>
+          <a:p>
+            <a:r>
+              <a:rPr lang="en-US" dirty="0"/>
+              <a:t>PDF name- </a:t>
+            </a:r>
+            <a:r>
               <a:rPr lang="en-US" dirty="0">
-                <a:hlinkClick r:id="rId2"/>
+                <a:ea typeface="+mn-lt"/>
+                <a:cs typeface="+mn-lt"/>
               </a:rPr>
-              <a:t>PDF Graph Download</a:t>
-            </a:r>
-            <a:endParaRPr lang="en-US" dirty="0"/>
+              <a:t>PumpHeat_up_6_hours.vo</a:t>
+            </a:r>
           </a:p>
         </p:txBody>
       </p:sp>
     </p:spTree>
     <p:extLst>
       <p:ext uri="{BB962C8B-B14F-4D97-AF65-F5344CB8AC3E}">
-        <p14:creationId xmlns:p14="http://schemas.microsoft.com/office/powerpoint/2010/main" val="2991374905"/>
+        <p14:creationId xmlns:p14="http://schemas.microsoft.com/office/powerpoint/2010/main" val="3879357743"/>
       </p:ext>
     </p:extLst>
   </p:cSld>
@@ -3400,7 +4032,7 @@
 </p:sld>
 </file>
 
-<file path=ppt/slides/slide14.xml><?xml version="1.0" encoding="utf-8"?>
+<file path=ppt/slides/slide4.xml><?xml version="1.0" encoding="utf-8"?>
 <p:sld xmlns:a="http://schemas.openxmlformats.org/drawingml/2006/main" xmlns:r="http://schemas.openxmlformats.org/officeDocument/2006/relationships" xmlns:p="http://schemas.openxmlformats.org/presentationml/2006/main">
   <p:cSld>
     <p:spTree>
@@ -3408,7 +4040,7 @@
         <p:cNvPr id="1" name="">
           <a:extLst>
             <a:ext uri="{FF2B5EF4-FFF2-40B4-BE49-F238E27FC236}">
-              <a16:creationId xmlns:a16="http://schemas.microsoft.com/office/drawing/2014/main" id="{64AD8569-D0DD-8128-96BC-FC6388466BB9}"/>
+              <a16:creationId xmlns:a16="http://schemas.microsoft.com/office/drawing/2014/main" id="{C89F68DE-A81B-6676-4AE6-12BEB1E42615}"/>
             </a:ext>
           </a:extLst>
         </p:cNvPr>
@@ -3423,12 +4055,275 @@
           <a:chExt cx="0" cy="0"/>
         </a:xfrm>
       </p:grpSpPr>
+      <p:sp>
+        <p:nvSpPr>
+          <p:cNvPr id="2" name="Title 1">
+            <a:extLst>
+              <a:ext uri="{FF2B5EF4-FFF2-40B4-BE49-F238E27FC236}">
+                <a16:creationId xmlns:a16="http://schemas.microsoft.com/office/drawing/2014/main" id="{D8A26050-1BEB-14F2-FC84-89BDF0DB941E}"/>
+              </a:ext>
+            </a:extLst>
+          </p:cNvPr>
+          <p:cNvSpPr>
+            <a:spLocks noGrp="1"/>
+          </p:cNvSpPr>
+          <p:nvPr>
+            <p:ph type="ctrTitle"/>
+          </p:nvPr>
+        </p:nvSpPr>
+        <p:spPr>
+          <a:xfrm>
+            <a:off x="-162526" y="174073"/>
+            <a:ext cx="12155424" cy="985520"/>
+          </a:xfrm>
+        </p:spPr>
+        <p:txBody>
+          <a:bodyPr>
+            <a:normAutofit/>
+          </a:bodyPr>
+          <a:lstStyle/>
+          <a:p>
+            <a:r>
+              <a:rPr lang="en-US" dirty="0"/>
+              <a:t>Test #2: Pump Heat up</a:t>
+            </a:r>
+          </a:p>
+        </p:txBody>
+      </p:sp>
+      <p:sp>
+        <p:nvSpPr>
+          <p:cNvPr id="5" name="Content Placeholder 2">
+            <a:extLst>
+              <a:ext uri="{FF2B5EF4-FFF2-40B4-BE49-F238E27FC236}">
+                <a16:creationId xmlns:a16="http://schemas.microsoft.com/office/drawing/2014/main" id="{B450B7DB-0F81-9B3E-A80A-4C15DA99A7E8}"/>
+              </a:ext>
+            </a:extLst>
+          </p:cNvPr>
+          <p:cNvSpPr txBox="1">
+            <a:spLocks/>
+          </p:cNvSpPr>
+          <p:nvPr/>
+        </p:nvSpPr>
+        <p:spPr>
+          <a:xfrm>
+            <a:off x="-122798" y="2100565"/>
+            <a:ext cx="6041136" cy="3790506"/>
+          </a:xfrm>
+          <a:prstGeom prst="rect">
+            <a:avLst/>
+          </a:prstGeom>
+        </p:spPr>
+        <p:txBody>
+          <a:bodyPr vert="horz" lIns="91440" tIns="45720" rIns="91440" bIns="45720" rtlCol="0" anchor="t">
+            <a:normAutofit/>
+          </a:bodyPr>
+          <a:lstStyle>
+            <a:lvl1pPr marL="0" indent="0" algn="ctr" defTabSz="914400" rtl="0" eaLnBrk="1" latinLnBrk="0" hangingPunct="1">
+              <a:lnSpc>
+                <a:spcPct val="90000"/>
+              </a:lnSpc>
+              <a:spcBef>
+                <a:spcPts val="1000"/>
+              </a:spcBef>
+              <a:buFont typeface="Arial" panose="020B0604020202020204" pitchFamily="34" charset="0"/>
+              <a:buNone/>
+              <a:defRPr sz="2400" kern="1200">
+                <a:solidFill>
+                  <a:schemeClr val="tx1"/>
+                </a:solidFill>
+                <a:latin typeface="+mn-lt"/>
+                <a:ea typeface="+mn-ea"/>
+                <a:cs typeface="+mn-cs"/>
+              </a:defRPr>
+            </a:lvl1pPr>
+            <a:lvl2pPr marL="457200" indent="0" algn="ctr" defTabSz="914400" rtl="0" eaLnBrk="1" latinLnBrk="0" hangingPunct="1">
+              <a:lnSpc>
+                <a:spcPct val="90000"/>
+              </a:lnSpc>
+              <a:spcBef>
+                <a:spcPts val="500"/>
+              </a:spcBef>
+              <a:buFont typeface="Arial" panose="020B0604020202020204" pitchFamily="34" charset="0"/>
+              <a:buNone/>
+              <a:defRPr sz="2000" kern="1200">
+                <a:solidFill>
+                  <a:schemeClr val="tx1"/>
+                </a:solidFill>
+                <a:latin typeface="+mn-lt"/>
+                <a:ea typeface="+mn-ea"/>
+                <a:cs typeface="+mn-cs"/>
+              </a:defRPr>
+            </a:lvl2pPr>
+            <a:lvl3pPr marL="914400" indent="0" algn="ctr" defTabSz="914400" rtl="0" eaLnBrk="1" latinLnBrk="0" hangingPunct="1">
+              <a:lnSpc>
+                <a:spcPct val="90000"/>
+              </a:lnSpc>
+              <a:spcBef>
+                <a:spcPts val="500"/>
+              </a:spcBef>
+              <a:buFont typeface="Arial" panose="020B0604020202020204" pitchFamily="34" charset="0"/>
+              <a:buNone/>
+              <a:defRPr sz="1800" kern="1200">
+                <a:solidFill>
+                  <a:schemeClr val="tx1"/>
+                </a:solidFill>
+                <a:latin typeface="+mn-lt"/>
+                <a:ea typeface="+mn-ea"/>
+                <a:cs typeface="+mn-cs"/>
+              </a:defRPr>
+            </a:lvl3pPr>
+            <a:lvl4pPr marL="1371600" indent="0" algn="ctr" defTabSz="914400" rtl="0" eaLnBrk="1" latinLnBrk="0" hangingPunct="1">
+              <a:lnSpc>
+                <a:spcPct val="90000"/>
+              </a:lnSpc>
+              <a:spcBef>
+                <a:spcPts val="500"/>
+              </a:spcBef>
+              <a:buFont typeface="Arial" panose="020B0604020202020204" pitchFamily="34" charset="0"/>
+              <a:buNone/>
+              <a:defRPr sz="1600" kern="1200">
+                <a:solidFill>
+                  <a:schemeClr val="tx1"/>
+                </a:solidFill>
+                <a:latin typeface="+mn-lt"/>
+                <a:ea typeface="+mn-ea"/>
+                <a:cs typeface="+mn-cs"/>
+              </a:defRPr>
+            </a:lvl4pPr>
+            <a:lvl5pPr marL="1828800" indent="0" algn="ctr" defTabSz="914400" rtl="0" eaLnBrk="1" latinLnBrk="0" hangingPunct="1">
+              <a:lnSpc>
+                <a:spcPct val="90000"/>
+              </a:lnSpc>
+              <a:spcBef>
+                <a:spcPts val="500"/>
+              </a:spcBef>
+              <a:buFont typeface="Arial" panose="020B0604020202020204" pitchFamily="34" charset="0"/>
+              <a:buNone/>
+              <a:defRPr sz="1600" kern="1200">
+                <a:solidFill>
+                  <a:schemeClr val="tx1"/>
+                </a:solidFill>
+                <a:latin typeface="+mn-lt"/>
+                <a:ea typeface="+mn-ea"/>
+                <a:cs typeface="+mn-cs"/>
+              </a:defRPr>
+            </a:lvl5pPr>
+            <a:lvl6pPr marL="2286000" indent="0" algn="ctr" defTabSz="914400" rtl="0" eaLnBrk="1" latinLnBrk="0" hangingPunct="1">
+              <a:lnSpc>
+                <a:spcPct val="90000"/>
+              </a:lnSpc>
+              <a:spcBef>
+                <a:spcPts val="500"/>
+              </a:spcBef>
+              <a:buFont typeface="Arial" panose="020B0604020202020204" pitchFamily="34" charset="0"/>
+              <a:buNone/>
+              <a:defRPr sz="1600" kern="1200">
+                <a:solidFill>
+                  <a:schemeClr val="tx1"/>
+                </a:solidFill>
+                <a:latin typeface="+mn-lt"/>
+                <a:ea typeface="+mn-ea"/>
+                <a:cs typeface="+mn-cs"/>
+              </a:defRPr>
+            </a:lvl6pPr>
+            <a:lvl7pPr marL="2743200" indent="0" algn="ctr" defTabSz="914400" rtl="0" eaLnBrk="1" latinLnBrk="0" hangingPunct="1">
+              <a:lnSpc>
+                <a:spcPct val="90000"/>
+              </a:lnSpc>
+              <a:spcBef>
+                <a:spcPts val="500"/>
+              </a:spcBef>
+              <a:buFont typeface="Arial" panose="020B0604020202020204" pitchFamily="34" charset="0"/>
+              <a:buNone/>
+              <a:defRPr sz="1600" kern="1200">
+                <a:solidFill>
+                  <a:schemeClr val="tx1"/>
+                </a:solidFill>
+                <a:latin typeface="+mn-lt"/>
+                <a:ea typeface="+mn-ea"/>
+                <a:cs typeface="+mn-cs"/>
+              </a:defRPr>
+            </a:lvl7pPr>
+            <a:lvl8pPr marL="3200400" indent="0" algn="ctr" defTabSz="914400" rtl="0" eaLnBrk="1" latinLnBrk="0" hangingPunct="1">
+              <a:lnSpc>
+                <a:spcPct val="90000"/>
+              </a:lnSpc>
+              <a:spcBef>
+                <a:spcPts val="500"/>
+              </a:spcBef>
+              <a:buFont typeface="Arial" panose="020B0604020202020204" pitchFamily="34" charset="0"/>
+              <a:buNone/>
+              <a:defRPr sz="1600" kern="1200">
+                <a:solidFill>
+                  <a:schemeClr val="tx1"/>
+                </a:solidFill>
+                <a:latin typeface="+mn-lt"/>
+                <a:ea typeface="+mn-ea"/>
+                <a:cs typeface="+mn-cs"/>
+              </a:defRPr>
+            </a:lvl8pPr>
+            <a:lvl9pPr marL="3657600" indent="0" algn="ctr" defTabSz="914400" rtl="0" eaLnBrk="1" latinLnBrk="0" hangingPunct="1">
+              <a:lnSpc>
+                <a:spcPct val="90000"/>
+              </a:lnSpc>
+              <a:spcBef>
+                <a:spcPts val="500"/>
+              </a:spcBef>
+              <a:buFont typeface="Arial" panose="020B0604020202020204" pitchFamily="34" charset="0"/>
+              <a:buNone/>
+              <a:defRPr sz="1600" kern="1200">
+                <a:solidFill>
+                  <a:schemeClr val="tx1"/>
+                </a:solidFill>
+                <a:latin typeface="+mn-lt"/>
+                <a:ea typeface="+mn-ea"/>
+                <a:cs typeface="+mn-cs"/>
+              </a:defRPr>
+            </a:lvl9pPr>
+          </a:lstStyle>
+          <a:p>
+            <a:pPr marL="457200" indent="-457200">
+              <a:buFont typeface="Calibri" panose="020B0604020202020204" pitchFamily="34" charset="0"/>
+              <a:buChar char="-"/>
+            </a:pPr>
+            <a:r>
+              <a:rPr lang="en-US" sz="2800" dirty="0"/>
+              <a:t>Middle valve closed</a:t>
+            </a:r>
+            <a:endParaRPr lang="en-US" dirty="0"/>
+          </a:p>
+          <a:p>
+            <a:pPr marL="457200" indent="-457200">
+              <a:buFont typeface="Calibri" panose="020B0604020202020204" pitchFamily="34" charset="0"/>
+              <a:buChar char="-"/>
+            </a:pPr>
+            <a:r>
+              <a:rPr lang="en-US" sz="2800" dirty="0"/>
+              <a:t>Upper valve open</a:t>
+            </a:r>
+          </a:p>
+          <a:p>
+            <a:pPr marL="457200" indent="-457200">
+              <a:buFont typeface="Calibri" panose="020B0604020202020204" pitchFamily="34" charset="0"/>
+              <a:buChar char="-"/>
+            </a:pPr>
+            <a:r>
+              <a:rPr lang="en-US" sz="2800" dirty="0"/>
+              <a:t>Heat exchanger 0.5 gal/min flow rate at 6 hours</a:t>
+            </a:r>
+            <a:endParaRPr lang="en-US" dirty="0"/>
+          </a:p>
+          <a:p>
+            <a:endParaRPr lang="en-US" dirty="0"/>
+          </a:p>
+        </p:txBody>
+      </p:sp>
       <p:pic>
         <p:nvPicPr>
-          <p:cNvPr id="2" name="Picture 1">
+          <p:cNvPr id="4" name="Picture 3" descr="A graph of a temperature&#10;&#10;AI-generated content may be incorrect.">
             <a:extLst>
               <a:ext uri="{FF2B5EF4-FFF2-40B4-BE49-F238E27FC236}">
-                <a16:creationId xmlns:a16="http://schemas.microsoft.com/office/drawing/2014/main" id="{8E0582C1-E180-B0E4-D8B8-540538CA86E2}"/>
+                <a16:creationId xmlns:a16="http://schemas.microsoft.com/office/drawing/2014/main" id="{A2C64901-441C-57ED-424C-1BC6BD454D7F}"/>
               </a:ext>
             </a:extLst>
           </p:cNvPr>
@@ -3445,8 +4340,8 @@
         </p:blipFill>
         <p:spPr>
           <a:xfrm>
-            <a:off x="886639" y="0"/>
-            <a:ext cx="10418721" cy="6858000"/>
+            <a:off x="5751124" y="1423939"/>
+            <a:ext cx="6439388" cy="4248727"/>
           </a:xfrm>
           <a:prstGeom prst="rect">
             <a:avLst/>
@@ -3455,10 +4350,10 @@
       </p:pic>
       <p:sp>
         <p:nvSpPr>
-          <p:cNvPr id="3" name="TextBox 2">
+          <p:cNvPr id="8" name="TextBox 7">
             <a:extLst>
               <a:ext uri="{FF2B5EF4-FFF2-40B4-BE49-F238E27FC236}">
-                <a16:creationId xmlns:a16="http://schemas.microsoft.com/office/drawing/2014/main" id="{C2BD4145-C9C2-9C44-D095-AFB7A328E292}"/>
+                <a16:creationId xmlns:a16="http://schemas.microsoft.com/office/drawing/2014/main" id="{6CF52179-93A8-42F1-93B8-6038708DCDC9}"/>
               </a:ext>
             </a:extLst>
           </p:cNvPr>
@@ -3467,7 +4362,258 @@
         </p:nvSpPr>
         <p:spPr>
           <a:xfrm>
-            <a:off x="3820020" y="1216594"/>
+            <a:off x="6347847" y="5889355"/>
+            <a:ext cx="5734371" cy="369332"/>
+          </a:xfrm>
+          <a:prstGeom prst="rect">
+            <a:avLst/>
+          </a:prstGeom>
+          <a:noFill/>
+        </p:spPr>
+        <p:txBody>
+          <a:bodyPr rot="0" spcFirstLastPara="0" vertOverflow="overflow" horzOverflow="overflow" vert="horz" wrap="square" lIns="91440" tIns="45720" rIns="91440" bIns="45720" numCol="1" spcCol="0" rtlCol="0" fromWordArt="0" anchor="t" anchorCtr="0" forceAA="0" compatLnSpc="1">
+            <a:prstTxWarp prst="textNoShape">
+              <a:avLst/>
+            </a:prstTxWarp>
+            <a:spAutoFit/>
+          </a:bodyPr>
+          <a:lstStyle/>
+          <a:p>
+            <a:r>
+              <a:rPr lang="en-US" dirty="0"/>
+              <a:t>PDF name- </a:t>
+            </a:r>
+            <a:r>
+              <a:rPr lang="en-US" dirty="0" err="1">
+                <a:ea typeface="+mn-lt"/>
+                <a:cs typeface="+mn-lt"/>
+              </a:rPr>
+              <a:t>Full_PumpHeat</a:t>
+            </a:r>
+            <a:r>
+              <a:rPr lang="en-US" dirty="0">
+                <a:ea typeface="+mn-lt"/>
+                <a:cs typeface="+mn-lt"/>
+              </a:rPr>
+              <a:t>(HeatExchange.0.5flow.vc)</a:t>
+            </a:r>
+            <a:endParaRPr lang="en-US" dirty="0" err="1">
+              <a:ea typeface="+mn-lt"/>
+              <a:cs typeface="+mn-lt"/>
+            </a:endParaRPr>
+          </a:p>
+        </p:txBody>
+      </p:sp>
+      <p:sp>
+        <p:nvSpPr>
+          <p:cNvPr id="10" name="TextBox 9">
+            <a:extLst>
+              <a:ext uri="{FF2B5EF4-FFF2-40B4-BE49-F238E27FC236}">
+                <a16:creationId xmlns:a16="http://schemas.microsoft.com/office/drawing/2014/main" id="{169CB1C3-F9C8-FCF7-6040-902B8F3A10A5}"/>
+              </a:ext>
+            </a:extLst>
+          </p:cNvPr>
+          <p:cNvSpPr txBox="1"/>
+          <p:nvPr/>
+        </p:nvSpPr>
+        <p:spPr>
+          <a:xfrm>
+            <a:off x="71033" y="4462219"/>
+            <a:ext cx="5605219" cy="646331"/>
+          </a:xfrm>
+          <a:prstGeom prst="rect">
+            <a:avLst/>
+          </a:prstGeom>
+          <a:noFill/>
+        </p:spPr>
+        <p:txBody>
+          <a:bodyPr rot="0" spcFirstLastPara="0" vertOverflow="overflow" horzOverflow="overflow" vert="horz" wrap="square" lIns="91440" tIns="45720" rIns="91440" bIns="45720" numCol="1" spcCol="0" rtlCol="0" fromWordArt="0" anchor="t" anchorCtr="0" forceAA="0" compatLnSpc="1">
+            <a:prstTxWarp prst="textNoShape">
+              <a:avLst/>
+            </a:prstTxWarp>
+            <a:spAutoFit/>
+          </a:bodyPr>
+          <a:lstStyle/>
+          <a:p>
+            <a:pPr algn="ctr"/>
+            <a:r>
+              <a:rPr lang="en-US" dirty="0"/>
+              <a:t>Raw Data File name </a:t>
+            </a:r>
+            <a:r>
+              <a:rPr lang="en-US" dirty="0">
+                <a:ea typeface="+mn-lt"/>
+                <a:cs typeface="+mn-lt"/>
+              </a:rPr>
+              <a:t>PumpHeat_HeatExchanger.0.5flow.vc.</a:t>
+            </a:r>
+            <a:endParaRPr lang="en-US"/>
+          </a:p>
+        </p:txBody>
+      </p:sp>
+    </p:spTree>
+    <p:extLst>
+      <p:ext uri="{BB962C8B-B14F-4D97-AF65-F5344CB8AC3E}">
+        <p14:creationId xmlns:p14="http://schemas.microsoft.com/office/powerpoint/2010/main" val="3394296391"/>
+      </p:ext>
+    </p:extLst>
+  </p:cSld>
+  <p:clrMapOvr>
+    <a:masterClrMapping/>
+  </p:clrMapOvr>
+</p:sld>
+</file>
+
+<file path=ppt/slides/slide5.xml><?xml version="1.0" encoding="utf-8"?>
+<p:sld xmlns:a="http://schemas.openxmlformats.org/drawingml/2006/main" xmlns:r="http://schemas.openxmlformats.org/officeDocument/2006/relationships" xmlns:p="http://schemas.openxmlformats.org/presentationml/2006/main">
+  <p:cSld>
+    <p:spTree>
+      <p:nvGrpSpPr>
+        <p:cNvPr id="1" name="">
+          <a:extLst>
+            <a:ext uri="{FF2B5EF4-FFF2-40B4-BE49-F238E27FC236}">
+              <a16:creationId xmlns:a16="http://schemas.microsoft.com/office/drawing/2014/main" id="{9AFDF58F-F26C-BD7B-826D-5853214ABD51}"/>
+            </a:ext>
+          </a:extLst>
+        </p:cNvPr>
+        <p:cNvGrpSpPr/>
+        <p:nvPr/>
+      </p:nvGrpSpPr>
+      <p:grpSpPr>
+        <a:xfrm>
+          <a:off x="0" y="0"/>
+          <a:ext cx="0" cy="0"/>
+          <a:chOff x="0" y="0"/>
+          <a:chExt cx="0" cy="0"/>
+        </a:xfrm>
+      </p:grpSpPr>
+      <p:sp>
+        <p:nvSpPr>
+          <p:cNvPr id="13" name="Title 1">
+            <a:extLst>
+              <a:ext uri="{FF2B5EF4-FFF2-40B4-BE49-F238E27FC236}">
+                <a16:creationId xmlns:a16="http://schemas.microsoft.com/office/drawing/2014/main" id="{3E9446C5-CE24-A01A-46C0-41E84B2002A0}"/>
+              </a:ext>
+            </a:extLst>
+          </p:cNvPr>
+          <p:cNvSpPr txBox="1">
+            <a:spLocks/>
+          </p:cNvSpPr>
+          <p:nvPr/>
+        </p:nvSpPr>
+        <p:spPr>
+          <a:xfrm>
+            <a:off x="768458" y="373278"/>
+            <a:ext cx="10667998" cy="831312"/>
+          </a:xfrm>
+          <a:prstGeom prst="rect">
+            <a:avLst/>
+          </a:prstGeom>
+        </p:spPr>
+        <p:txBody>
+          <a:bodyPr lIns="91440" tIns="45720" rIns="91440" bIns="45720" anchor="t"/>
+          <a:lstStyle>
+            <a:lvl1pPr algn="l" defTabSz="914400" rtl="0" eaLnBrk="1" latinLnBrk="0" hangingPunct="1">
+              <a:lnSpc>
+                <a:spcPct val="90000"/>
+              </a:lnSpc>
+              <a:spcBef>
+                <a:spcPct val="0"/>
+              </a:spcBef>
+              <a:buNone/>
+              <a:defRPr sz="4400" kern="1200">
+                <a:solidFill>
+                  <a:schemeClr val="tx1"/>
+                </a:solidFill>
+                <a:latin typeface="+mj-lt"/>
+                <a:ea typeface="+mj-ea"/>
+                <a:cs typeface="+mj-cs"/>
+              </a:defRPr>
+            </a:lvl1pPr>
+          </a:lstStyle>
+          <a:p>
+            <a:r>
+              <a:rPr lang="en-US" sz="6000" dirty="0"/>
+              <a:t>Test #2: Additional close up data</a:t>
+            </a:r>
+          </a:p>
+        </p:txBody>
+      </p:sp>
+      <p:pic>
+        <p:nvPicPr>
+          <p:cNvPr id="14" name="Picture 13">
+            <a:extLst>
+              <a:ext uri="{FF2B5EF4-FFF2-40B4-BE49-F238E27FC236}">
+                <a16:creationId xmlns:a16="http://schemas.microsoft.com/office/drawing/2014/main" id="{E19C531E-FC6B-0A40-DB5C-546F600A28C6}"/>
+              </a:ext>
+            </a:extLst>
+          </p:cNvPr>
+          <p:cNvPicPr>
+            <a:picLocks noChangeAspect="1"/>
+          </p:cNvPicPr>
+          <p:nvPr/>
+        </p:nvPicPr>
+        <p:blipFill>
+          <a:blip r:embed="rId2"/>
+          <a:stretch>
+            <a:fillRect/>
+          </a:stretch>
+        </p:blipFill>
+        <p:spPr>
+          <a:xfrm>
+            <a:off x="6097943" y="1711271"/>
+            <a:ext cx="6085655" cy="4010187"/>
+          </a:xfrm>
+          <a:prstGeom prst="rect">
+            <a:avLst/>
+          </a:prstGeom>
+        </p:spPr>
+      </p:pic>
+      <p:pic>
+        <p:nvPicPr>
+          <p:cNvPr id="17" name="Picture 16" descr="A graph of a temperature&#10;&#10;AI-generated content may be incorrect.">
+            <a:extLst>
+              <a:ext uri="{FF2B5EF4-FFF2-40B4-BE49-F238E27FC236}">
+                <a16:creationId xmlns:a16="http://schemas.microsoft.com/office/drawing/2014/main" id="{7C917F1E-5978-2D30-56AD-79BF15C5525F}"/>
+              </a:ext>
+            </a:extLst>
+          </p:cNvPr>
+          <p:cNvPicPr>
+            <a:picLocks noChangeAspect="1"/>
+          </p:cNvPicPr>
+          <p:nvPr/>
+        </p:nvPicPr>
+        <p:blipFill>
+          <a:blip r:embed="rId3"/>
+          <a:stretch>
+            <a:fillRect/>
+          </a:stretch>
+        </p:blipFill>
+        <p:spPr>
+          <a:xfrm>
+            <a:off x="1944" y="1717598"/>
+            <a:ext cx="6078413" cy="4003859"/>
+          </a:xfrm>
+          <a:prstGeom prst="rect">
+            <a:avLst/>
+          </a:prstGeom>
+        </p:spPr>
+      </p:pic>
+      <p:sp>
+        <p:nvSpPr>
+          <p:cNvPr id="19" name="TextBox 18">
+            <a:extLst>
+              <a:ext uri="{FF2B5EF4-FFF2-40B4-BE49-F238E27FC236}">
+                <a16:creationId xmlns:a16="http://schemas.microsoft.com/office/drawing/2014/main" id="{22B336D7-A0FD-9AF3-43D4-E764063ECC59}"/>
+              </a:ext>
+            </a:extLst>
+          </p:cNvPr>
+          <p:cNvSpPr txBox="1"/>
+          <p:nvPr/>
+        </p:nvSpPr>
+        <p:spPr>
+          <a:xfrm>
+            <a:off x="8069139" y="2572696"/>
             <a:ext cx="2712203" cy="369332"/>
           </a:xfrm>
           <a:prstGeom prst="rect">
@@ -3493,10 +4639,10 @@
       </p:sp>
       <p:cxnSp>
         <p:nvCxnSpPr>
-          <p:cNvPr id="4" name="Straight Arrow Connector 3">
+          <p:cNvPr id="21" name="Straight Arrow Connector 20">
             <a:extLst>
               <a:ext uri="{FF2B5EF4-FFF2-40B4-BE49-F238E27FC236}">
-                <a16:creationId xmlns:a16="http://schemas.microsoft.com/office/drawing/2014/main" id="{F53F094F-DD5F-304B-1E22-BD06E0FECFB0}"/>
+                <a16:creationId xmlns:a16="http://schemas.microsoft.com/office/drawing/2014/main" id="{D03332B8-97CB-27C6-8DC3-49951AFECCBD}"/>
               </a:ext>
             </a:extLst>
           </p:cNvPr>
@@ -3505,7 +4651,7 @@
         </p:nvCxnSpPr>
         <p:spPr>
           <a:xfrm flipH="1" flipV="1">
-            <a:off x="2564435" y="314620"/>
+            <a:off x="7317249" y="2174417"/>
             <a:ext cx="793531" cy="563617"/>
           </a:xfrm>
           <a:prstGeom prst="straightConnector1">
@@ -3530,10 +4676,102 @@
           </a:fontRef>
         </p:style>
       </p:cxnSp>
+      <p:sp>
+        <p:nvSpPr>
+          <p:cNvPr id="22" name="TextBox 21">
+            <a:extLst>
+              <a:ext uri="{FF2B5EF4-FFF2-40B4-BE49-F238E27FC236}">
+                <a16:creationId xmlns:a16="http://schemas.microsoft.com/office/drawing/2014/main" id="{9384253B-A241-D1AA-019A-D062B6157B55}"/>
+              </a:ext>
+            </a:extLst>
+          </p:cNvPr>
+          <p:cNvSpPr txBox="1"/>
+          <p:nvPr/>
+        </p:nvSpPr>
+        <p:spPr>
+          <a:xfrm>
+            <a:off x="578603" y="5718875"/>
+            <a:ext cx="5158352" cy="369332"/>
+          </a:xfrm>
+          <a:prstGeom prst="rect">
+            <a:avLst/>
+          </a:prstGeom>
+          <a:noFill/>
+        </p:spPr>
+        <p:txBody>
+          <a:bodyPr rot="0" spcFirstLastPara="0" vertOverflow="overflow" horzOverflow="overflow" vert="horz" wrap="square" lIns="91440" tIns="45720" rIns="91440" bIns="45720" numCol="1" spcCol="0" rtlCol="0" fromWordArt="0" anchor="t" anchorCtr="0" forceAA="0" compatLnSpc="1">
+            <a:prstTxWarp prst="textNoShape">
+              <a:avLst/>
+            </a:prstTxWarp>
+            <a:spAutoFit/>
+          </a:bodyPr>
+          <a:lstStyle/>
+          <a:p>
+            <a:r>
+              <a:rPr lang="en-US" dirty="0"/>
+              <a:t>PDF name- </a:t>
+            </a:r>
+            <a:r>
+              <a:rPr lang="en-US" dirty="0">
+                <a:ea typeface="+mn-lt"/>
+                <a:cs typeface="+mn-lt"/>
+              </a:rPr>
+              <a:t>PumpHeat_up_6_hours.vc</a:t>
+            </a:r>
+            <a:endParaRPr lang="en-US" dirty="0"/>
+          </a:p>
+        </p:txBody>
+      </p:sp>
+      <p:sp>
+        <p:nvSpPr>
+          <p:cNvPr id="23" name="TextBox 22">
+            <a:extLst>
+              <a:ext uri="{FF2B5EF4-FFF2-40B4-BE49-F238E27FC236}">
+                <a16:creationId xmlns:a16="http://schemas.microsoft.com/office/drawing/2014/main" id="{83D4DDC8-E033-4252-6812-536A9CBD61B5}"/>
+              </a:ext>
+            </a:extLst>
+          </p:cNvPr>
+          <p:cNvSpPr txBox="1"/>
+          <p:nvPr/>
+        </p:nvSpPr>
+        <p:spPr>
+          <a:xfrm>
+            <a:off x="6564823" y="5718874"/>
+            <a:ext cx="5726622" cy="369332"/>
+          </a:xfrm>
+          <a:prstGeom prst="rect">
+            <a:avLst/>
+          </a:prstGeom>
+          <a:noFill/>
+        </p:spPr>
+        <p:txBody>
+          <a:bodyPr rot="0" spcFirstLastPara="0" vertOverflow="overflow" horzOverflow="overflow" vert="horz" wrap="square" lIns="91440" tIns="45720" rIns="91440" bIns="45720" numCol="1" spcCol="0" rtlCol="0" fromWordArt="0" anchor="t" anchorCtr="0" forceAA="0" compatLnSpc="1">
+            <a:prstTxWarp prst="textNoShape">
+              <a:avLst/>
+            </a:prstTxWarp>
+            <a:spAutoFit/>
+          </a:bodyPr>
+          <a:lstStyle/>
+          <a:p>
+            <a:r>
+              <a:rPr lang="en-US" dirty="0"/>
+              <a:t>PDF name- PumpHeat</a:t>
+            </a:r>
+            <a:r>
+              <a:rPr lang="en-US" dirty="0">
+                <a:ea typeface="+mn-lt"/>
+                <a:cs typeface="+mn-lt"/>
+              </a:rPr>
+              <a:t>_HeatExchange_0.5gal._flow.vc</a:t>
+            </a:r>
+            <a:endParaRPr lang="en-US" dirty="0"/>
+          </a:p>
+        </p:txBody>
+      </p:sp>
     </p:spTree>
     <p:extLst>
       <p:ext uri="{BB962C8B-B14F-4D97-AF65-F5344CB8AC3E}">
-        <p14:creationId xmlns:p14="http://schemas.microsoft.com/office/powerpoint/2010/main" val="4265888717"/>
+        <p14:creationId xmlns:p14="http://schemas.microsoft.com/office/powerpoint/2010/main" val="3650925661"/>
       </p:ext>
     </p:extLst>
   </p:cSld>
@@ -3543,7 +4781,7 @@
 </p:sld>
 </file>
 
-<file path=ppt/slides/slide15.xml><?xml version="1.0" encoding="utf-8"?>
+<file path=ppt/slides/slide6.xml><?xml version="1.0" encoding="utf-8"?>
 <p:sld xmlns:a="http://schemas.openxmlformats.org/drawingml/2006/main" xmlns:r="http://schemas.openxmlformats.org/officeDocument/2006/relationships" xmlns:p="http://schemas.openxmlformats.org/presentationml/2006/main">
   <p:cSld>
     <p:spTree>
@@ -3551,7 +4789,7 @@
         <p:cNvPr id="1" name="">
           <a:extLst>
             <a:ext uri="{FF2B5EF4-FFF2-40B4-BE49-F238E27FC236}">
-              <a16:creationId xmlns:a16="http://schemas.microsoft.com/office/drawing/2014/main" id="{E1E7A550-37D4-F3D4-6E50-0FFF6B5AF6B7}"/>
+              <a16:creationId xmlns:a16="http://schemas.microsoft.com/office/drawing/2014/main" id="{AEA9992B-5CA2-DCFC-B54B-DC475D783B40}"/>
             </a:ext>
           </a:extLst>
         </p:cNvPr>
@@ -3571,7 +4809,7 @@
           <p:cNvPr id="2" name="Title 1">
             <a:extLst>
               <a:ext uri="{FF2B5EF4-FFF2-40B4-BE49-F238E27FC236}">
-                <a16:creationId xmlns:a16="http://schemas.microsoft.com/office/drawing/2014/main" id="{CCA549DA-2BFB-C6C3-766E-C662A7FB2F8C}"/>
+                <a16:creationId xmlns:a16="http://schemas.microsoft.com/office/drawing/2014/main" id="{67952302-D653-5496-5445-A6FD07B1C7C3}"/>
               </a:ext>
             </a:extLst>
           </p:cNvPr>
@@ -3582,118 +4820,259 @@
             <p:ph type="ctrTitle"/>
           </p:nvPr>
         </p:nvSpPr>
-        <p:spPr/>
+        <p:spPr>
+          <a:xfrm>
+            <a:off x="-162526" y="174073"/>
+            <a:ext cx="12155424" cy="985520"/>
+          </a:xfrm>
+        </p:spPr>
         <p:txBody>
           <a:bodyPr>
-            <a:normAutofit fontScale="90000"/>
+            <a:normAutofit/>
           </a:bodyPr>
           <a:lstStyle/>
           <a:p>
             <a:r>
-              <a:rPr lang="en-US"/>
-              <a:t>6-hour pump heat up</a:t>
-            </a:r>
-            <a:br>
-              <a:rPr lang="en-US"/>
-            </a:br>
-            <a:r>
-              <a:rPr lang="en-US"/>
-              <a:t>+</a:t>
-            </a:r>
-            <a:br>
-              <a:rPr lang="en-US"/>
-            </a:br>
-            <a:r>
-              <a:rPr lang="en-US"/>
-              <a:t>0.5gal/min Heat exchanger</a:t>
-            </a:r>
-          </a:p>
-        </p:txBody>
-      </p:sp>
-      <p:sp>
-        <p:nvSpPr>
-          <p:cNvPr id="3" name="Subtitle 2">
+              <a:rPr lang="en-US" dirty="0"/>
+              <a:t>Test #3: Rod Heat up</a:t>
+            </a:r>
+          </a:p>
+        </p:txBody>
+      </p:sp>
+      <p:sp>
+        <p:nvSpPr>
+          <p:cNvPr id="5" name="Content Placeholder 2">
             <a:extLst>
               <a:ext uri="{FF2B5EF4-FFF2-40B4-BE49-F238E27FC236}">
-                <a16:creationId xmlns:a16="http://schemas.microsoft.com/office/drawing/2014/main" id="{8AD32E18-4C5C-C452-580D-63E8600F6BE3}"/>
+                <a16:creationId xmlns:a16="http://schemas.microsoft.com/office/drawing/2014/main" id="{010A09DB-E398-24A0-038C-5DF67CA531DE}"/>
               </a:ext>
             </a:extLst>
           </p:cNvPr>
-          <p:cNvSpPr>
-            <a:spLocks noGrp="1"/>
-          </p:cNvSpPr>
-          <p:nvPr>
-            <p:ph type="subTitle" idx="1"/>
-          </p:nvPr>
-        </p:nvSpPr>
-        <p:spPr/>
+          <p:cNvSpPr txBox="1">
+            <a:spLocks/>
+          </p:cNvSpPr>
+          <p:nvPr/>
+        </p:nvSpPr>
+        <p:spPr>
+          <a:xfrm>
+            <a:off x="-122798" y="2100565"/>
+            <a:ext cx="6041136" cy="3790506"/>
+          </a:xfrm>
+          <a:prstGeom prst="rect">
+            <a:avLst/>
+          </a:prstGeom>
+        </p:spPr>
         <p:txBody>
           <a:bodyPr vert="horz" lIns="91440" tIns="45720" rIns="91440" bIns="45720" rtlCol="0" anchor="t">
             <a:normAutofit/>
           </a:bodyPr>
-          <a:lstStyle/>
-          <a:p>
-            <a:r>
-              <a:rPr lang="en-US" dirty="0">
-                <a:hlinkClick r:id="rId2"/>
-              </a:rPr>
-              <a:t>PDF Graph Download</a:t>
-            </a:r>
+          <a:lstStyle>
+            <a:lvl1pPr marL="0" indent="0" algn="ctr" defTabSz="914400" rtl="0" eaLnBrk="1" latinLnBrk="0" hangingPunct="1">
+              <a:lnSpc>
+                <a:spcPct val="90000"/>
+              </a:lnSpc>
+              <a:spcBef>
+                <a:spcPts val="1000"/>
+              </a:spcBef>
+              <a:buFont typeface="Arial" panose="020B0604020202020204" pitchFamily="34" charset="0"/>
+              <a:buNone/>
+              <a:defRPr sz="2400" kern="1200">
+                <a:solidFill>
+                  <a:schemeClr val="tx1"/>
+                </a:solidFill>
+                <a:latin typeface="+mn-lt"/>
+                <a:ea typeface="+mn-ea"/>
+                <a:cs typeface="+mn-cs"/>
+              </a:defRPr>
+            </a:lvl1pPr>
+            <a:lvl2pPr marL="457200" indent="0" algn="ctr" defTabSz="914400" rtl="0" eaLnBrk="1" latinLnBrk="0" hangingPunct="1">
+              <a:lnSpc>
+                <a:spcPct val="90000"/>
+              </a:lnSpc>
+              <a:spcBef>
+                <a:spcPts val="500"/>
+              </a:spcBef>
+              <a:buFont typeface="Arial" panose="020B0604020202020204" pitchFamily="34" charset="0"/>
+              <a:buNone/>
+              <a:defRPr sz="2000" kern="1200">
+                <a:solidFill>
+                  <a:schemeClr val="tx1"/>
+                </a:solidFill>
+                <a:latin typeface="+mn-lt"/>
+                <a:ea typeface="+mn-ea"/>
+                <a:cs typeface="+mn-cs"/>
+              </a:defRPr>
+            </a:lvl2pPr>
+            <a:lvl3pPr marL="914400" indent="0" algn="ctr" defTabSz="914400" rtl="0" eaLnBrk="1" latinLnBrk="0" hangingPunct="1">
+              <a:lnSpc>
+                <a:spcPct val="90000"/>
+              </a:lnSpc>
+              <a:spcBef>
+                <a:spcPts val="500"/>
+              </a:spcBef>
+              <a:buFont typeface="Arial" panose="020B0604020202020204" pitchFamily="34" charset="0"/>
+              <a:buNone/>
+              <a:defRPr sz="1800" kern="1200">
+                <a:solidFill>
+                  <a:schemeClr val="tx1"/>
+                </a:solidFill>
+                <a:latin typeface="+mn-lt"/>
+                <a:ea typeface="+mn-ea"/>
+                <a:cs typeface="+mn-cs"/>
+              </a:defRPr>
+            </a:lvl3pPr>
+            <a:lvl4pPr marL="1371600" indent="0" algn="ctr" defTabSz="914400" rtl="0" eaLnBrk="1" latinLnBrk="0" hangingPunct="1">
+              <a:lnSpc>
+                <a:spcPct val="90000"/>
+              </a:lnSpc>
+              <a:spcBef>
+                <a:spcPts val="500"/>
+              </a:spcBef>
+              <a:buFont typeface="Arial" panose="020B0604020202020204" pitchFamily="34" charset="0"/>
+              <a:buNone/>
+              <a:defRPr sz="1600" kern="1200">
+                <a:solidFill>
+                  <a:schemeClr val="tx1"/>
+                </a:solidFill>
+                <a:latin typeface="+mn-lt"/>
+                <a:ea typeface="+mn-ea"/>
+                <a:cs typeface="+mn-cs"/>
+              </a:defRPr>
+            </a:lvl4pPr>
+            <a:lvl5pPr marL="1828800" indent="0" algn="ctr" defTabSz="914400" rtl="0" eaLnBrk="1" latinLnBrk="0" hangingPunct="1">
+              <a:lnSpc>
+                <a:spcPct val="90000"/>
+              </a:lnSpc>
+              <a:spcBef>
+                <a:spcPts val="500"/>
+              </a:spcBef>
+              <a:buFont typeface="Arial" panose="020B0604020202020204" pitchFamily="34" charset="0"/>
+              <a:buNone/>
+              <a:defRPr sz="1600" kern="1200">
+                <a:solidFill>
+                  <a:schemeClr val="tx1"/>
+                </a:solidFill>
+                <a:latin typeface="+mn-lt"/>
+                <a:ea typeface="+mn-ea"/>
+                <a:cs typeface="+mn-cs"/>
+              </a:defRPr>
+            </a:lvl5pPr>
+            <a:lvl6pPr marL="2286000" indent="0" algn="ctr" defTabSz="914400" rtl="0" eaLnBrk="1" latinLnBrk="0" hangingPunct="1">
+              <a:lnSpc>
+                <a:spcPct val="90000"/>
+              </a:lnSpc>
+              <a:spcBef>
+                <a:spcPts val="500"/>
+              </a:spcBef>
+              <a:buFont typeface="Arial" panose="020B0604020202020204" pitchFamily="34" charset="0"/>
+              <a:buNone/>
+              <a:defRPr sz="1600" kern="1200">
+                <a:solidFill>
+                  <a:schemeClr val="tx1"/>
+                </a:solidFill>
+                <a:latin typeface="+mn-lt"/>
+                <a:ea typeface="+mn-ea"/>
+                <a:cs typeface="+mn-cs"/>
+              </a:defRPr>
+            </a:lvl6pPr>
+            <a:lvl7pPr marL="2743200" indent="0" algn="ctr" defTabSz="914400" rtl="0" eaLnBrk="1" latinLnBrk="0" hangingPunct="1">
+              <a:lnSpc>
+                <a:spcPct val="90000"/>
+              </a:lnSpc>
+              <a:spcBef>
+                <a:spcPts val="500"/>
+              </a:spcBef>
+              <a:buFont typeface="Arial" panose="020B0604020202020204" pitchFamily="34" charset="0"/>
+              <a:buNone/>
+              <a:defRPr sz="1600" kern="1200">
+                <a:solidFill>
+                  <a:schemeClr val="tx1"/>
+                </a:solidFill>
+                <a:latin typeface="+mn-lt"/>
+                <a:ea typeface="+mn-ea"/>
+                <a:cs typeface="+mn-cs"/>
+              </a:defRPr>
+            </a:lvl7pPr>
+            <a:lvl8pPr marL="3200400" indent="0" algn="ctr" defTabSz="914400" rtl="0" eaLnBrk="1" latinLnBrk="0" hangingPunct="1">
+              <a:lnSpc>
+                <a:spcPct val="90000"/>
+              </a:lnSpc>
+              <a:spcBef>
+                <a:spcPts val="500"/>
+              </a:spcBef>
+              <a:buFont typeface="Arial" panose="020B0604020202020204" pitchFamily="34" charset="0"/>
+              <a:buNone/>
+              <a:defRPr sz="1600" kern="1200">
+                <a:solidFill>
+                  <a:schemeClr val="tx1"/>
+                </a:solidFill>
+                <a:latin typeface="+mn-lt"/>
+                <a:ea typeface="+mn-ea"/>
+                <a:cs typeface="+mn-cs"/>
+              </a:defRPr>
+            </a:lvl8pPr>
+            <a:lvl9pPr marL="3657600" indent="0" algn="ctr" defTabSz="914400" rtl="0" eaLnBrk="1" latinLnBrk="0" hangingPunct="1">
+              <a:lnSpc>
+                <a:spcPct val="90000"/>
+              </a:lnSpc>
+              <a:spcBef>
+                <a:spcPts val="500"/>
+              </a:spcBef>
+              <a:buFont typeface="Arial" panose="020B0604020202020204" pitchFamily="34" charset="0"/>
+              <a:buNone/>
+              <a:defRPr sz="1600" kern="1200">
+                <a:solidFill>
+                  <a:schemeClr val="tx1"/>
+                </a:solidFill>
+                <a:latin typeface="+mn-lt"/>
+                <a:ea typeface="+mn-ea"/>
+                <a:cs typeface="+mn-cs"/>
+              </a:defRPr>
+            </a:lvl9pPr>
+          </a:lstStyle>
+          <a:p>
+            <a:pPr marL="457200" indent="-457200">
+              <a:buFont typeface="Calibri" panose="020B0604020202020204" pitchFamily="34" charset="0"/>
+              <a:buChar char="-"/>
+            </a:pPr>
+            <a:r>
+              <a:rPr lang="en-US" sz="2800"/>
+              <a:t>Middle Valve closed</a:t>
+            </a:r>
+            <a:endParaRPr lang="en-US"/>
+          </a:p>
+          <a:p>
+            <a:pPr marL="457200" indent="-457200">
+              <a:buFont typeface="Calibri" panose="020B0604020202020204" pitchFamily="34" charset="0"/>
+              <a:buChar char="-"/>
+            </a:pPr>
+            <a:r>
+              <a:rPr lang="en-US" sz="2800" dirty="0"/>
+              <a:t>Upper Valve open</a:t>
+            </a:r>
+          </a:p>
+          <a:p>
+            <a:pPr marL="457200" indent="-457200">
+              <a:buFont typeface="Calibri" panose="020B0604020202020204" pitchFamily="34" charset="0"/>
+              <a:buChar char="-"/>
+            </a:pPr>
+            <a:r>
+              <a:rPr lang="en-US" sz="2800"/>
+              <a:t>Heat Exchanger 0.5 gal/min at 4.5 hours </a:t>
+            </a:r>
+            <a:endParaRPr lang="en-US"/>
+          </a:p>
+          <a:p>
             <a:endParaRPr lang="en-US" dirty="0"/>
           </a:p>
-          <a:p>
-            <a:r>
-              <a:rPr lang="en-US" dirty="0">
-                <a:hlinkClick r:id="rId3"/>
-              </a:rPr>
-              <a:t>Raw Data File Download</a:t>
-            </a:r>
-            <a:endParaRPr lang="en-US" dirty="0"/>
-          </a:p>
-        </p:txBody>
-      </p:sp>
-    </p:spTree>
-    <p:extLst>
-      <p:ext uri="{BB962C8B-B14F-4D97-AF65-F5344CB8AC3E}">
-        <p14:creationId xmlns:p14="http://schemas.microsoft.com/office/powerpoint/2010/main" val="3377682008"/>
-      </p:ext>
-    </p:extLst>
-  </p:cSld>
-  <p:clrMapOvr>
-    <a:masterClrMapping/>
-  </p:clrMapOvr>
-</p:sld>
-</file>
-
-<file path=ppt/slides/slide16.xml><?xml version="1.0" encoding="utf-8"?>
-<p:sld xmlns:a="http://schemas.openxmlformats.org/drawingml/2006/main" xmlns:r="http://schemas.openxmlformats.org/officeDocument/2006/relationships" xmlns:p="http://schemas.openxmlformats.org/presentationml/2006/main">
-  <p:cSld>
-    <p:spTree>
-      <p:nvGrpSpPr>
-        <p:cNvPr id="1" name="">
-          <a:extLst>
-            <a:ext uri="{FF2B5EF4-FFF2-40B4-BE49-F238E27FC236}">
-              <a16:creationId xmlns:a16="http://schemas.microsoft.com/office/drawing/2014/main" id="{03950B34-B88E-7AA7-ED8A-A717136C8F03}"/>
-            </a:ext>
-          </a:extLst>
-        </p:cNvPr>
-        <p:cNvGrpSpPr/>
-        <p:nvPr/>
-      </p:nvGrpSpPr>
-      <p:grpSpPr>
-        <a:xfrm>
-          <a:off x="0" y="0"/>
-          <a:ext cx="0" cy="0"/>
-          <a:chOff x="0" y="0"/>
-          <a:chExt cx="0" cy="0"/>
-        </a:xfrm>
-      </p:grpSpPr>
+        </p:txBody>
+      </p:sp>
       <p:pic>
         <p:nvPicPr>
-          <p:cNvPr id="2" name="Picture 1">
+          <p:cNvPr id="6" name="Picture 5" descr="A graph showing the temperature&#10;&#10;AI-generated content may be incorrect.">
             <a:extLst>
               <a:ext uri="{FF2B5EF4-FFF2-40B4-BE49-F238E27FC236}">
-                <a16:creationId xmlns:a16="http://schemas.microsoft.com/office/drawing/2014/main" id="{36509DEB-BEDC-8027-2472-4FC83E16C5E3}"/>
+                <a16:creationId xmlns:a16="http://schemas.microsoft.com/office/drawing/2014/main" id="{16B1EE2C-9667-ECFC-F4C6-5D9280AFD2DF}"/>
               </a:ext>
             </a:extLst>
           </p:cNvPr>
@@ -3710,18 +5089,121 @@
         </p:blipFill>
         <p:spPr>
           <a:xfrm>
-            <a:off x="886639" y="0"/>
-            <a:ext cx="10418721" cy="6858000"/>
+            <a:off x="5733186" y="1307702"/>
+            <a:ext cx="6460196" cy="4242663"/>
           </a:xfrm>
           <a:prstGeom prst="rect">
             <a:avLst/>
           </a:prstGeom>
         </p:spPr>
       </p:pic>
+      <p:sp>
+        <p:nvSpPr>
+          <p:cNvPr id="8" name="TextBox 7">
+            <a:extLst>
+              <a:ext uri="{FF2B5EF4-FFF2-40B4-BE49-F238E27FC236}">
+                <a16:creationId xmlns:a16="http://schemas.microsoft.com/office/drawing/2014/main" id="{D56C3EA2-9C44-DFD4-1C5A-3E36729716D4}"/>
+              </a:ext>
+            </a:extLst>
+          </p:cNvPr>
+          <p:cNvSpPr txBox="1"/>
+          <p:nvPr/>
+        </p:nvSpPr>
+        <p:spPr>
+          <a:xfrm>
+            <a:off x="6384010" y="5550977"/>
+            <a:ext cx="5158352" cy="369332"/>
+          </a:xfrm>
+          <a:prstGeom prst="rect">
+            <a:avLst/>
+          </a:prstGeom>
+          <a:noFill/>
+        </p:spPr>
+        <p:txBody>
+          <a:bodyPr rot="0" spcFirstLastPara="0" vertOverflow="overflow" horzOverflow="overflow" vert="horz" wrap="square" lIns="91440" tIns="45720" rIns="91440" bIns="45720" numCol="1" spcCol="0" rtlCol="0" fromWordArt="0" anchor="t" anchorCtr="0" forceAA="0" compatLnSpc="1">
+            <a:prstTxWarp prst="textNoShape">
+              <a:avLst/>
+            </a:prstTxWarp>
+            <a:spAutoFit/>
+          </a:bodyPr>
+          <a:lstStyle/>
+          <a:p>
+            <a:r>
+              <a:rPr lang="en-US" dirty="0"/>
+              <a:t>PDF name- </a:t>
+            </a:r>
+            <a:r>
+              <a:rPr lang="en-US" dirty="0" err="1">
+                <a:ea typeface="+mn-lt"/>
+                <a:cs typeface="+mn-lt"/>
+              </a:rPr>
+              <a:t>Full_RodHeat</a:t>
+            </a:r>
+            <a:r>
+              <a:rPr lang="en-US" dirty="0">
+                <a:ea typeface="+mn-lt"/>
+                <a:cs typeface="+mn-lt"/>
+              </a:rPr>
+              <a:t>(HeatExchange.flow.vc)</a:t>
+            </a:r>
+            <a:endParaRPr lang="en-US" dirty="0"/>
+          </a:p>
+        </p:txBody>
+      </p:sp>
+      <p:sp>
+        <p:nvSpPr>
+          <p:cNvPr id="10" name="TextBox 9">
+            <a:extLst>
+              <a:ext uri="{FF2B5EF4-FFF2-40B4-BE49-F238E27FC236}">
+                <a16:creationId xmlns:a16="http://schemas.microsoft.com/office/drawing/2014/main" id="{D3FA8332-03B3-3541-C302-F603CBC0B657}"/>
+              </a:ext>
+            </a:extLst>
+          </p:cNvPr>
+          <p:cNvSpPr txBox="1"/>
+          <p:nvPr/>
+        </p:nvSpPr>
+        <p:spPr>
+          <a:xfrm>
+            <a:off x="71033" y="4462219"/>
+            <a:ext cx="5605219" cy="646331"/>
+          </a:xfrm>
+          <a:prstGeom prst="rect">
+            <a:avLst/>
+          </a:prstGeom>
+          <a:noFill/>
+        </p:spPr>
+        <p:txBody>
+          <a:bodyPr rot="0" spcFirstLastPara="0" vertOverflow="overflow" horzOverflow="overflow" vert="horz" wrap="square" lIns="91440" tIns="45720" rIns="91440" bIns="45720" numCol="1" spcCol="0" rtlCol="0" fromWordArt="0" anchor="t" anchorCtr="0" forceAA="0" compatLnSpc="1">
+            <a:prstTxWarp prst="textNoShape">
+              <a:avLst/>
+            </a:prstTxWarp>
+            <a:spAutoFit/>
+          </a:bodyPr>
+          <a:lstStyle/>
+          <a:p>
+            <a:pPr algn="ctr"/>
+            <a:r>
+              <a:rPr lang="en-US" dirty="0"/>
+              <a:t>Raw Data File name</a:t>
+            </a:r>
+          </a:p>
+          <a:p>
+            <a:pPr algn="ctr"/>
+            <a:r>
+              <a:rPr lang="en-US" dirty="0" err="1">
+                <a:ea typeface="+mn-lt"/>
+                <a:cs typeface="+mn-lt"/>
+              </a:rPr>
+              <a:t>RodHeat_NewData</a:t>
+            </a:r>
+            <a:endParaRPr lang="en-US" dirty="0" err="1"/>
+          </a:p>
+        </p:txBody>
+      </p:sp>
     </p:spTree>
     <p:extLst>
       <p:ext uri="{BB962C8B-B14F-4D97-AF65-F5344CB8AC3E}">
-        <p14:creationId xmlns:p14="http://schemas.microsoft.com/office/powerpoint/2010/main" val="1386898239"/>
+        <p14:creationId xmlns:p14="http://schemas.microsoft.com/office/powerpoint/2010/main" val="382553548"/>
       </p:ext>
     </p:extLst>
   </p:cSld>
@@ -3731,7 +5213,7 @@
 </p:sld>
 </file>
 
-<file path=ppt/slides/slide17.xml><?xml version="1.0" encoding="utf-8"?>
+<file path=ppt/slides/slide7.xml><?xml version="1.0" encoding="utf-8"?>
 <p:sld xmlns:a="http://schemas.openxmlformats.org/drawingml/2006/main" xmlns:r="http://schemas.openxmlformats.org/officeDocument/2006/relationships" xmlns:p="http://schemas.openxmlformats.org/presentationml/2006/main">
   <p:cSld>
     <p:spTree>
@@ -3739,7 +5221,7 @@
         <p:cNvPr id="1" name="">
           <a:extLst>
             <a:ext uri="{FF2B5EF4-FFF2-40B4-BE49-F238E27FC236}">
-              <a16:creationId xmlns:a16="http://schemas.microsoft.com/office/drawing/2014/main" id="{8F075210-24B8-B231-FF9A-E8C7ADC9767D}"/>
+              <a16:creationId xmlns:a16="http://schemas.microsoft.com/office/drawing/2014/main" id="{BD1E15B5-E6B0-4F3B-E2A6-8D69EA42B54A}"/>
             </a:ext>
           </a:extLst>
         </p:cNvPr>
@@ -3756,201 +5238,62 @@
       </p:grpSpPr>
       <p:sp>
         <p:nvSpPr>
-          <p:cNvPr id="2" name="Title 1">
+          <p:cNvPr id="13" name="Title 1">
             <a:extLst>
               <a:ext uri="{FF2B5EF4-FFF2-40B4-BE49-F238E27FC236}">
-                <a16:creationId xmlns:a16="http://schemas.microsoft.com/office/drawing/2014/main" id="{05588F5C-4530-E47A-8AE4-4921187E0DA7}"/>
+                <a16:creationId xmlns:a16="http://schemas.microsoft.com/office/drawing/2014/main" id="{8ABADC48-4F08-33D1-79F0-D5F98C5369E1}"/>
               </a:ext>
             </a:extLst>
           </p:cNvPr>
-          <p:cNvSpPr>
-            <a:spLocks noGrp="1"/>
-          </p:cNvSpPr>
-          <p:nvPr>
-            <p:ph type="title"/>
-          </p:nvPr>
-        </p:nvSpPr>
-        <p:spPr/>
-        <p:txBody>
-          <a:bodyPr/>
-          <a:lstStyle/>
-          <a:p>
-            <a:r>
-              <a:rPr lang="en-US"/>
-              <a:t>Rod Heat Up Data (slides 18-23)</a:t>
-            </a:r>
-          </a:p>
-        </p:txBody>
-      </p:sp>
-      <p:sp>
-        <p:nvSpPr>
-          <p:cNvPr id="3" name="Content Placeholder 2">
+          <p:cNvSpPr txBox="1">
+            <a:spLocks/>
+          </p:cNvSpPr>
+          <p:nvPr/>
+        </p:nvSpPr>
+        <p:spPr>
+          <a:xfrm>
+            <a:off x="768458" y="373278"/>
+            <a:ext cx="10667998" cy="831312"/>
+          </a:xfrm>
+          <a:prstGeom prst="rect">
+            <a:avLst/>
+          </a:prstGeom>
+        </p:spPr>
+        <p:txBody>
+          <a:bodyPr lIns="91440" tIns="45720" rIns="91440" bIns="45720" anchor="t"/>
+          <a:lstStyle>
+            <a:lvl1pPr algn="l" defTabSz="914400" rtl="0" eaLnBrk="1" latinLnBrk="0" hangingPunct="1">
+              <a:lnSpc>
+                <a:spcPct val="90000"/>
+              </a:lnSpc>
+              <a:spcBef>
+                <a:spcPct val="0"/>
+              </a:spcBef>
+              <a:buNone/>
+              <a:defRPr sz="4400" kern="1200">
+                <a:solidFill>
+                  <a:schemeClr val="tx1"/>
+                </a:solidFill>
+                <a:latin typeface="+mj-lt"/>
+                <a:ea typeface="+mj-ea"/>
+                <a:cs typeface="+mj-cs"/>
+              </a:defRPr>
+            </a:lvl1pPr>
+          </a:lstStyle>
+          <a:p>
+            <a:r>
+              <a:rPr lang="en-US" sz="6000" dirty="0"/>
+              <a:t>Test #3: Additional close up data</a:t>
+            </a:r>
+          </a:p>
+        </p:txBody>
+      </p:sp>
+      <p:pic>
+        <p:nvPicPr>
+          <p:cNvPr id="3" name="Picture 2">
             <a:extLst>
               <a:ext uri="{FF2B5EF4-FFF2-40B4-BE49-F238E27FC236}">
-                <a16:creationId xmlns:a16="http://schemas.microsoft.com/office/drawing/2014/main" id="{46725CB9-6424-2C8C-2823-09580AF9A830}"/>
-              </a:ext>
-            </a:extLst>
-          </p:cNvPr>
-          <p:cNvSpPr>
-            <a:spLocks noGrp="1"/>
-          </p:cNvSpPr>
-          <p:nvPr>
-            <p:ph idx="1"/>
-          </p:nvPr>
-        </p:nvSpPr>
-        <p:spPr/>
-        <p:txBody>
-          <a:bodyPr vert="horz" lIns="91440" tIns="45720" rIns="91440" bIns="45720" rtlCol="0" anchor="t">
-            <a:normAutofit/>
-          </a:bodyPr>
-          <a:lstStyle/>
-          <a:p>
-            <a:r>
-              <a:rPr lang="en-US"/>
-              <a:t>Middle Valve closed</a:t>
-            </a:r>
-          </a:p>
-          <a:p>
-            <a:r>
-              <a:rPr lang="en-US"/>
-              <a:t>Upper Valve open</a:t>
-            </a:r>
-          </a:p>
-          <a:p>
-            <a:r>
-              <a:rPr lang="en-US"/>
-              <a:t>Heat Exchanger 0.5 gal/min at 4.5 hours </a:t>
-            </a:r>
-          </a:p>
-        </p:txBody>
-      </p:sp>
-    </p:spTree>
-    <p:extLst>
-      <p:ext uri="{BB962C8B-B14F-4D97-AF65-F5344CB8AC3E}">
-        <p14:creationId xmlns:p14="http://schemas.microsoft.com/office/powerpoint/2010/main" val="3341309276"/>
-      </p:ext>
-    </p:extLst>
-  </p:cSld>
-  <p:clrMapOvr>
-    <a:masterClrMapping/>
-  </p:clrMapOvr>
-</p:sld>
-</file>
-
-<file path=ppt/slides/slide18.xml><?xml version="1.0" encoding="utf-8"?>
-<p:sld xmlns:a="http://schemas.openxmlformats.org/drawingml/2006/main" xmlns:r="http://schemas.openxmlformats.org/officeDocument/2006/relationships" xmlns:p="http://schemas.openxmlformats.org/presentationml/2006/main">
-  <p:cSld>
-    <p:spTree>
-      <p:nvGrpSpPr>
-        <p:cNvPr id="1" name=""/>
-        <p:cNvGrpSpPr/>
-        <p:nvPr/>
-      </p:nvGrpSpPr>
-      <p:grpSpPr>
-        <a:xfrm>
-          <a:off x="0" y="0"/>
-          <a:ext cx="0" cy="0"/>
-          <a:chOff x="0" y="0"/>
-          <a:chExt cx="0" cy="0"/>
-        </a:xfrm>
-      </p:grpSpPr>
-      <p:sp>
-        <p:nvSpPr>
-          <p:cNvPr id="2" name="Title 1">
-            <a:extLst>
-              <a:ext uri="{FF2B5EF4-FFF2-40B4-BE49-F238E27FC236}">
-                <a16:creationId xmlns:a16="http://schemas.microsoft.com/office/drawing/2014/main" id="{380AFA0A-81AD-5995-88C5-4A23F908B64F}"/>
-              </a:ext>
-            </a:extLst>
-          </p:cNvPr>
-          <p:cNvSpPr>
-            <a:spLocks noGrp="1"/>
-          </p:cNvSpPr>
-          <p:nvPr>
-            <p:ph type="ctrTitle"/>
-          </p:nvPr>
-        </p:nvSpPr>
-        <p:spPr/>
-        <p:txBody>
-          <a:bodyPr/>
-          <a:lstStyle/>
-          <a:p>
-            <a:r>
-              <a:rPr lang="en-US"/>
-              <a:t>4.5-hour Rod heat up</a:t>
-            </a:r>
-          </a:p>
-        </p:txBody>
-      </p:sp>
-      <p:sp>
-        <p:nvSpPr>
-          <p:cNvPr id="3" name="Subtitle 2">
-            <a:extLst>
-              <a:ext uri="{FF2B5EF4-FFF2-40B4-BE49-F238E27FC236}">
-                <a16:creationId xmlns:a16="http://schemas.microsoft.com/office/drawing/2014/main" id="{F7AE2A58-31F6-87D6-160C-2603FDE0D6C4}"/>
-              </a:ext>
-            </a:extLst>
-          </p:cNvPr>
-          <p:cNvSpPr>
-            <a:spLocks noGrp="1"/>
-          </p:cNvSpPr>
-          <p:nvPr>
-            <p:ph type="subTitle" idx="1"/>
-          </p:nvPr>
-        </p:nvSpPr>
-        <p:spPr/>
-        <p:txBody>
-          <a:bodyPr vert="horz" lIns="91440" tIns="45720" rIns="91440" bIns="45720" rtlCol="0" anchor="t">
-            <a:normAutofit/>
-          </a:bodyPr>
-          <a:lstStyle/>
-          <a:p>
-            <a:r>
-              <a:rPr lang="en-US" dirty="0">
-                <a:hlinkClick r:id="rId2"/>
-              </a:rPr>
-              <a:t>PDF Graph Download</a:t>
-            </a:r>
-            <a:endParaRPr lang="en-US" dirty="0"/>
-          </a:p>
-        </p:txBody>
-      </p:sp>
-    </p:spTree>
-    <p:extLst>
-      <p:ext uri="{BB962C8B-B14F-4D97-AF65-F5344CB8AC3E}">
-        <p14:creationId xmlns:p14="http://schemas.microsoft.com/office/powerpoint/2010/main" val="1175689135"/>
-      </p:ext>
-    </p:extLst>
-  </p:cSld>
-  <p:clrMapOvr>
-    <a:masterClrMapping/>
-  </p:clrMapOvr>
-</p:sld>
-</file>
-
-<file path=ppt/slides/slide19.xml><?xml version="1.0" encoding="utf-8"?>
-<p:sld xmlns:a="http://schemas.openxmlformats.org/drawingml/2006/main" xmlns:r="http://schemas.openxmlformats.org/officeDocument/2006/relationships" xmlns:p="http://schemas.openxmlformats.org/presentationml/2006/main">
-  <p:cSld>
-    <p:spTree>
-      <p:nvGrpSpPr>
-        <p:cNvPr id="1" name=""/>
-        <p:cNvGrpSpPr/>
-        <p:nvPr/>
-      </p:nvGrpSpPr>
-      <p:grpSpPr>
-        <a:xfrm>
-          <a:off x="0" y="0"/>
-          <a:ext cx="0" cy="0"/>
-          <a:chOff x="0" y="0"/>
-          <a:chExt cx="0" cy="0"/>
-        </a:xfrm>
-      </p:grpSpPr>
-      <p:pic>
-        <p:nvPicPr>
-          <p:cNvPr id="2" name="Picture 1">
-            <a:extLst>
-              <a:ext uri="{FF2B5EF4-FFF2-40B4-BE49-F238E27FC236}">
-                <a16:creationId xmlns:a16="http://schemas.microsoft.com/office/drawing/2014/main" id="{FF4ABE8A-1041-3D50-98B5-3DCA7B1708C8}"/>
+                <a16:creationId xmlns:a16="http://schemas.microsoft.com/office/drawing/2014/main" id="{6A142C13-9A9F-29C9-3C93-574D73691818}"/>
               </a:ext>
             </a:extLst>
           </p:cNvPr>
@@ -3967,262 +5310,20 @@
         </p:blipFill>
         <p:spPr>
           <a:xfrm>
-            <a:off x="886639" y="0"/>
-            <a:ext cx="10418721" cy="6858000"/>
+            <a:off x="1944" y="1711271"/>
+            <a:ext cx="6079196" cy="4003729"/>
           </a:xfrm>
           <a:prstGeom prst="rect">
             <a:avLst/>
           </a:prstGeom>
         </p:spPr>
       </p:pic>
-    </p:spTree>
-    <p:extLst>
-      <p:ext uri="{BB962C8B-B14F-4D97-AF65-F5344CB8AC3E}">
-        <p14:creationId xmlns:p14="http://schemas.microsoft.com/office/powerpoint/2010/main" val="1326135099"/>
-      </p:ext>
-    </p:extLst>
-  </p:cSld>
-  <p:clrMapOvr>
-    <a:masterClrMapping/>
-  </p:clrMapOvr>
-</p:sld>
-</file>
-
-<file path=ppt/slides/slide2.xml><?xml version="1.0" encoding="utf-8"?>
-<p:sld xmlns:a="http://schemas.openxmlformats.org/drawingml/2006/main" xmlns:r="http://schemas.openxmlformats.org/officeDocument/2006/relationships" xmlns:p="http://schemas.openxmlformats.org/presentationml/2006/main">
-  <p:cSld>
-    <p:spTree>
-      <p:nvGrpSpPr>
-        <p:cNvPr id="1" name=""/>
-        <p:cNvGrpSpPr/>
-        <p:nvPr/>
-      </p:nvGrpSpPr>
-      <p:grpSpPr>
-        <a:xfrm>
-          <a:off x="0" y="0"/>
-          <a:ext cx="0" cy="0"/>
-          <a:chOff x="0" y="0"/>
-          <a:chExt cx="0" cy="0"/>
-        </a:xfrm>
-      </p:grpSpPr>
-      <p:sp>
-        <p:nvSpPr>
-          <p:cNvPr id="2" name="Title 1">
+      <p:pic>
+        <p:nvPicPr>
+          <p:cNvPr id="6" name="Picture 5">
             <a:extLst>
               <a:ext uri="{FF2B5EF4-FFF2-40B4-BE49-F238E27FC236}">
-                <a16:creationId xmlns:a16="http://schemas.microsoft.com/office/drawing/2014/main" id="{50EDDC44-917C-8FDE-EA0E-5BEAF8A92459}"/>
-              </a:ext>
-            </a:extLst>
-          </p:cNvPr>
-          <p:cNvSpPr>
-            <a:spLocks noGrp="1"/>
-          </p:cNvSpPr>
-          <p:nvPr>
-            <p:ph type="title"/>
-          </p:nvPr>
-        </p:nvSpPr>
-        <p:spPr/>
-        <p:txBody>
-          <a:bodyPr/>
-          <a:lstStyle/>
-          <a:p>
-            <a:r>
-              <a:rPr lang="en-US"/>
-              <a:t>Table of Contents</a:t>
-            </a:r>
-          </a:p>
-        </p:txBody>
-      </p:sp>
-      <p:sp>
-        <p:nvSpPr>
-          <p:cNvPr id="3" name="Content Placeholder 2">
-            <a:extLst>
-              <a:ext uri="{FF2B5EF4-FFF2-40B4-BE49-F238E27FC236}">
-                <a16:creationId xmlns:a16="http://schemas.microsoft.com/office/drawing/2014/main" id="{CF9FA322-40DF-F5FB-E1E9-D1731297163B}"/>
-              </a:ext>
-            </a:extLst>
-          </p:cNvPr>
-          <p:cNvSpPr>
-            <a:spLocks noGrp="1"/>
-          </p:cNvSpPr>
-          <p:nvPr>
-            <p:ph idx="1"/>
-          </p:nvPr>
-        </p:nvSpPr>
-        <p:spPr/>
-        <p:txBody>
-          <a:bodyPr vert="horz" lIns="91440" tIns="45720" rIns="91440" bIns="45720" rtlCol="0" anchor="t">
-            <a:normAutofit/>
-          </a:bodyPr>
-          <a:lstStyle/>
-          <a:p>
-            <a:r>
-              <a:rPr lang="en-US" dirty="0">
-                <a:hlinkClick r:id="rId2" action="ppaction://hlinksldjump"/>
-              </a:rPr>
-              <a:t>Pump Heat middle valve open</a:t>
-            </a:r>
-            <a:endParaRPr lang="en-US" dirty="0"/>
-          </a:p>
-          <a:p>
-            <a:r>
-              <a:rPr lang="en-US" dirty="0">
-                <a:hlinkClick r:id="rId3" action="ppaction://hlinksldjump"/>
-              </a:rPr>
-              <a:t>Pump Heat middle valve closed</a:t>
-            </a:r>
-            <a:endParaRPr lang="en-US" dirty="0"/>
-          </a:p>
-          <a:p>
-            <a:r>
-              <a:rPr lang="en-US" dirty="0">
-                <a:hlinkClick r:id="rId4" action="ppaction://hlinksldjump"/>
-              </a:rPr>
-              <a:t>Rod Heat middle valve closed</a:t>
-            </a:r>
-            <a:endParaRPr lang="en-US" dirty="0"/>
-          </a:p>
-        </p:txBody>
-      </p:sp>
-    </p:spTree>
-    <p:extLst>
-      <p:ext uri="{BB962C8B-B14F-4D97-AF65-F5344CB8AC3E}">
-        <p14:creationId xmlns:p14="http://schemas.microsoft.com/office/powerpoint/2010/main" val="3894846975"/>
-      </p:ext>
-    </p:extLst>
-  </p:cSld>
-  <p:clrMapOvr>
-    <a:masterClrMapping/>
-  </p:clrMapOvr>
-</p:sld>
-</file>
-
-<file path=ppt/slides/slide20.xml><?xml version="1.0" encoding="utf-8"?>
-<p:sld xmlns:a="http://schemas.openxmlformats.org/drawingml/2006/main" xmlns:r="http://schemas.openxmlformats.org/officeDocument/2006/relationships" xmlns:p="http://schemas.openxmlformats.org/presentationml/2006/main">
-  <p:cSld>
-    <p:spTree>
-      <p:nvGrpSpPr>
-        <p:cNvPr id="1" name="">
-          <a:extLst>
-            <a:ext uri="{FF2B5EF4-FFF2-40B4-BE49-F238E27FC236}">
-              <a16:creationId xmlns:a16="http://schemas.microsoft.com/office/drawing/2014/main" id="{A23F57CC-E74B-1E39-8C14-E474FB351070}"/>
-            </a:ext>
-          </a:extLst>
-        </p:cNvPr>
-        <p:cNvGrpSpPr/>
-        <p:nvPr/>
-      </p:nvGrpSpPr>
-      <p:grpSpPr>
-        <a:xfrm>
-          <a:off x="0" y="0"/>
-          <a:ext cx="0" cy="0"/>
-          <a:chOff x="0" y="0"/>
-          <a:chExt cx="0" cy="0"/>
-        </a:xfrm>
-      </p:grpSpPr>
-      <p:sp>
-        <p:nvSpPr>
-          <p:cNvPr id="2" name="Title 1">
-            <a:extLst>
-              <a:ext uri="{FF2B5EF4-FFF2-40B4-BE49-F238E27FC236}">
-                <a16:creationId xmlns:a16="http://schemas.microsoft.com/office/drawing/2014/main" id="{F9CA77C7-9BE9-0A5A-45F0-A6A7701D4B9F}"/>
-              </a:ext>
-            </a:extLst>
-          </p:cNvPr>
-          <p:cNvSpPr>
-            <a:spLocks noGrp="1"/>
-          </p:cNvSpPr>
-          <p:nvPr>
-            <p:ph type="ctrTitle"/>
-          </p:nvPr>
-        </p:nvSpPr>
-        <p:spPr/>
-        <p:txBody>
-          <a:bodyPr/>
-          <a:lstStyle/>
-          <a:p>
-            <a:r>
-              <a:rPr lang="en-US"/>
-              <a:t>0.5gal/min Heat Exchanger</a:t>
-            </a:r>
-          </a:p>
-        </p:txBody>
-      </p:sp>
-      <p:sp>
-        <p:nvSpPr>
-          <p:cNvPr id="3" name="Subtitle 2">
-            <a:extLst>
-              <a:ext uri="{FF2B5EF4-FFF2-40B4-BE49-F238E27FC236}">
-                <a16:creationId xmlns:a16="http://schemas.microsoft.com/office/drawing/2014/main" id="{C26F679E-E404-CB6D-993F-5EBBA17A1961}"/>
-              </a:ext>
-            </a:extLst>
-          </p:cNvPr>
-          <p:cNvSpPr>
-            <a:spLocks noGrp="1"/>
-          </p:cNvSpPr>
-          <p:nvPr>
-            <p:ph type="subTitle" idx="1"/>
-          </p:nvPr>
-        </p:nvSpPr>
-        <p:spPr/>
-        <p:txBody>
-          <a:bodyPr vert="horz" lIns="91440" tIns="45720" rIns="91440" bIns="45720" rtlCol="0" anchor="t">
-            <a:normAutofit/>
-          </a:bodyPr>
-          <a:lstStyle/>
-          <a:p>
-            <a:r>
-              <a:rPr lang="en-US" dirty="0">
-                <a:hlinkClick r:id="rId2"/>
-              </a:rPr>
-              <a:t>PDF Graph Download</a:t>
-            </a:r>
-            <a:endParaRPr lang="en-US" dirty="0"/>
-          </a:p>
-        </p:txBody>
-      </p:sp>
-    </p:spTree>
-    <p:extLst>
-      <p:ext uri="{BB962C8B-B14F-4D97-AF65-F5344CB8AC3E}">
-        <p14:creationId xmlns:p14="http://schemas.microsoft.com/office/powerpoint/2010/main" val="171582190"/>
-      </p:ext>
-    </p:extLst>
-  </p:cSld>
-  <p:clrMapOvr>
-    <a:masterClrMapping/>
-  </p:clrMapOvr>
-</p:sld>
-</file>
-
-<file path=ppt/slides/slide21.xml><?xml version="1.0" encoding="utf-8"?>
-<p:sld xmlns:a="http://schemas.openxmlformats.org/drawingml/2006/main" xmlns:r="http://schemas.openxmlformats.org/officeDocument/2006/relationships" xmlns:p="http://schemas.openxmlformats.org/presentationml/2006/main">
-  <p:cSld>
-    <p:spTree>
-      <p:nvGrpSpPr>
-        <p:cNvPr id="1" name="">
-          <a:extLst>
-            <a:ext uri="{FF2B5EF4-FFF2-40B4-BE49-F238E27FC236}">
-              <a16:creationId xmlns:a16="http://schemas.microsoft.com/office/drawing/2014/main" id="{0B6FACB3-BD86-A500-6775-F227F24898EA}"/>
-            </a:ext>
-          </a:extLst>
-        </p:cNvPr>
-        <p:cNvGrpSpPr/>
-        <p:nvPr/>
-      </p:nvGrpSpPr>
-      <p:grpSpPr>
-        <a:xfrm>
-          <a:off x="0" y="0"/>
-          <a:ext cx="0" cy="0"/>
-          <a:chOff x="0" y="0"/>
-          <a:chExt cx="0" cy="0"/>
-        </a:xfrm>
-      </p:grpSpPr>
-      <p:pic>
-        <p:nvPicPr>
-          <p:cNvPr id="2" name="Picture 1">
-            <a:extLst>
-              <a:ext uri="{FF2B5EF4-FFF2-40B4-BE49-F238E27FC236}">
-                <a16:creationId xmlns:a16="http://schemas.microsoft.com/office/drawing/2014/main" id="{AD6B1CE6-CB2C-DC82-233D-C9685D3C453A}"/>
+                <a16:creationId xmlns:a16="http://schemas.microsoft.com/office/drawing/2014/main" id="{CE81B643-8DCF-D925-6D67-43C28C7B4CDD}"/>
               </a:ext>
             </a:extLst>
           </p:cNvPr>
@@ -4232,15 +5333,15 @@
           <p:nvPr/>
         </p:nvPicPr>
         <p:blipFill>
-          <a:blip r:embed="rId2"/>
+          <a:blip r:embed="rId3"/>
           <a:stretch>
             <a:fillRect/>
           </a:stretch>
         </p:blipFill>
         <p:spPr>
           <a:xfrm>
-            <a:off x="886639" y="0"/>
-            <a:ext cx="10418721" cy="6858000"/>
+            <a:off x="6082876" y="1713814"/>
+            <a:ext cx="6107179" cy="4014100"/>
           </a:xfrm>
           <a:prstGeom prst="rect">
             <a:avLst/>
@@ -4249,10 +5350,10 @@
       </p:pic>
       <p:sp>
         <p:nvSpPr>
-          <p:cNvPr id="4" name="TextBox 3">
+          <p:cNvPr id="8" name="TextBox 7">
             <a:extLst>
               <a:ext uri="{FF2B5EF4-FFF2-40B4-BE49-F238E27FC236}">
-                <a16:creationId xmlns:a16="http://schemas.microsoft.com/office/drawing/2014/main" id="{6B71F4AD-8B4E-D5B6-5549-57C383A5A352}"/>
+                <a16:creationId xmlns:a16="http://schemas.microsoft.com/office/drawing/2014/main" id="{6C105325-15C0-D12B-6915-1C1F6EA0080A}"/>
               </a:ext>
             </a:extLst>
           </p:cNvPr>
@@ -4261,7 +5362,7 @@
         </p:nvSpPr>
         <p:spPr>
           <a:xfrm>
-            <a:off x="4201020" y="776473"/>
+            <a:off x="8217664" y="2158405"/>
             <a:ext cx="2712203" cy="369332"/>
           </a:xfrm>
           <a:prstGeom prst="rect">
@@ -4287,10 +5388,10 @@
       </p:sp>
       <p:cxnSp>
         <p:nvCxnSpPr>
-          <p:cNvPr id="5" name="Straight Arrow Connector 4">
+          <p:cNvPr id="10" name="Straight Arrow Connector 9">
             <a:extLst>
               <a:ext uri="{FF2B5EF4-FFF2-40B4-BE49-F238E27FC236}">
-                <a16:creationId xmlns:a16="http://schemas.microsoft.com/office/drawing/2014/main" id="{4BCD7A13-DBC8-40B1-2CB3-0775AD25A95E}"/>
+                <a16:creationId xmlns:a16="http://schemas.microsoft.com/office/drawing/2014/main" id="{C68FF47F-427F-914D-8F78-95C67029F7E0}"/>
               </a:ext>
             </a:extLst>
           </p:cNvPr>
@@ -4299,7 +5400,7 @@
         </p:nvCxnSpPr>
         <p:spPr>
           <a:xfrm flipH="1" flipV="1">
-            <a:off x="3622706" y="805956"/>
+            <a:off x="7639350" y="2187888"/>
             <a:ext cx="570186" cy="130066"/>
           </a:xfrm>
           <a:prstGeom prst="straightConnector1">
@@ -4324,946 +5425,12 @@
           </a:fontRef>
         </p:style>
       </p:cxnSp>
-    </p:spTree>
-    <p:extLst>
-      <p:ext uri="{BB962C8B-B14F-4D97-AF65-F5344CB8AC3E}">
-        <p14:creationId xmlns:p14="http://schemas.microsoft.com/office/powerpoint/2010/main" val="107555853"/>
-      </p:ext>
-    </p:extLst>
-  </p:cSld>
-  <p:clrMapOvr>
-    <a:masterClrMapping/>
-  </p:clrMapOvr>
-</p:sld>
-</file>
-
-<file path=ppt/slides/slide22.xml><?xml version="1.0" encoding="utf-8"?>
-<p:sld xmlns:a="http://schemas.openxmlformats.org/drawingml/2006/main" xmlns:r="http://schemas.openxmlformats.org/officeDocument/2006/relationships" xmlns:p="http://schemas.openxmlformats.org/presentationml/2006/main">
-  <p:cSld>
-    <p:spTree>
-      <p:nvGrpSpPr>
-        <p:cNvPr id="1" name="">
-          <a:extLst>
-            <a:ext uri="{FF2B5EF4-FFF2-40B4-BE49-F238E27FC236}">
-              <a16:creationId xmlns:a16="http://schemas.microsoft.com/office/drawing/2014/main" id="{1817CD71-99E1-5F49-F5E8-942EEB975EB8}"/>
-            </a:ext>
-          </a:extLst>
-        </p:cNvPr>
-        <p:cNvGrpSpPr/>
-        <p:nvPr/>
-      </p:nvGrpSpPr>
-      <p:grpSpPr>
-        <a:xfrm>
-          <a:off x="0" y="0"/>
-          <a:ext cx="0" cy="0"/>
-          <a:chOff x="0" y="0"/>
-          <a:chExt cx="0" cy="0"/>
-        </a:xfrm>
-      </p:grpSpPr>
-      <p:sp>
-        <p:nvSpPr>
-          <p:cNvPr id="2" name="Title 1">
+      <p:sp>
+        <p:nvSpPr>
+          <p:cNvPr id="12" name="TextBox 11">
             <a:extLst>
               <a:ext uri="{FF2B5EF4-FFF2-40B4-BE49-F238E27FC236}">
-                <a16:creationId xmlns:a16="http://schemas.microsoft.com/office/drawing/2014/main" id="{D0CAC38F-AABB-689B-6E52-2A898C4D93F0}"/>
-              </a:ext>
-            </a:extLst>
-          </p:cNvPr>
-          <p:cNvSpPr>
-            <a:spLocks noGrp="1"/>
-          </p:cNvSpPr>
-          <p:nvPr>
-            <p:ph type="ctrTitle"/>
-          </p:nvPr>
-        </p:nvSpPr>
-        <p:spPr/>
-        <p:txBody>
-          <a:bodyPr>
-            <a:normAutofit fontScale="90000"/>
-          </a:bodyPr>
-          <a:lstStyle/>
-          <a:p>
-            <a:r>
-              <a:rPr lang="en-US"/>
-              <a:t>4.5-hour Rod Heat Up</a:t>
-            </a:r>
-            <a:br>
-              <a:rPr lang="en-US"/>
-            </a:br>
-            <a:r>
-              <a:rPr lang="en-US"/>
-              <a:t>+</a:t>
-            </a:r>
-            <a:br>
-              <a:rPr lang="en-US"/>
-            </a:br>
-            <a:r>
-              <a:rPr lang="en-US"/>
-              <a:t>0.5gal/min Heat Exchanger</a:t>
-            </a:r>
-          </a:p>
-        </p:txBody>
-      </p:sp>
-      <p:sp>
-        <p:nvSpPr>
-          <p:cNvPr id="3" name="Subtitle 2">
-            <a:extLst>
-              <a:ext uri="{FF2B5EF4-FFF2-40B4-BE49-F238E27FC236}">
-                <a16:creationId xmlns:a16="http://schemas.microsoft.com/office/drawing/2014/main" id="{4FD7E0EA-081F-91B1-B66C-922F04256106}"/>
-              </a:ext>
-            </a:extLst>
-          </p:cNvPr>
-          <p:cNvSpPr>
-            <a:spLocks noGrp="1"/>
-          </p:cNvSpPr>
-          <p:nvPr>
-            <p:ph type="subTitle" idx="1"/>
-          </p:nvPr>
-        </p:nvSpPr>
-        <p:spPr/>
-        <p:txBody>
-          <a:bodyPr vert="horz" lIns="91440" tIns="45720" rIns="91440" bIns="45720" rtlCol="0" anchor="t">
-            <a:normAutofit/>
-          </a:bodyPr>
-          <a:lstStyle/>
-          <a:p>
-            <a:r>
-              <a:rPr lang="en-US" dirty="0">
-                <a:hlinkClick r:id="rId2"/>
-              </a:rPr>
-              <a:t>PDF Graph Download</a:t>
-            </a:r>
-            <a:endParaRPr lang="en-US" dirty="0"/>
-          </a:p>
-          <a:p>
-            <a:r>
-              <a:rPr lang="en-US" dirty="0">
-                <a:hlinkClick r:id="rId3"/>
-              </a:rPr>
-              <a:t>Raw Data File Download</a:t>
-            </a:r>
-            <a:endParaRPr lang="en-US" dirty="0"/>
-          </a:p>
-        </p:txBody>
-      </p:sp>
-    </p:spTree>
-    <p:extLst>
-      <p:ext uri="{BB962C8B-B14F-4D97-AF65-F5344CB8AC3E}">
-        <p14:creationId xmlns:p14="http://schemas.microsoft.com/office/powerpoint/2010/main" val="195303266"/>
-      </p:ext>
-    </p:extLst>
-  </p:cSld>
-  <p:clrMapOvr>
-    <a:masterClrMapping/>
-  </p:clrMapOvr>
-</p:sld>
-</file>
-
-<file path=ppt/slides/slide23.xml><?xml version="1.0" encoding="utf-8"?>
-<p:sld xmlns:a="http://schemas.openxmlformats.org/drawingml/2006/main" xmlns:r="http://schemas.openxmlformats.org/officeDocument/2006/relationships" xmlns:p="http://schemas.openxmlformats.org/presentationml/2006/main">
-  <p:cSld>
-    <p:spTree>
-      <p:nvGrpSpPr>
-        <p:cNvPr id="1" name="">
-          <a:extLst>
-            <a:ext uri="{FF2B5EF4-FFF2-40B4-BE49-F238E27FC236}">
-              <a16:creationId xmlns:a16="http://schemas.microsoft.com/office/drawing/2014/main" id="{B633FBF2-8AF2-412E-3DF9-98122E1BE60B}"/>
-            </a:ext>
-          </a:extLst>
-        </p:cNvPr>
-        <p:cNvGrpSpPr/>
-        <p:nvPr/>
-      </p:nvGrpSpPr>
-      <p:grpSpPr>
-        <a:xfrm>
-          <a:off x="0" y="0"/>
-          <a:ext cx="0" cy="0"/>
-          <a:chOff x="0" y="0"/>
-          <a:chExt cx="0" cy="0"/>
-        </a:xfrm>
-      </p:grpSpPr>
-      <p:pic>
-        <p:nvPicPr>
-          <p:cNvPr id="2" name="Picture 1">
-            <a:extLst>
-              <a:ext uri="{FF2B5EF4-FFF2-40B4-BE49-F238E27FC236}">
-                <a16:creationId xmlns:a16="http://schemas.microsoft.com/office/drawing/2014/main" id="{8610B440-8FE7-51FC-E5B9-91FE08898209}"/>
-              </a:ext>
-            </a:extLst>
-          </p:cNvPr>
-          <p:cNvPicPr>
-            <a:picLocks noChangeAspect="1"/>
-          </p:cNvPicPr>
-          <p:nvPr/>
-        </p:nvPicPr>
-        <p:blipFill>
-          <a:blip r:embed="rId2"/>
-          <a:stretch>
-            <a:fillRect/>
-          </a:stretch>
-        </p:blipFill>
-        <p:spPr>
-          <a:xfrm>
-            <a:off x="886639" y="0"/>
-            <a:ext cx="10418721" cy="6858000"/>
-          </a:xfrm>
-          <a:prstGeom prst="rect">
-            <a:avLst/>
-          </a:prstGeom>
-        </p:spPr>
-      </p:pic>
-    </p:spTree>
-    <p:extLst>
-      <p:ext uri="{BB962C8B-B14F-4D97-AF65-F5344CB8AC3E}">
-        <p14:creationId xmlns:p14="http://schemas.microsoft.com/office/powerpoint/2010/main" val="4119749817"/>
-      </p:ext>
-    </p:extLst>
-  </p:cSld>
-  <p:clrMapOvr>
-    <a:masterClrMapping/>
-  </p:clrMapOvr>
-</p:sld>
-</file>
-
-<file path=ppt/slides/slide3.xml><?xml version="1.0" encoding="utf-8"?>
-<p:sld xmlns:a="http://schemas.openxmlformats.org/drawingml/2006/main" xmlns:r="http://schemas.openxmlformats.org/officeDocument/2006/relationships" xmlns:p="http://schemas.openxmlformats.org/presentationml/2006/main">
-  <p:cSld>
-    <p:spTree>
-      <p:nvGrpSpPr>
-        <p:cNvPr id="1" name=""/>
-        <p:cNvGrpSpPr/>
-        <p:nvPr/>
-      </p:nvGrpSpPr>
-      <p:grpSpPr>
-        <a:xfrm>
-          <a:off x="0" y="0"/>
-          <a:ext cx="0" cy="0"/>
-          <a:chOff x="0" y="0"/>
-          <a:chExt cx="0" cy="0"/>
-        </a:xfrm>
-      </p:grpSpPr>
-      <p:sp>
-        <p:nvSpPr>
-          <p:cNvPr id="2" name="Title 1">
-            <a:extLst>
-              <a:ext uri="{FF2B5EF4-FFF2-40B4-BE49-F238E27FC236}">
-                <a16:creationId xmlns:a16="http://schemas.microsoft.com/office/drawing/2014/main" id="{2DABA8F2-6179-FCEC-D7A0-AFA1AEB9CDDC}"/>
-              </a:ext>
-            </a:extLst>
-          </p:cNvPr>
-          <p:cNvSpPr>
-            <a:spLocks noGrp="1"/>
-          </p:cNvSpPr>
-          <p:nvPr>
-            <p:ph type="title"/>
-          </p:nvPr>
-        </p:nvSpPr>
-        <p:spPr/>
-        <p:txBody>
-          <a:bodyPr/>
-          <a:lstStyle/>
-          <a:p>
-            <a:r>
-              <a:rPr lang="en-US"/>
-              <a:t>Pump Heat Up Data (slides 4-9)</a:t>
-            </a:r>
-          </a:p>
-        </p:txBody>
-      </p:sp>
-      <p:sp>
-        <p:nvSpPr>
-          <p:cNvPr id="3" name="Content Placeholder 2">
-            <a:extLst>
-              <a:ext uri="{FF2B5EF4-FFF2-40B4-BE49-F238E27FC236}">
-                <a16:creationId xmlns:a16="http://schemas.microsoft.com/office/drawing/2014/main" id="{1E652A67-30C0-DABA-46C8-CB79DB106F66}"/>
-              </a:ext>
-            </a:extLst>
-          </p:cNvPr>
-          <p:cNvSpPr>
-            <a:spLocks noGrp="1"/>
-          </p:cNvSpPr>
-          <p:nvPr>
-            <p:ph idx="1"/>
-          </p:nvPr>
-        </p:nvSpPr>
-        <p:spPr/>
-        <p:txBody>
-          <a:bodyPr vert="horz" lIns="91440" tIns="45720" rIns="91440" bIns="45720" rtlCol="0" anchor="t">
-            <a:normAutofit/>
-          </a:bodyPr>
-          <a:lstStyle/>
-          <a:p>
-            <a:pPr>
-              <a:buFont typeface="Calibri" panose="020B0604020202020204" pitchFamily="34" charset="0"/>
-              <a:buChar char="-"/>
-            </a:pPr>
-            <a:r>
-              <a:rPr lang="en-US" dirty="0"/>
-              <a:t>Middle valve open</a:t>
-            </a:r>
-          </a:p>
-          <a:p>
-            <a:pPr>
-              <a:buFont typeface="Calibri" panose="020B0604020202020204" pitchFamily="34" charset="0"/>
-              <a:buChar char="-"/>
-            </a:pPr>
-            <a:r>
-              <a:rPr lang="en-US" dirty="0"/>
-              <a:t>Upper valve open</a:t>
-            </a:r>
-          </a:p>
-          <a:p>
-            <a:pPr>
-              <a:buFont typeface="Calibri" panose="020B0604020202020204" pitchFamily="34" charset="0"/>
-              <a:buChar char="-"/>
-            </a:pPr>
-            <a:r>
-              <a:rPr lang="en-US" dirty="0"/>
-              <a:t>Heat exchange increments of 0.5 gal/min</a:t>
-            </a:r>
-          </a:p>
-        </p:txBody>
-      </p:sp>
-    </p:spTree>
-    <p:extLst>
-      <p:ext uri="{BB962C8B-B14F-4D97-AF65-F5344CB8AC3E}">
-        <p14:creationId xmlns:p14="http://schemas.microsoft.com/office/powerpoint/2010/main" val="1951156181"/>
-      </p:ext>
-    </p:extLst>
-  </p:cSld>
-  <p:clrMapOvr>
-    <a:masterClrMapping/>
-  </p:clrMapOvr>
-</p:sld>
-</file>
-
-<file path=ppt/slides/slide4.xml><?xml version="1.0" encoding="utf-8"?>
-<p:sld xmlns:a="http://schemas.openxmlformats.org/drawingml/2006/main" xmlns:r="http://schemas.openxmlformats.org/officeDocument/2006/relationships" xmlns:p="http://schemas.openxmlformats.org/presentationml/2006/main">
-  <p:cSld>
-    <p:spTree>
-      <p:nvGrpSpPr>
-        <p:cNvPr id="1" name=""/>
-        <p:cNvGrpSpPr/>
-        <p:nvPr/>
-      </p:nvGrpSpPr>
-      <p:grpSpPr>
-        <a:xfrm>
-          <a:off x="0" y="0"/>
-          <a:ext cx="0" cy="0"/>
-          <a:chOff x="0" y="0"/>
-          <a:chExt cx="0" cy="0"/>
-        </a:xfrm>
-      </p:grpSpPr>
-      <p:sp>
-        <p:nvSpPr>
-          <p:cNvPr id="2" name="Title 1">
-            <a:extLst>
-              <a:ext uri="{FF2B5EF4-FFF2-40B4-BE49-F238E27FC236}">
-                <a16:creationId xmlns:a16="http://schemas.microsoft.com/office/drawing/2014/main" id="{1D1E179D-8CF1-679E-FD5D-AFDE7EF74FDB}"/>
-              </a:ext>
-            </a:extLst>
-          </p:cNvPr>
-          <p:cNvSpPr>
-            <a:spLocks noGrp="1"/>
-          </p:cNvSpPr>
-          <p:nvPr>
-            <p:ph type="ctrTitle"/>
-          </p:nvPr>
-        </p:nvSpPr>
-        <p:spPr>
-          <a:xfrm>
-            <a:off x="838200" y="415577"/>
-            <a:ext cx="9144000" cy="941827"/>
-          </a:xfrm>
-        </p:spPr>
-        <p:txBody>
-          <a:bodyPr>
-            <a:normAutofit fontScale="90000"/>
-          </a:bodyPr>
-          <a:lstStyle/>
-          <a:p>
-            <a:pPr algn="l"/>
-            <a:r>
-              <a:rPr lang="en-US" dirty="0"/>
-              <a:t>Test #1: 6-hour pump heat up</a:t>
-            </a:r>
-          </a:p>
-        </p:txBody>
-      </p:sp>
-      <p:sp>
-        <p:nvSpPr>
-          <p:cNvPr id="3" name="Subtitle 2">
-            <a:extLst>
-              <a:ext uri="{FF2B5EF4-FFF2-40B4-BE49-F238E27FC236}">
-                <a16:creationId xmlns:a16="http://schemas.microsoft.com/office/drawing/2014/main" id="{A2B8E1D7-2C53-ED84-C6DA-ECBF1F349C6C}"/>
-              </a:ext>
-            </a:extLst>
-          </p:cNvPr>
-          <p:cNvSpPr>
-            <a:spLocks noGrp="1"/>
-          </p:cNvSpPr>
-          <p:nvPr>
-            <p:ph type="subTitle" idx="1"/>
-          </p:nvPr>
-        </p:nvSpPr>
-        <p:spPr>
-          <a:xfrm>
-            <a:off x="-1042219" y="5460335"/>
-            <a:ext cx="9144000" cy="1655762"/>
-          </a:xfrm>
-        </p:spPr>
-        <p:txBody>
-          <a:bodyPr vert="horz" lIns="91440" tIns="45720" rIns="91440" bIns="45720" rtlCol="0" anchor="t">
-            <a:normAutofit/>
-          </a:bodyPr>
-          <a:lstStyle/>
-          <a:p>
-            <a:r>
-              <a:rPr lang="en-US" dirty="0">
-                <a:hlinkClick r:id="rId2"/>
-              </a:rPr>
-              <a:t>PDF Graph Download</a:t>
-            </a:r>
-            <a:endParaRPr lang="en-US" dirty="0"/>
-          </a:p>
-        </p:txBody>
-      </p:sp>
-      <p:sp>
-        <p:nvSpPr>
-          <p:cNvPr id="5" name="Content Placeholder 2">
-            <a:extLst>
-              <a:ext uri="{FF2B5EF4-FFF2-40B4-BE49-F238E27FC236}">
-                <a16:creationId xmlns:a16="http://schemas.microsoft.com/office/drawing/2014/main" id="{7753F99E-0896-43BA-739A-5E4CC5A08380}"/>
-              </a:ext>
-            </a:extLst>
-          </p:cNvPr>
-          <p:cNvSpPr txBox="1">
-            <a:spLocks/>
-          </p:cNvSpPr>
-          <p:nvPr/>
-        </p:nvSpPr>
-        <p:spPr>
-          <a:xfrm>
-            <a:off x="838200" y="1825625"/>
-            <a:ext cx="4702521" cy="4351338"/>
-          </a:xfrm>
-          <a:prstGeom prst="rect">
-            <a:avLst/>
-          </a:prstGeom>
-        </p:spPr>
-        <p:txBody>
-          <a:bodyPr vert="horz" lIns="91440" tIns="45720" rIns="91440" bIns="45720" rtlCol="0" anchor="t">
-            <a:normAutofit/>
-          </a:bodyPr>
-          <a:lstStyle>
-            <a:lvl1pPr marL="0" indent="0" algn="ctr" defTabSz="914400" rtl="0" eaLnBrk="1" latinLnBrk="0" hangingPunct="1">
-              <a:lnSpc>
-                <a:spcPct val="90000"/>
-              </a:lnSpc>
-              <a:spcBef>
-                <a:spcPts val="1000"/>
-              </a:spcBef>
-              <a:buFont typeface="Arial" panose="020B0604020202020204" pitchFamily="34" charset="0"/>
-              <a:buNone/>
-              <a:defRPr sz="2400" kern="1200">
-                <a:solidFill>
-                  <a:schemeClr val="tx1"/>
-                </a:solidFill>
-                <a:latin typeface="+mn-lt"/>
-                <a:ea typeface="+mn-ea"/>
-                <a:cs typeface="+mn-cs"/>
-              </a:defRPr>
-            </a:lvl1pPr>
-            <a:lvl2pPr marL="457200" indent="0" algn="ctr" defTabSz="914400" rtl="0" eaLnBrk="1" latinLnBrk="0" hangingPunct="1">
-              <a:lnSpc>
-                <a:spcPct val="90000"/>
-              </a:lnSpc>
-              <a:spcBef>
-                <a:spcPts val="500"/>
-              </a:spcBef>
-              <a:buFont typeface="Arial" panose="020B0604020202020204" pitchFamily="34" charset="0"/>
-              <a:buNone/>
-              <a:defRPr sz="2000" kern="1200">
-                <a:solidFill>
-                  <a:schemeClr val="tx1"/>
-                </a:solidFill>
-                <a:latin typeface="+mn-lt"/>
-                <a:ea typeface="+mn-ea"/>
-                <a:cs typeface="+mn-cs"/>
-              </a:defRPr>
-            </a:lvl2pPr>
-            <a:lvl3pPr marL="914400" indent="0" algn="ctr" defTabSz="914400" rtl="0" eaLnBrk="1" latinLnBrk="0" hangingPunct="1">
-              <a:lnSpc>
-                <a:spcPct val="90000"/>
-              </a:lnSpc>
-              <a:spcBef>
-                <a:spcPts val="500"/>
-              </a:spcBef>
-              <a:buFont typeface="Arial" panose="020B0604020202020204" pitchFamily="34" charset="0"/>
-              <a:buNone/>
-              <a:defRPr sz="1800" kern="1200">
-                <a:solidFill>
-                  <a:schemeClr val="tx1"/>
-                </a:solidFill>
-                <a:latin typeface="+mn-lt"/>
-                <a:ea typeface="+mn-ea"/>
-                <a:cs typeface="+mn-cs"/>
-              </a:defRPr>
-            </a:lvl3pPr>
-            <a:lvl4pPr marL="1371600" indent="0" algn="ctr" defTabSz="914400" rtl="0" eaLnBrk="1" latinLnBrk="0" hangingPunct="1">
-              <a:lnSpc>
-                <a:spcPct val="90000"/>
-              </a:lnSpc>
-              <a:spcBef>
-                <a:spcPts val="500"/>
-              </a:spcBef>
-              <a:buFont typeface="Arial" panose="020B0604020202020204" pitchFamily="34" charset="0"/>
-              <a:buNone/>
-              <a:defRPr sz="1600" kern="1200">
-                <a:solidFill>
-                  <a:schemeClr val="tx1"/>
-                </a:solidFill>
-                <a:latin typeface="+mn-lt"/>
-                <a:ea typeface="+mn-ea"/>
-                <a:cs typeface="+mn-cs"/>
-              </a:defRPr>
-            </a:lvl4pPr>
-            <a:lvl5pPr marL="1828800" indent="0" algn="ctr" defTabSz="914400" rtl="0" eaLnBrk="1" latinLnBrk="0" hangingPunct="1">
-              <a:lnSpc>
-                <a:spcPct val="90000"/>
-              </a:lnSpc>
-              <a:spcBef>
-                <a:spcPts val="500"/>
-              </a:spcBef>
-              <a:buFont typeface="Arial" panose="020B0604020202020204" pitchFamily="34" charset="0"/>
-              <a:buNone/>
-              <a:defRPr sz="1600" kern="1200">
-                <a:solidFill>
-                  <a:schemeClr val="tx1"/>
-                </a:solidFill>
-                <a:latin typeface="+mn-lt"/>
-                <a:ea typeface="+mn-ea"/>
-                <a:cs typeface="+mn-cs"/>
-              </a:defRPr>
-            </a:lvl5pPr>
-            <a:lvl6pPr marL="2286000" indent="0" algn="ctr" defTabSz="914400" rtl="0" eaLnBrk="1" latinLnBrk="0" hangingPunct="1">
-              <a:lnSpc>
-                <a:spcPct val="90000"/>
-              </a:lnSpc>
-              <a:spcBef>
-                <a:spcPts val="500"/>
-              </a:spcBef>
-              <a:buFont typeface="Arial" panose="020B0604020202020204" pitchFamily="34" charset="0"/>
-              <a:buNone/>
-              <a:defRPr sz="1600" kern="1200">
-                <a:solidFill>
-                  <a:schemeClr val="tx1"/>
-                </a:solidFill>
-                <a:latin typeface="+mn-lt"/>
-                <a:ea typeface="+mn-ea"/>
-                <a:cs typeface="+mn-cs"/>
-              </a:defRPr>
-            </a:lvl6pPr>
-            <a:lvl7pPr marL="2743200" indent="0" algn="ctr" defTabSz="914400" rtl="0" eaLnBrk="1" latinLnBrk="0" hangingPunct="1">
-              <a:lnSpc>
-                <a:spcPct val="90000"/>
-              </a:lnSpc>
-              <a:spcBef>
-                <a:spcPts val="500"/>
-              </a:spcBef>
-              <a:buFont typeface="Arial" panose="020B0604020202020204" pitchFamily="34" charset="0"/>
-              <a:buNone/>
-              <a:defRPr sz="1600" kern="1200">
-                <a:solidFill>
-                  <a:schemeClr val="tx1"/>
-                </a:solidFill>
-                <a:latin typeface="+mn-lt"/>
-                <a:ea typeface="+mn-ea"/>
-                <a:cs typeface="+mn-cs"/>
-              </a:defRPr>
-            </a:lvl7pPr>
-            <a:lvl8pPr marL="3200400" indent="0" algn="ctr" defTabSz="914400" rtl="0" eaLnBrk="1" latinLnBrk="0" hangingPunct="1">
-              <a:lnSpc>
-                <a:spcPct val="90000"/>
-              </a:lnSpc>
-              <a:spcBef>
-                <a:spcPts val="500"/>
-              </a:spcBef>
-              <a:buFont typeface="Arial" panose="020B0604020202020204" pitchFamily="34" charset="0"/>
-              <a:buNone/>
-              <a:defRPr sz="1600" kern="1200">
-                <a:solidFill>
-                  <a:schemeClr val="tx1"/>
-                </a:solidFill>
-                <a:latin typeface="+mn-lt"/>
-                <a:ea typeface="+mn-ea"/>
-                <a:cs typeface="+mn-cs"/>
-              </a:defRPr>
-            </a:lvl8pPr>
-            <a:lvl9pPr marL="3657600" indent="0" algn="ctr" defTabSz="914400" rtl="0" eaLnBrk="1" latinLnBrk="0" hangingPunct="1">
-              <a:lnSpc>
-                <a:spcPct val="90000"/>
-              </a:lnSpc>
-              <a:spcBef>
-                <a:spcPts val="500"/>
-              </a:spcBef>
-              <a:buFont typeface="Arial" panose="020B0604020202020204" pitchFamily="34" charset="0"/>
-              <a:buNone/>
-              <a:defRPr sz="1600" kern="1200">
-                <a:solidFill>
-                  <a:schemeClr val="tx1"/>
-                </a:solidFill>
-                <a:latin typeface="+mn-lt"/>
-                <a:ea typeface="+mn-ea"/>
-                <a:cs typeface="+mn-cs"/>
-              </a:defRPr>
-            </a:lvl9pPr>
-          </a:lstStyle>
-          <a:p>
-            <a:pPr marL="342900" indent="-342900" algn="l">
-              <a:buFont typeface="Arial" panose="020B0604020202020204" pitchFamily="34" charset="0"/>
-              <a:buChar char="•"/>
-            </a:pPr>
-            <a:r>
-              <a:rPr lang="en-US" dirty="0"/>
-              <a:t>Middle valve open</a:t>
-            </a:r>
-          </a:p>
-          <a:p>
-            <a:pPr marL="342900" indent="-342900" algn="l">
-              <a:buFont typeface="Arial" panose="020B0604020202020204" pitchFamily="34" charset="0"/>
-              <a:buChar char="•"/>
-            </a:pPr>
-            <a:r>
-              <a:rPr lang="en-US" dirty="0"/>
-              <a:t>Upper valve open</a:t>
-            </a:r>
-          </a:p>
-          <a:p>
-            <a:pPr marL="342900" indent="-342900" algn="l">
-              <a:buFont typeface="Arial" panose="020B0604020202020204" pitchFamily="34" charset="0"/>
-              <a:buChar char="•"/>
-            </a:pPr>
-            <a:r>
-              <a:rPr lang="en-US" dirty="0"/>
-              <a:t>Heat exchange increments of 0.5 gal/min</a:t>
-            </a:r>
-          </a:p>
-        </p:txBody>
-      </p:sp>
-      <p:pic>
-        <p:nvPicPr>
-          <p:cNvPr id="6" name="Picture 5" descr="A graph of a temperature&#10;&#10;AI-generated content may be incorrect.">
-            <a:extLst>
-              <a:ext uri="{FF2B5EF4-FFF2-40B4-BE49-F238E27FC236}">
-                <a16:creationId xmlns:a16="http://schemas.microsoft.com/office/drawing/2014/main" id="{954AFF80-188C-AF7F-BFF2-18DB14683BCA}"/>
-              </a:ext>
-            </a:extLst>
-          </p:cNvPr>
-          <p:cNvPicPr>
-            <a:picLocks noChangeAspect="1"/>
-          </p:cNvPicPr>
-          <p:nvPr/>
-        </p:nvPicPr>
-        <p:blipFill>
-          <a:blip r:embed="rId3"/>
-          <a:stretch>
-            <a:fillRect/>
-          </a:stretch>
-        </p:blipFill>
-        <p:spPr>
-          <a:xfrm>
-            <a:off x="5776111" y="1363517"/>
-            <a:ext cx="5930019" cy="3883225"/>
-          </a:xfrm>
-          <a:prstGeom prst="rect">
-            <a:avLst/>
-          </a:prstGeom>
-        </p:spPr>
-      </p:pic>
-    </p:spTree>
-    <p:extLst>
-      <p:ext uri="{BB962C8B-B14F-4D97-AF65-F5344CB8AC3E}">
-        <p14:creationId xmlns:p14="http://schemas.microsoft.com/office/powerpoint/2010/main" val="1081941887"/>
-      </p:ext>
-    </p:extLst>
-  </p:cSld>
-  <p:clrMapOvr>
-    <a:masterClrMapping/>
-  </p:clrMapOvr>
-</p:sld>
-</file>
-
-<file path=ppt/slides/slide5.xml><?xml version="1.0" encoding="utf-8"?>
-<p:sld xmlns:a="http://schemas.openxmlformats.org/drawingml/2006/main" xmlns:r="http://schemas.openxmlformats.org/officeDocument/2006/relationships" xmlns:p="http://schemas.openxmlformats.org/presentationml/2006/main">
-  <p:cSld>
-    <p:spTree>
-      <p:nvGrpSpPr>
-        <p:cNvPr id="1" name=""/>
-        <p:cNvGrpSpPr/>
-        <p:nvPr/>
-      </p:nvGrpSpPr>
-      <p:grpSpPr>
-        <a:xfrm>
-          <a:off x="0" y="0"/>
-          <a:ext cx="0" cy="0"/>
-          <a:chOff x="0" y="0"/>
-          <a:chExt cx="0" cy="0"/>
-        </a:xfrm>
-      </p:grpSpPr>
-      <p:sp>
-        <p:nvSpPr>
-          <p:cNvPr id="3" name="Title 1">
-            <a:extLst>
-              <a:ext uri="{FF2B5EF4-FFF2-40B4-BE49-F238E27FC236}">
-                <a16:creationId xmlns:a16="http://schemas.microsoft.com/office/drawing/2014/main" id="{2C478BE5-06DD-42AD-ED22-AA822C3994B7}"/>
-              </a:ext>
-            </a:extLst>
-          </p:cNvPr>
-          <p:cNvSpPr txBox="1">
-            <a:spLocks/>
-          </p:cNvSpPr>
-          <p:nvPr/>
-        </p:nvSpPr>
-        <p:spPr>
-          <a:xfrm>
-            <a:off x="838200" y="415577"/>
-            <a:ext cx="9144000" cy="941827"/>
-          </a:xfrm>
-          <a:prstGeom prst="rect">
-            <a:avLst/>
-          </a:prstGeom>
-        </p:spPr>
-        <p:txBody>
-          <a:bodyPr>
-            <a:normAutofit fontScale="97500"/>
-          </a:bodyPr>
-          <a:lstStyle>
-            <a:lvl1pPr algn="l" defTabSz="914400" rtl="0" eaLnBrk="1" latinLnBrk="0" hangingPunct="1">
-              <a:lnSpc>
-                <a:spcPct val="90000"/>
-              </a:lnSpc>
-              <a:spcBef>
-                <a:spcPct val="0"/>
-              </a:spcBef>
-              <a:buNone/>
-              <a:defRPr sz="4400" kern="1200">
-                <a:solidFill>
-                  <a:schemeClr val="tx1"/>
-                </a:solidFill>
-                <a:latin typeface="+mj-lt"/>
-                <a:ea typeface="+mj-ea"/>
-                <a:cs typeface="+mj-cs"/>
-              </a:defRPr>
-            </a:lvl1pPr>
-          </a:lstStyle>
-          <a:p>
-            <a:r>
-              <a:rPr lang="en-US" dirty="0"/>
-              <a:t>Test #1: Additional Slide</a:t>
-            </a:r>
-          </a:p>
-        </p:txBody>
-      </p:sp>
-      <p:pic>
-        <p:nvPicPr>
-          <p:cNvPr id="4" name="Picture 3" descr="A graph of a temperature&#10;&#10;AI-generated content may be incorrect.">
-            <a:extLst>
-              <a:ext uri="{FF2B5EF4-FFF2-40B4-BE49-F238E27FC236}">
-                <a16:creationId xmlns:a16="http://schemas.microsoft.com/office/drawing/2014/main" id="{F0E7EDE5-FEE4-C0D4-EA4E-2BCB3CA63447}"/>
-              </a:ext>
-            </a:extLst>
-          </p:cNvPr>
-          <p:cNvPicPr>
-            <a:picLocks noChangeAspect="1"/>
-          </p:cNvPicPr>
-          <p:nvPr/>
-        </p:nvPicPr>
-        <p:blipFill>
-          <a:blip r:embed="rId2"/>
-          <a:stretch>
-            <a:fillRect/>
-          </a:stretch>
-        </p:blipFill>
-        <p:spPr>
-          <a:xfrm>
-            <a:off x="5884239" y="1648632"/>
-            <a:ext cx="6066141" cy="3988696"/>
-          </a:xfrm>
-          <a:prstGeom prst="rect">
-            <a:avLst/>
-          </a:prstGeom>
-        </p:spPr>
-      </p:pic>
-    </p:spTree>
-    <p:extLst>
-      <p:ext uri="{BB962C8B-B14F-4D97-AF65-F5344CB8AC3E}">
-        <p14:creationId xmlns:p14="http://schemas.microsoft.com/office/powerpoint/2010/main" val="3699018910"/>
-      </p:ext>
-    </p:extLst>
-  </p:cSld>
-  <p:clrMapOvr>
-    <a:masterClrMapping/>
-  </p:clrMapOvr>
-</p:sld>
-</file>
-
-<file path=ppt/slides/slide6.xml><?xml version="1.0" encoding="utf-8"?>
-<p:sld xmlns:a="http://schemas.openxmlformats.org/drawingml/2006/main" xmlns:r="http://schemas.openxmlformats.org/officeDocument/2006/relationships" xmlns:p="http://schemas.openxmlformats.org/presentationml/2006/main">
-  <p:cSld>
-    <p:spTree>
-      <p:nvGrpSpPr>
-        <p:cNvPr id="1" name="">
-          <a:extLst>
-            <a:ext uri="{FF2B5EF4-FFF2-40B4-BE49-F238E27FC236}">
-              <a16:creationId xmlns:a16="http://schemas.microsoft.com/office/drawing/2014/main" id="{F62DA0DD-103C-48ED-5A15-F476DE8C0204}"/>
-            </a:ext>
-          </a:extLst>
-        </p:cNvPr>
-        <p:cNvGrpSpPr/>
-        <p:nvPr/>
-      </p:nvGrpSpPr>
-      <p:grpSpPr>
-        <a:xfrm>
-          <a:off x="0" y="0"/>
-          <a:ext cx="0" cy="0"/>
-          <a:chOff x="0" y="0"/>
-          <a:chExt cx="0" cy="0"/>
-        </a:xfrm>
-      </p:grpSpPr>
-      <p:sp>
-        <p:nvSpPr>
-          <p:cNvPr id="2" name="Title 1">
-            <a:extLst>
-              <a:ext uri="{FF2B5EF4-FFF2-40B4-BE49-F238E27FC236}">
-                <a16:creationId xmlns:a16="http://schemas.microsoft.com/office/drawing/2014/main" id="{6D0A7660-1999-3DF6-3043-AA36A51BC656}"/>
-              </a:ext>
-            </a:extLst>
-          </p:cNvPr>
-          <p:cNvSpPr>
-            <a:spLocks noGrp="1"/>
-          </p:cNvSpPr>
-          <p:nvPr>
-            <p:ph type="ctrTitle"/>
-          </p:nvPr>
-        </p:nvSpPr>
-        <p:spPr/>
-        <p:txBody>
-          <a:bodyPr/>
-          <a:lstStyle/>
-          <a:p>
-            <a:r>
-              <a:rPr lang="en-US"/>
-              <a:t>0.5 gal/min  increments Heat Exchanger</a:t>
-            </a:r>
-          </a:p>
-        </p:txBody>
-      </p:sp>
-      <p:sp>
-        <p:nvSpPr>
-          <p:cNvPr id="3" name="Subtitle 2">
-            <a:extLst>
-              <a:ext uri="{FF2B5EF4-FFF2-40B4-BE49-F238E27FC236}">
-                <a16:creationId xmlns:a16="http://schemas.microsoft.com/office/drawing/2014/main" id="{28B13F3E-BE55-1365-DE2F-0A11FE9E20BF}"/>
-              </a:ext>
-            </a:extLst>
-          </p:cNvPr>
-          <p:cNvSpPr>
-            <a:spLocks noGrp="1"/>
-          </p:cNvSpPr>
-          <p:nvPr>
-            <p:ph type="subTitle" idx="1"/>
-          </p:nvPr>
-        </p:nvSpPr>
-        <p:spPr/>
-        <p:txBody>
-          <a:bodyPr vert="horz" lIns="91440" tIns="45720" rIns="91440" bIns="45720" rtlCol="0" anchor="t">
-            <a:normAutofit/>
-          </a:bodyPr>
-          <a:lstStyle/>
-          <a:p>
-            <a:r>
-              <a:rPr lang="en-US" dirty="0">
-                <a:hlinkClick r:id="rId2"/>
-              </a:rPr>
-              <a:t>PDF Graph Download</a:t>
-            </a:r>
-            <a:endParaRPr lang="en-US" dirty="0"/>
-          </a:p>
-        </p:txBody>
-      </p:sp>
-    </p:spTree>
-    <p:extLst>
-      <p:ext uri="{BB962C8B-B14F-4D97-AF65-F5344CB8AC3E}">
-        <p14:creationId xmlns:p14="http://schemas.microsoft.com/office/powerpoint/2010/main" val="4093034267"/>
-      </p:ext>
-    </p:extLst>
-  </p:cSld>
-  <p:clrMapOvr>
-    <a:masterClrMapping/>
-  </p:clrMapOvr>
-</p:sld>
-</file>
-
-<file path=ppt/slides/slide7.xml><?xml version="1.0" encoding="utf-8"?>
-<p:sld xmlns:a="http://schemas.openxmlformats.org/drawingml/2006/main" xmlns:r="http://schemas.openxmlformats.org/officeDocument/2006/relationships" xmlns:p="http://schemas.openxmlformats.org/presentationml/2006/main">
-  <p:cSld>
-    <p:spTree>
-      <p:nvGrpSpPr>
-        <p:cNvPr id="1" name="">
-          <a:extLst>
-            <a:ext uri="{FF2B5EF4-FFF2-40B4-BE49-F238E27FC236}">
-              <a16:creationId xmlns:a16="http://schemas.microsoft.com/office/drawing/2014/main" id="{A471A5F5-29E4-902F-F60A-835ABDE80628}"/>
-            </a:ext>
-          </a:extLst>
-        </p:cNvPr>
-        <p:cNvGrpSpPr/>
-        <p:nvPr/>
-      </p:nvGrpSpPr>
-      <p:grpSpPr>
-        <a:xfrm>
-          <a:off x="0" y="0"/>
-          <a:ext cx="0" cy="0"/>
-          <a:chOff x="0" y="0"/>
-          <a:chExt cx="0" cy="0"/>
-        </a:xfrm>
-      </p:grpSpPr>
-      <p:pic>
-        <p:nvPicPr>
-          <p:cNvPr id="3" name="Picture 2" descr="A graph with blue and red lines&#10;&#10;AI-generated content may be incorrect.">
-            <a:extLst>
-              <a:ext uri="{FF2B5EF4-FFF2-40B4-BE49-F238E27FC236}">
-                <a16:creationId xmlns:a16="http://schemas.microsoft.com/office/drawing/2014/main" id="{F97B299B-D0AD-D1AB-4AA1-EEC4CA2D8151}"/>
-              </a:ext>
-            </a:extLst>
-          </p:cNvPr>
-          <p:cNvPicPr>
-            <a:picLocks noChangeAspect="1"/>
-          </p:cNvPicPr>
-          <p:nvPr/>
-        </p:nvPicPr>
-        <p:blipFill>
-          <a:blip r:embed="rId2"/>
-          <a:stretch>
-            <a:fillRect/>
-          </a:stretch>
-        </p:blipFill>
-        <p:spPr>
-          <a:xfrm>
-            <a:off x="805758" y="-1"/>
-            <a:ext cx="10481633" cy="6923293"/>
-          </a:xfrm>
-          <a:prstGeom prst="rect">
-            <a:avLst/>
-          </a:prstGeom>
-        </p:spPr>
-      </p:pic>
-      <p:sp>
-        <p:nvSpPr>
-          <p:cNvPr id="4" name="TextBox 3">
-            <a:extLst>
-              <a:ext uri="{FF2B5EF4-FFF2-40B4-BE49-F238E27FC236}">
-                <a16:creationId xmlns:a16="http://schemas.microsoft.com/office/drawing/2014/main" id="{0674D836-D5E3-C8CD-39AA-A7D62102A287}"/>
+                <a16:creationId xmlns:a16="http://schemas.microsoft.com/office/drawing/2014/main" id="{9991E04B-A2BB-2D14-0B64-70E7A6C889B2}"/>
               </a:ext>
             </a:extLst>
           </p:cNvPr>
@@ -5272,8 +5439,8 @@
         </p:nvSpPr>
         <p:spPr>
           <a:xfrm>
-            <a:off x="2995812" y="613386"/>
-            <a:ext cx="3099836" cy="369332"/>
+            <a:off x="6558366" y="5835113"/>
+            <a:ext cx="5158352" cy="369332"/>
           </a:xfrm>
           <a:prstGeom prst="rect">
             <a:avLst/>
@@ -5290,57 +5457,25 @@
           <a:lstStyle/>
           <a:p>
             <a:r>
-              <a:rPr lang="en-US"/>
-              <a:t>0.511 gal/min flow rate</a:t>
-            </a:r>
-          </a:p>
-        </p:txBody>
-      </p:sp>
-      <p:cxnSp>
-        <p:nvCxnSpPr>
-          <p:cNvPr id="5" name="Straight Arrow Connector 4">
+              <a:rPr lang="en-US" dirty="0"/>
+              <a:t>PDF name- </a:t>
+            </a:r>
+            <a:r>
+              <a:rPr lang="en-US" dirty="0">
+                <a:ea typeface="+mn-lt"/>
+                <a:cs typeface="+mn-lt"/>
+              </a:rPr>
+              <a:t>RodHeat_0.5_gal_flow.vc</a:t>
+            </a:r>
+          </a:p>
+        </p:txBody>
+      </p:sp>
+      <p:sp>
+        <p:nvSpPr>
+          <p:cNvPr id="16" name="TextBox 15">
             <a:extLst>
               <a:ext uri="{FF2B5EF4-FFF2-40B4-BE49-F238E27FC236}">
-                <a16:creationId xmlns:a16="http://schemas.microsoft.com/office/drawing/2014/main" id="{D6D53E67-06D4-27DC-47BB-1EE38DC63DAD}"/>
-              </a:ext>
-            </a:extLst>
-          </p:cNvPr>
-          <p:cNvCxnSpPr/>
-          <p:nvPr/>
-        </p:nvCxnSpPr>
-        <p:spPr>
-          <a:xfrm flipH="1" flipV="1">
-            <a:off x="2659250" y="804708"/>
-            <a:ext cx="388749" cy="15497"/>
-          </a:xfrm>
-          <a:prstGeom prst="straightConnector1">
-            <a:avLst/>
-          </a:prstGeom>
-          <a:ln>
-            <a:tailEnd type="triangle"/>
-          </a:ln>
-        </p:spPr>
-        <p:style>
-          <a:lnRef idx="2">
-            <a:schemeClr val="accent1"/>
-          </a:lnRef>
-          <a:fillRef idx="0">
-            <a:schemeClr val="accent1"/>
-          </a:fillRef>
-          <a:effectRef idx="1">
-            <a:schemeClr val="accent1"/>
-          </a:effectRef>
-          <a:fontRef idx="minor">
-            <a:schemeClr val="tx1"/>
-          </a:fontRef>
-        </p:style>
-      </p:cxnSp>
-      <p:sp>
-        <p:nvSpPr>
-          <p:cNvPr id="6" name="TextBox 5">
-            <a:extLst>
-              <a:ext uri="{FF2B5EF4-FFF2-40B4-BE49-F238E27FC236}">
-                <a16:creationId xmlns:a16="http://schemas.microsoft.com/office/drawing/2014/main" id="{50B5607D-85B4-01BB-AE66-EE4DC3D857F5}"/>
+                <a16:creationId xmlns:a16="http://schemas.microsoft.com/office/drawing/2014/main" id="{E9852178-18FF-A291-F1D4-E36EDD4443C5}"/>
               </a:ext>
             </a:extLst>
           </p:cNvPr>
@@ -5349,8 +5484,8 @@
         </p:nvSpPr>
         <p:spPr>
           <a:xfrm>
-            <a:off x="4146982" y="4361798"/>
-            <a:ext cx="2477400" cy="369332"/>
+            <a:off x="468824" y="5835113"/>
+            <a:ext cx="5158352" cy="369332"/>
           </a:xfrm>
           <a:prstGeom prst="rect">
             <a:avLst/>
@@ -5367,402 +5502,23 @@
           <a:lstStyle/>
           <a:p>
             <a:r>
-              <a:rPr lang="en-US"/>
-              <a:t>1.022 gal/min flow rate</a:t>
-            </a:r>
-          </a:p>
-        </p:txBody>
-      </p:sp>
-      <p:cxnSp>
-        <p:nvCxnSpPr>
-          <p:cNvPr id="7" name="Straight Arrow Connector 6">
-            <a:extLst>
-              <a:ext uri="{FF2B5EF4-FFF2-40B4-BE49-F238E27FC236}">
-                <a16:creationId xmlns:a16="http://schemas.microsoft.com/office/drawing/2014/main" id="{4DF0B73D-9625-BBAC-F1A2-97D3DA7FF587}"/>
-              </a:ext>
-            </a:extLst>
-          </p:cNvPr>
-          <p:cNvCxnSpPr/>
-          <p:nvPr/>
-        </p:nvCxnSpPr>
-        <p:spPr>
-          <a:xfrm flipH="1">
-            <a:off x="4634212" y="4609735"/>
-            <a:ext cx="351295" cy="475281"/>
-          </a:xfrm>
-          <a:prstGeom prst="straightConnector1">
-            <a:avLst/>
-          </a:prstGeom>
-          <a:ln>
-            <a:tailEnd type="triangle"/>
-          </a:ln>
-        </p:spPr>
-        <p:style>
-          <a:lnRef idx="2">
-            <a:schemeClr val="accent1"/>
-          </a:lnRef>
-          <a:fillRef idx="0">
-            <a:schemeClr val="accent1"/>
-          </a:fillRef>
-          <a:effectRef idx="1">
-            <a:schemeClr val="accent1"/>
-          </a:effectRef>
-          <a:fontRef idx="minor">
-            <a:schemeClr val="tx1"/>
-          </a:fontRef>
-        </p:style>
-      </p:cxnSp>
-      <p:sp>
-        <p:nvSpPr>
-          <p:cNvPr id="8" name="TextBox 7">
-            <a:extLst>
-              <a:ext uri="{FF2B5EF4-FFF2-40B4-BE49-F238E27FC236}">
-                <a16:creationId xmlns:a16="http://schemas.microsoft.com/office/drawing/2014/main" id="{A73F0EA3-1A03-320A-6436-14CC5E15E5BA}"/>
-              </a:ext>
-            </a:extLst>
-          </p:cNvPr>
-          <p:cNvSpPr txBox="1"/>
-          <p:nvPr/>
-        </p:nvSpPr>
-        <p:spPr>
-          <a:xfrm>
-            <a:off x="5705160" y="4846340"/>
-            <a:ext cx="2640377" cy="369332"/>
-          </a:xfrm>
-          <a:prstGeom prst="rect">
-            <a:avLst/>
-          </a:prstGeom>
-          <a:noFill/>
-        </p:spPr>
-        <p:txBody>
-          <a:bodyPr rot="0" spcFirstLastPara="0" vertOverflow="overflow" horzOverflow="overflow" vert="horz" wrap="square" lIns="91440" tIns="45720" rIns="91440" bIns="45720" numCol="1" spcCol="0" rtlCol="0" fromWordArt="0" anchor="t" anchorCtr="0" forceAA="0" compatLnSpc="1">
-            <a:prstTxWarp prst="textNoShape">
-              <a:avLst/>
-            </a:prstTxWarp>
-            <a:spAutoFit/>
-          </a:bodyPr>
-          <a:lstStyle/>
-          <a:p>
-            <a:r>
-              <a:rPr lang="en-US"/>
-              <a:t>1.500 gal/min flow rate</a:t>
-            </a:r>
-          </a:p>
-        </p:txBody>
-      </p:sp>
-      <p:cxnSp>
-        <p:nvCxnSpPr>
-          <p:cNvPr id="9" name="Straight Arrow Connector 8">
-            <a:extLst>
-              <a:ext uri="{FF2B5EF4-FFF2-40B4-BE49-F238E27FC236}">
-                <a16:creationId xmlns:a16="http://schemas.microsoft.com/office/drawing/2014/main" id="{83335F1B-871C-EF5A-F501-6E0CDB18B329}"/>
-              </a:ext>
-            </a:extLst>
-          </p:cNvPr>
-          <p:cNvCxnSpPr/>
-          <p:nvPr/>
-        </p:nvCxnSpPr>
-        <p:spPr>
-          <a:xfrm flipH="1">
-            <a:off x="6691692" y="5113649"/>
-            <a:ext cx="247973" cy="352587"/>
-          </a:xfrm>
-          <a:prstGeom prst="straightConnector1">
-            <a:avLst/>
-          </a:prstGeom>
-          <a:ln>
-            <a:tailEnd type="triangle"/>
-          </a:ln>
-        </p:spPr>
-        <p:style>
-          <a:lnRef idx="2">
-            <a:schemeClr val="accent1"/>
-          </a:lnRef>
-          <a:fillRef idx="0">
-            <a:schemeClr val="accent1"/>
-          </a:fillRef>
-          <a:effectRef idx="1">
-            <a:schemeClr val="accent1"/>
-          </a:effectRef>
-          <a:fontRef idx="minor">
-            <a:schemeClr val="tx1"/>
-          </a:fontRef>
-        </p:style>
-      </p:cxnSp>
-      <p:sp>
-        <p:nvSpPr>
-          <p:cNvPr id="10" name="TextBox 9">
-            <a:extLst>
-              <a:ext uri="{FF2B5EF4-FFF2-40B4-BE49-F238E27FC236}">
-                <a16:creationId xmlns:a16="http://schemas.microsoft.com/office/drawing/2014/main" id="{63AF13B4-A433-8D34-B4AD-E8BC81E5D20B}"/>
-              </a:ext>
-            </a:extLst>
-          </p:cNvPr>
-          <p:cNvSpPr txBox="1"/>
-          <p:nvPr/>
-        </p:nvSpPr>
-        <p:spPr>
-          <a:xfrm>
-            <a:off x="8345407" y="4853457"/>
-            <a:ext cx="2640378" cy="369332"/>
-          </a:xfrm>
-          <a:prstGeom prst="rect">
-            <a:avLst/>
-          </a:prstGeom>
-          <a:noFill/>
-        </p:spPr>
-        <p:txBody>
-          <a:bodyPr rot="0" spcFirstLastPara="0" vertOverflow="overflow" horzOverflow="overflow" vert="horz" wrap="square" lIns="91440" tIns="45720" rIns="91440" bIns="45720" numCol="1" spcCol="0" rtlCol="0" fromWordArt="0" anchor="t" anchorCtr="0" forceAA="0" compatLnSpc="1">
-            <a:prstTxWarp prst="textNoShape">
-              <a:avLst/>
-            </a:prstTxWarp>
-            <a:spAutoFit/>
-          </a:bodyPr>
-          <a:lstStyle/>
-          <a:p>
-            <a:r>
-              <a:rPr lang="en-US"/>
-              <a:t>2.001 gal/min flow rate</a:t>
-            </a:r>
-          </a:p>
-        </p:txBody>
-      </p:sp>
-      <p:cxnSp>
-        <p:nvCxnSpPr>
-          <p:cNvPr id="11" name="Straight Arrow Connector 10">
-            <a:extLst>
-              <a:ext uri="{FF2B5EF4-FFF2-40B4-BE49-F238E27FC236}">
-                <a16:creationId xmlns:a16="http://schemas.microsoft.com/office/drawing/2014/main" id="{B648E4D1-07CB-C06E-B3C3-6655C21CDD02}"/>
-              </a:ext>
-            </a:extLst>
-          </p:cNvPr>
-          <p:cNvCxnSpPr/>
-          <p:nvPr/>
-        </p:nvCxnSpPr>
-        <p:spPr>
-          <a:xfrm flipH="1">
-            <a:off x="8608158" y="5120284"/>
-            <a:ext cx="254430" cy="359043"/>
-          </a:xfrm>
-          <a:prstGeom prst="straightConnector1">
-            <a:avLst/>
-          </a:prstGeom>
-          <a:ln>
-            <a:tailEnd type="triangle"/>
-          </a:ln>
-        </p:spPr>
-        <p:style>
-          <a:lnRef idx="2">
-            <a:schemeClr val="accent1"/>
-          </a:lnRef>
-          <a:fillRef idx="0">
-            <a:schemeClr val="accent1"/>
-          </a:fillRef>
-          <a:effectRef idx="1">
-            <a:schemeClr val="accent1"/>
-          </a:effectRef>
-          <a:fontRef idx="minor">
-            <a:schemeClr val="tx1"/>
-          </a:fontRef>
-        </p:style>
-      </p:cxnSp>
+              <a:rPr lang="en-US" dirty="0"/>
+              <a:t>PDF name- </a:t>
+            </a:r>
+            <a:r>
+              <a:rPr lang="en-US" dirty="0">
+                <a:ea typeface="+mn-lt"/>
+                <a:cs typeface="+mn-lt"/>
+              </a:rPr>
+              <a:t>RodHeat_6_hours.vc</a:t>
+            </a:r>
+          </a:p>
+        </p:txBody>
+      </p:sp>
     </p:spTree>
     <p:extLst>
       <p:ext uri="{BB962C8B-B14F-4D97-AF65-F5344CB8AC3E}">
-        <p14:creationId xmlns:p14="http://schemas.microsoft.com/office/powerpoint/2010/main" val="3879357743"/>
-      </p:ext>
-    </p:extLst>
-  </p:cSld>
-  <p:clrMapOvr>
-    <a:masterClrMapping/>
-  </p:clrMapOvr>
-</p:sld>
-</file>
-
-<file path=ppt/slides/slide8.xml><?xml version="1.0" encoding="utf-8"?>
-<p:sld xmlns:a="http://schemas.openxmlformats.org/drawingml/2006/main" xmlns:r="http://schemas.openxmlformats.org/officeDocument/2006/relationships" xmlns:p="http://schemas.openxmlformats.org/presentationml/2006/main">
-  <p:cSld>
-    <p:spTree>
-      <p:nvGrpSpPr>
-        <p:cNvPr id="1" name="">
-          <a:extLst>
-            <a:ext uri="{FF2B5EF4-FFF2-40B4-BE49-F238E27FC236}">
-              <a16:creationId xmlns:a16="http://schemas.microsoft.com/office/drawing/2014/main" id="{8977A5C6-8587-AFEC-380B-8476659A9FD7}"/>
-            </a:ext>
-          </a:extLst>
-        </p:cNvPr>
-        <p:cNvGrpSpPr/>
-        <p:nvPr/>
-      </p:nvGrpSpPr>
-      <p:grpSpPr>
-        <a:xfrm>
-          <a:off x="0" y="0"/>
-          <a:ext cx="0" cy="0"/>
-          <a:chOff x="0" y="0"/>
-          <a:chExt cx="0" cy="0"/>
-        </a:xfrm>
-      </p:grpSpPr>
-      <p:sp>
-        <p:nvSpPr>
-          <p:cNvPr id="2" name="Title 1">
-            <a:extLst>
-              <a:ext uri="{FF2B5EF4-FFF2-40B4-BE49-F238E27FC236}">
-                <a16:creationId xmlns:a16="http://schemas.microsoft.com/office/drawing/2014/main" id="{81BB1535-2F2D-8E5A-058D-973CF79FBDA4}"/>
-              </a:ext>
-            </a:extLst>
-          </p:cNvPr>
-          <p:cNvSpPr>
-            <a:spLocks noGrp="1"/>
-          </p:cNvSpPr>
-          <p:nvPr>
-            <p:ph type="ctrTitle"/>
-          </p:nvPr>
-        </p:nvSpPr>
-        <p:spPr>
-          <a:xfrm>
-            <a:off x="1465881" y="1077160"/>
-            <a:ext cx="9260237" cy="2348855"/>
-          </a:xfrm>
-        </p:spPr>
-        <p:txBody>
-          <a:bodyPr>
-            <a:normAutofit fontScale="90000"/>
-          </a:bodyPr>
-          <a:lstStyle/>
-          <a:p>
-            <a:r>
-              <a:rPr lang="en-US"/>
-              <a:t>6-hour pump heat-up</a:t>
-            </a:r>
-            <a:br>
-              <a:rPr lang="en-US"/>
-            </a:br>
-            <a:r>
-              <a:rPr lang="en-US"/>
-              <a:t>+</a:t>
-            </a:r>
-            <a:br>
-              <a:rPr lang="en-US"/>
-            </a:br>
-            <a:r>
-              <a:rPr lang="en-US"/>
-              <a:t>Heat Exchange</a:t>
-            </a:r>
-          </a:p>
-        </p:txBody>
-      </p:sp>
-      <p:sp>
-        <p:nvSpPr>
-          <p:cNvPr id="3" name="Subtitle 2">
-            <a:extLst>
-              <a:ext uri="{FF2B5EF4-FFF2-40B4-BE49-F238E27FC236}">
-                <a16:creationId xmlns:a16="http://schemas.microsoft.com/office/drawing/2014/main" id="{61FE0838-7C9C-64B8-0F13-EF2CD7961E6B}"/>
-              </a:ext>
-            </a:extLst>
-          </p:cNvPr>
-          <p:cNvSpPr>
-            <a:spLocks noGrp="1"/>
-          </p:cNvSpPr>
-          <p:nvPr>
-            <p:ph type="subTitle" idx="1"/>
-          </p:nvPr>
-        </p:nvSpPr>
-        <p:spPr/>
-        <p:txBody>
-          <a:bodyPr vert="horz" lIns="91440" tIns="45720" rIns="91440" bIns="45720" rtlCol="0" anchor="t">
-            <a:normAutofit/>
-          </a:bodyPr>
-          <a:lstStyle/>
-          <a:p>
-            <a:r>
-              <a:rPr lang="en-US" dirty="0">
-                <a:hlinkClick r:id="rId2"/>
-              </a:rPr>
-              <a:t>PDF Graph Download</a:t>
-            </a:r>
-            <a:endParaRPr lang="en-US" dirty="0"/>
-          </a:p>
-          <a:p>
-            <a:r>
-              <a:rPr lang="en-US" dirty="0">
-                <a:hlinkClick r:id="rId3"/>
-              </a:rPr>
-              <a:t>Raw Data File Download</a:t>
-            </a:r>
-            <a:endParaRPr lang="en-US" dirty="0"/>
-          </a:p>
-        </p:txBody>
-      </p:sp>
-    </p:spTree>
-    <p:extLst>
-      <p:ext uri="{BB962C8B-B14F-4D97-AF65-F5344CB8AC3E}">
-        <p14:creationId xmlns:p14="http://schemas.microsoft.com/office/powerpoint/2010/main" val="3261270646"/>
-      </p:ext>
-    </p:extLst>
-  </p:cSld>
-  <p:clrMapOvr>
-    <a:masterClrMapping/>
-  </p:clrMapOvr>
-</p:sld>
-</file>
-
-<file path=ppt/slides/slide9.xml><?xml version="1.0" encoding="utf-8"?>
-<p:sld xmlns:a="http://schemas.openxmlformats.org/drawingml/2006/main" xmlns:r="http://schemas.openxmlformats.org/officeDocument/2006/relationships" xmlns:p="http://schemas.openxmlformats.org/presentationml/2006/main">
-  <p:cSld>
-    <p:spTree>
-      <p:nvGrpSpPr>
-        <p:cNvPr id="1" name="">
-          <a:extLst>
-            <a:ext uri="{FF2B5EF4-FFF2-40B4-BE49-F238E27FC236}">
-              <a16:creationId xmlns:a16="http://schemas.microsoft.com/office/drawing/2014/main" id="{D3F57A68-7BD0-9235-D2AF-828F5164239C}"/>
-            </a:ext>
-          </a:extLst>
-        </p:cNvPr>
-        <p:cNvGrpSpPr/>
-        <p:nvPr/>
-      </p:nvGrpSpPr>
-      <p:grpSpPr>
-        <a:xfrm>
-          <a:off x="0" y="0"/>
-          <a:ext cx="0" cy="0"/>
-          <a:chOff x="0" y="0"/>
-          <a:chExt cx="0" cy="0"/>
-        </a:xfrm>
-      </p:grpSpPr>
-      <p:pic>
-        <p:nvPicPr>
-          <p:cNvPr id="2" name="Picture 1" descr="A graph of a temperature&#10;&#10;AI-generated content may be incorrect.">
-            <a:extLst>
-              <a:ext uri="{FF2B5EF4-FFF2-40B4-BE49-F238E27FC236}">
-                <a16:creationId xmlns:a16="http://schemas.microsoft.com/office/drawing/2014/main" id="{821DCB4C-FF17-EA93-9E4B-ECBA12A833C7}"/>
-              </a:ext>
-            </a:extLst>
-          </p:cNvPr>
-          <p:cNvPicPr>
-            <a:picLocks noChangeAspect="1"/>
-          </p:cNvPicPr>
-          <p:nvPr/>
-        </p:nvPicPr>
-        <p:blipFill>
-          <a:blip r:embed="rId2"/>
-          <a:stretch>
-            <a:fillRect/>
-          </a:stretch>
-        </p:blipFill>
-        <p:spPr>
-          <a:xfrm>
-            <a:off x="859621" y="0"/>
-            <a:ext cx="10472758" cy="6858000"/>
-          </a:xfrm>
-          <a:prstGeom prst="rect">
-            <a:avLst/>
-          </a:prstGeom>
-        </p:spPr>
-      </p:pic>
-    </p:spTree>
-    <p:extLst>
-      <p:ext uri="{BB962C8B-B14F-4D97-AF65-F5344CB8AC3E}">
-        <p14:creationId xmlns:p14="http://schemas.microsoft.com/office/powerpoint/2010/main" val="3594651710"/>
+        <p14:creationId xmlns:p14="http://schemas.microsoft.com/office/powerpoint/2010/main" val="1566582535"/>
       </p:ext>
     </p:extLst>
   </p:cSld>

--- a/resources/Thermal_loop_data/Thermal Loop Data Graphs.pptx
+++ b/resources/Thermal_loop_data/Thermal Loop Data Graphs.pptx
@@ -12,6 +12,8 @@
     <p:sldId id="280" r:id="rId6"/>
     <p:sldId id="281" r:id="rId7"/>
     <p:sldId id="282" r:id="rId8"/>
+    <p:sldId id="283" r:id="rId9"/>
+    <p:sldId id="284" r:id="rId10"/>
   </p:sldIdLst>
   <p:sldSz cx="12192000" cy="6858000"/>
   <p:notesSz cx="6858000" cy="9144000"/>
@@ -121,9 +123,7 @@
 <file path=ppt/revisionInfo.xml><?xml version="1.0" encoding="utf-8"?>
 <p1510:revInfo xmlns:a="http://schemas.openxmlformats.org/drawingml/2006/main" xmlns:r="http://schemas.openxmlformats.org/officeDocument/2006/relationships" xmlns:p1510="http://schemas.microsoft.com/office/powerpoint/2015/10/main">
   <p1510:revLst>
-    <p1510:client id="{1A9F580B-8D25-E87E-9F25-5CFA58A26164}" v="872" dt="2025-07-22T19:02:02.483"/>
-    <p1510:client id="{3D7E9EA9-2484-D84D-929C-E4B2F03CBF6D}" v="15" dt="2025-07-22T19:14:33.991"/>
-    <p1510:client id="{4F603E76-1197-D0B5-5191-D2D5D4848DC7}" v="617" dt="2025-07-22T20:24:25.414"/>
+    <p1510:client id="{D035C3DF-3A3B-4957-7FCF-9923BA1FF7BA}" v="128" dt="2025-07-29T15:22:14.918"/>
   </p1510:revLst>
 </p1510:revInfo>
 </file>
@@ -257,7 +257,7 @@
           <a:p>
             <a:fld id="{846CE7D5-CF57-46EF-B807-FDD0502418D4}" type="datetimeFigureOut">
               <a:rPr lang="en-US" smtClean="0"/>
-              <a:t>7/22/2025</a:t>
+              <a:t>7/29/2025</a:t>
             </a:fld>
             <a:endParaRPr lang="en-US"/>
           </a:p>
@@ -425,7 +425,7 @@
           <a:p>
             <a:fld id="{846CE7D5-CF57-46EF-B807-FDD0502418D4}" type="datetimeFigureOut">
               <a:rPr lang="en-US" smtClean="0"/>
-              <a:t>7/22/2025</a:t>
+              <a:t>7/29/2025</a:t>
             </a:fld>
             <a:endParaRPr lang="en-US"/>
           </a:p>
@@ -603,7 +603,7 @@
           <a:p>
             <a:fld id="{846CE7D5-CF57-46EF-B807-FDD0502418D4}" type="datetimeFigureOut">
               <a:rPr lang="en-US" smtClean="0"/>
-              <a:t>7/22/2025</a:t>
+              <a:t>7/29/2025</a:t>
             </a:fld>
             <a:endParaRPr lang="en-US"/>
           </a:p>
@@ -771,7 +771,7 @@
           <a:p>
             <a:fld id="{846CE7D5-CF57-46EF-B807-FDD0502418D4}" type="datetimeFigureOut">
               <a:rPr lang="en-US" smtClean="0"/>
-              <a:t>7/22/2025</a:t>
+              <a:t>7/29/2025</a:t>
             </a:fld>
             <a:endParaRPr lang="en-US"/>
           </a:p>
@@ -1016,7 +1016,7 @@
           <a:p>
             <a:fld id="{846CE7D5-CF57-46EF-B807-FDD0502418D4}" type="datetimeFigureOut">
               <a:rPr lang="en-US" smtClean="0"/>
-              <a:t>7/22/2025</a:t>
+              <a:t>7/29/2025</a:t>
             </a:fld>
             <a:endParaRPr lang="en-US"/>
           </a:p>
@@ -1245,7 +1245,7 @@
           <a:p>
             <a:fld id="{846CE7D5-CF57-46EF-B807-FDD0502418D4}" type="datetimeFigureOut">
               <a:rPr lang="en-US" smtClean="0"/>
-              <a:t>7/22/2025</a:t>
+              <a:t>7/29/2025</a:t>
             </a:fld>
             <a:endParaRPr lang="en-US"/>
           </a:p>
@@ -1609,7 +1609,7 @@
           <a:p>
             <a:fld id="{846CE7D5-CF57-46EF-B807-FDD0502418D4}" type="datetimeFigureOut">
               <a:rPr lang="en-US" smtClean="0"/>
-              <a:t>7/22/2025</a:t>
+              <a:t>7/29/2025</a:t>
             </a:fld>
             <a:endParaRPr lang="en-US"/>
           </a:p>
@@ -1726,7 +1726,7 @@
           <a:p>
             <a:fld id="{846CE7D5-CF57-46EF-B807-FDD0502418D4}" type="datetimeFigureOut">
               <a:rPr lang="en-US" smtClean="0"/>
-              <a:t>7/22/2025</a:t>
+              <a:t>7/29/2025</a:t>
             </a:fld>
             <a:endParaRPr lang="en-US"/>
           </a:p>
@@ -1821,7 +1821,7 @@
           <a:p>
             <a:fld id="{846CE7D5-CF57-46EF-B807-FDD0502418D4}" type="datetimeFigureOut">
               <a:rPr lang="en-US" smtClean="0"/>
-              <a:t>7/22/2025</a:t>
+              <a:t>7/29/2025</a:t>
             </a:fld>
             <a:endParaRPr lang="en-US"/>
           </a:p>
@@ -2096,7 +2096,7 @@
           <a:p>
             <a:fld id="{846CE7D5-CF57-46EF-B807-FDD0502418D4}" type="datetimeFigureOut">
               <a:rPr lang="en-US" smtClean="0"/>
-              <a:t>7/22/2025</a:t>
+              <a:t>7/29/2025</a:t>
             </a:fld>
             <a:endParaRPr lang="en-US"/>
           </a:p>
@@ -2351,7 +2351,7 @@
           <a:p>
             <a:fld id="{846CE7D5-CF57-46EF-B807-FDD0502418D4}" type="datetimeFigureOut">
               <a:rPr lang="en-US" smtClean="0"/>
-              <a:t>7/22/2025</a:t>
+              <a:t>7/29/2025</a:t>
             </a:fld>
             <a:endParaRPr lang="en-US"/>
           </a:p>
@@ -2562,7 +2562,7 @@
           <a:p>
             <a:fld id="{846CE7D5-CF57-46EF-B807-FDD0502418D4}" type="datetimeFigureOut">
               <a:rPr lang="en-US" smtClean="0"/>
-              <a:t>7/22/2025</a:t>
+              <a:t>7/29/2025</a:t>
             </a:fld>
             <a:endParaRPr lang="en-US"/>
           </a:p>
@@ -3070,7 +3070,15 @@
           <a:p>
             <a:r>
               <a:rPr lang="en-US" dirty="0"/>
-              <a:t>Test #1: Pump Heat up</a:t>
+              <a:t>Test #1: Pump Heat up (</a:t>
+            </a:r>
+            <a:r>
+              <a:rPr lang="en-US" dirty="0" err="1"/>
+              <a:t>vo</a:t>
+            </a:r>
+            <a:r>
+              <a:rPr lang="en-US" dirty="0"/>
+              <a:t>)</a:t>
             </a:r>
           </a:p>
         </p:txBody>
@@ -3272,7 +3280,7 @@
               <a:buChar char="-"/>
             </a:pPr>
             <a:r>
-              <a:rPr lang="en-US" sz="2800" dirty="0"/>
+              <a:rPr lang="en-US" sz="2800"/>
               <a:t>Middle valve open</a:t>
             </a:r>
           </a:p>
@@ -3282,7 +3290,7 @@
               <a:buChar char="-"/>
             </a:pPr>
             <a:r>
-              <a:rPr lang="en-US" sz="2800" dirty="0"/>
+              <a:rPr lang="en-US" sz="2800"/>
               <a:t>Upper valve open</a:t>
             </a:r>
           </a:p>
@@ -3292,12 +3300,12 @@
               <a:buChar char="-"/>
             </a:pPr>
             <a:r>
-              <a:rPr lang="en-US" sz="2800" dirty="0"/>
+              <a:rPr lang="en-US" sz="2800"/>
               <a:t>Heat exchange increments of 0.5 gal/min every 30 mins starting at hour 6</a:t>
             </a:r>
           </a:p>
           <a:p>
-            <a:endParaRPr lang="en-US" dirty="0"/>
+            <a:endParaRPr lang="en-US"/>
           </a:p>
         </p:txBody>
       </p:sp>
@@ -3363,38 +3371,38 @@
           <a:lstStyle/>
           <a:p>
             <a:r>
-              <a:rPr lang="en-US" dirty="0"/>
+              <a:rPr lang="en-US"/>
               <a:t>PDF name- </a:t>
             </a:r>
             <a:r>
-              <a:rPr lang="en-US" dirty="0" err="1">
+              <a:rPr lang="en-US" err="1">
                 <a:ea typeface="+mn-lt"/>
                 <a:cs typeface="+mn-lt"/>
               </a:rPr>
               <a:t>Full_PumpHeat</a:t>
             </a:r>
             <a:r>
-              <a:rPr lang="en-US" dirty="0">
+              <a:rPr lang="en-US">
                 <a:ea typeface="+mn-lt"/>
                 <a:cs typeface="+mn-lt"/>
               </a:rPr>
               <a:t>(</a:t>
             </a:r>
             <a:r>
-              <a:rPr lang="en-US" dirty="0" err="1">
+              <a:rPr lang="en-US" err="1">
                 <a:ea typeface="+mn-lt"/>
                 <a:cs typeface="+mn-lt"/>
               </a:rPr>
               <a:t>HeatExchange.flow.vo</a:t>
             </a:r>
             <a:r>
-              <a:rPr lang="en-US" dirty="0">
+              <a:rPr lang="en-US">
                 <a:ea typeface="+mn-lt"/>
                 <a:cs typeface="+mn-lt"/>
               </a:rPr>
               <a:t>)</a:t>
             </a:r>
-            <a:endParaRPr lang="en-US" dirty="0"/>
+            <a:endParaRPr lang="en-US"/>
           </a:p>
         </p:txBody>
       </p:sp>
@@ -3431,24 +3439,24 @@
           <a:p>
             <a:pPr algn="ctr"/>
             <a:r>
-              <a:rPr lang="en-US" dirty="0"/>
+              <a:rPr lang="en-US"/>
               <a:t>Raw Data File name</a:t>
             </a:r>
           </a:p>
           <a:p>
             <a:pPr algn="ctr"/>
             <a:r>
-              <a:rPr lang="en-US" dirty="0" err="1"/>
+              <a:rPr lang="en-US"/>
               <a:t>PumpHeat</a:t>
             </a:r>
             <a:r>
-              <a:rPr lang="en-US" dirty="0" err="1">
+              <a:rPr lang="en-US">
                 <a:ea typeface="+mn-lt"/>
                 <a:cs typeface="+mn-lt"/>
               </a:rPr>
               <a:t>_HeatExhanger.flow.vo</a:t>
             </a:r>
-            <a:endParaRPr lang="en-US" dirty="0" err="1"/>
+            <a:endParaRPr lang="en-US"/>
           </a:p>
         </p:txBody>
       </p:sp>
@@ -3570,7 +3578,7 @@
             <a:lstStyle/>
             <a:p>
               <a:r>
-                <a:rPr lang="en-US" sz="1000" dirty="0"/>
+                <a:rPr lang="en-US" sz="1000"/>
                 <a:t>0.511 gal/min flow rate</a:t>
               </a:r>
             </a:p>
@@ -3647,7 +3655,7 @@
             <a:lstStyle/>
             <a:p>
               <a:r>
-                <a:rPr lang="en-US" sz="1000" dirty="0"/>
+                <a:rPr lang="en-US" sz="1000"/>
                 <a:t>1.022 gal/min flow rate</a:t>
               </a:r>
             </a:p>
@@ -3724,7 +3732,7 @@
             <a:lstStyle/>
             <a:p>
               <a:r>
-                <a:rPr lang="en-US" sz="1000" dirty="0"/>
+                <a:rPr lang="en-US" sz="1000"/>
                 <a:t>1.500 gal/min flow rate</a:t>
               </a:r>
             </a:p>
@@ -3801,7 +3809,7 @@
             <a:lstStyle/>
             <a:p>
               <a:r>
-                <a:rPr lang="en-US" sz="1000" dirty="0"/>
+                <a:rPr lang="en-US" sz="1000"/>
                 <a:t>2.001 gal/min flow rate</a:t>
               </a:r>
             </a:p>
@@ -3893,7 +3901,7 @@
           </a:lstStyle>
           <a:p>
             <a:r>
-              <a:rPr lang="en-US" sz="6000" dirty="0"/>
+              <a:rPr lang="en-US" sz="6000"/>
               <a:t>Test #1: Additional close up data</a:t>
             </a:r>
           </a:p>
@@ -3961,11 +3969,11 @@
           <a:lstStyle/>
           <a:p>
             <a:r>
-              <a:rPr lang="en-US" dirty="0"/>
+              <a:rPr lang="en-US"/>
               <a:t>PDF name- </a:t>
             </a:r>
             <a:r>
-              <a:rPr lang="en-US" dirty="0" err="1">
+              <a:rPr lang="en-US" err="1">
                 <a:ea typeface="+mn-lt"/>
                 <a:cs typeface="+mn-lt"/>
               </a:rPr>
@@ -4006,11 +4014,11 @@
           <a:lstStyle/>
           <a:p>
             <a:r>
-              <a:rPr lang="en-US" dirty="0"/>
+              <a:rPr lang="en-US"/>
               <a:t>PDF name- </a:t>
             </a:r>
             <a:r>
-              <a:rPr lang="en-US" dirty="0">
+              <a:rPr lang="en-US">
                 <a:ea typeface="+mn-lt"/>
                 <a:cs typeface="+mn-lt"/>
               </a:rPr>
@@ -4085,7 +4093,15 @@
           <a:p>
             <a:r>
               <a:rPr lang="en-US" dirty="0"/>
-              <a:t>Test #2: Pump Heat up</a:t>
+              <a:t>Test #2: Pump Heat up (</a:t>
+            </a:r>
+            <a:r>
+              <a:rPr lang="en-US" dirty="0" err="1"/>
+              <a:t>vc</a:t>
+            </a:r>
+            <a:r>
+              <a:rPr lang="en-US" dirty="0"/>
+              <a:t>)</a:t>
             </a:r>
           </a:p>
         </p:txBody>
@@ -4287,10 +4303,10 @@
               <a:buChar char="-"/>
             </a:pPr>
             <a:r>
-              <a:rPr lang="en-US" sz="2800" dirty="0"/>
+              <a:rPr lang="en-US" sz="2800"/>
               <a:t>Middle valve closed</a:t>
             </a:r>
-            <a:endParaRPr lang="en-US" dirty="0"/>
+            <a:endParaRPr lang="en-US"/>
           </a:p>
           <a:p>
             <a:pPr marL="457200" indent="-457200">
@@ -4298,7 +4314,7 @@
               <a:buChar char="-"/>
             </a:pPr>
             <a:r>
-              <a:rPr lang="en-US" sz="2800" dirty="0"/>
+              <a:rPr lang="en-US" sz="2800"/>
               <a:t>Upper valve open</a:t>
             </a:r>
           </a:p>
@@ -4308,13 +4324,13 @@
               <a:buChar char="-"/>
             </a:pPr>
             <a:r>
-              <a:rPr lang="en-US" sz="2800" dirty="0"/>
+              <a:rPr lang="en-US" sz="2800"/>
               <a:t>Heat exchanger 0.5 gal/min flow rate at 6 hours</a:t>
             </a:r>
-            <a:endParaRPr lang="en-US" dirty="0"/>
-          </a:p>
-          <a:p>
-            <a:endParaRPr lang="en-US" dirty="0"/>
+            <a:endParaRPr lang="en-US"/>
+          </a:p>
+          <a:p>
+            <a:endParaRPr lang="en-US"/>
           </a:p>
         </p:txBody>
       </p:sp>
@@ -4380,24 +4396,24 @@
           <a:lstStyle/>
           <a:p>
             <a:r>
-              <a:rPr lang="en-US" dirty="0"/>
+              <a:rPr lang="en-US"/>
               <a:t>PDF name- </a:t>
             </a:r>
             <a:r>
-              <a:rPr lang="en-US" dirty="0" err="1">
+              <a:rPr lang="en-US" err="1">
                 <a:ea typeface="+mn-lt"/>
                 <a:cs typeface="+mn-lt"/>
               </a:rPr>
               <a:t>Full_PumpHeat</a:t>
             </a:r>
             <a:r>
-              <a:rPr lang="en-US" dirty="0">
+              <a:rPr lang="en-US">
                 <a:ea typeface="+mn-lt"/>
                 <a:cs typeface="+mn-lt"/>
               </a:rPr>
               <a:t>(HeatExchange.0.5flow.vc)</a:t>
             </a:r>
-            <a:endParaRPr lang="en-US" dirty="0" err="1">
+            <a:endParaRPr lang="en-US" err="1">
               <a:ea typeface="+mn-lt"/>
               <a:cs typeface="+mn-lt"/>
             </a:endParaRPr>
@@ -4445,9 +4461,9 @@
                 <a:ea typeface="+mn-lt"/>
                 <a:cs typeface="+mn-lt"/>
               </a:rPr>
-              <a:t>PumpHeat_HeatExchanger.0.5flow.vc.</a:t>
-            </a:r>
-            <a:endParaRPr lang="en-US"/>
+              <a:t>PumpHeat_HeatExchanger.0.5flow.vc</a:t>
+            </a:r>
+            <a:endParaRPr lang="en-US" dirty="0"/>
           </a:p>
         </p:txBody>
       </p:sp>
@@ -4533,7 +4549,7 @@
           </a:lstStyle>
           <a:p>
             <a:r>
-              <a:rPr lang="en-US" sz="6000" dirty="0"/>
+              <a:rPr lang="en-US" sz="6000"/>
               <a:t>Test #2: Additional close up data</a:t>
             </a:r>
           </a:p>
@@ -4631,7 +4647,7 @@
           <a:lstStyle/>
           <a:p>
             <a:r>
-              <a:rPr lang="en-US" dirty="0"/>
+              <a:rPr lang="en-US"/>
               <a:t>0.511 gal/min flow rate</a:t>
             </a:r>
           </a:p>
@@ -4708,17 +4724,17 @@
           <a:lstStyle/>
           <a:p>
             <a:r>
-              <a:rPr lang="en-US" dirty="0"/>
+              <a:rPr lang="en-US"/>
               <a:t>PDF name- </a:t>
             </a:r>
             <a:r>
-              <a:rPr lang="en-US" dirty="0">
+              <a:rPr lang="en-US">
                 <a:ea typeface="+mn-lt"/>
                 <a:cs typeface="+mn-lt"/>
               </a:rPr>
               <a:t>PumpHeat_up_6_hours.vc</a:t>
             </a:r>
-            <a:endParaRPr lang="en-US" dirty="0"/>
+            <a:endParaRPr lang="en-US"/>
           </a:p>
         </p:txBody>
       </p:sp>
@@ -4754,17 +4770,17 @@
           <a:lstStyle/>
           <a:p>
             <a:r>
-              <a:rPr lang="en-US" dirty="0"/>
+              <a:rPr lang="en-US"/>
               <a:t>PDF name- PumpHeat</a:t>
             </a:r>
             <a:r>
-              <a:rPr lang="en-US" dirty="0">
+              <a:rPr lang="en-US">
                 <a:ea typeface="+mn-lt"/>
                 <a:cs typeface="+mn-lt"/>
               </a:rPr>
               <a:t>_HeatExchange_0.5gal._flow.vc</a:t>
             </a:r>
-            <a:endParaRPr lang="en-US" dirty="0"/>
+            <a:endParaRPr lang="en-US"/>
           </a:p>
         </p:txBody>
       </p:sp>
@@ -4834,7 +4850,15 @@
           <a:p>
             <a:r>
               <a:rPr lang="en-US" dirty="0"/>
-              <a:t>Test #3: Rod Heat up</a:t>
+              <a:t>Test #3: Rod Heat up (</a:t>
+            </a:r>
+            <a:r>
+              <a:rPr lang="en-US" dirty="0" err="1"/>
+              <a:t>vc</a:t>
+            </a:r>
+            <a:r>
+              <a:rPr lang="en-US" dirty="0"/>
+              <a:t>)</a:t>
             </a:r>
           </a:p>
         </p:txBody>
@@ -5047,7 +5071,7 @@
               <a:buChar char="-"/>
             </a:pPr>
             <a:r>
-              <a:rPr lang="en-US" sz="2800" dirty="0"/>
+              <a:rPr lang="en-US" sz="2800"/>
               <a:t>Upper Valve open</a:t>
             </a:r>
           </a:p>
@@ -5063,7 +5087,7 @@
             <a:endParaRPr lang="en-US"/>
           </a:p>
           <a:p>
-            <a:endParaRPr lang="en-US" dirty="0"/>
+            <a:endParaRPr lang="en-US"/>
           </a:p>
         </p:txBody>
       </p:sp>
@@ -5129,24 +5153,24 @@
           <a:lstStyle/>
           <a:p>
             <a:r>
-              <a:rPr lang="en-US" dirty="0"/>
+              <a:rPr lang="en-US"/>
               <a:t>PDF name- </a:t>
             </a:r>
             <a:r>
-              <a:rPr lang="en-US" dirty="0" err="1">
+              <a:rPr lang="en-US" err="1">
                 <a:ea typeface="+mn-lt"/>
                 <a:cs typeface="+mn-lt"/>
               </a:rPr>
               <a:t>Full_RodHeat</a:t>
             </a:r>
             <a:r>
-              <a:rPr lang="en-US" dirty="0">
+              <a:rPr lang="en-US">
                 <a:ea typeface="+mn-lt"/>
                 <a:cs typeface="+mn-lt"/>
               </a:rPr>
               <a:t>(HeatExchange.flow.vc)</a:t>
             </a:r>
-            <a:endParaRPr lang="en-US" dirty="0"/>
+            <a:endParaRPr lang="en-US"/>
           </a:p>
         </p:txBody>
       </p:sp>
@@ -5183,20 +5207,20 @@
           <a:p>
             <a:pPr algn="ctr"/>
             <a:r>
-              <a:rPr lang="en-US" dirty="0"/>
+              <a:rPr lang="en-US"/>
               <a:t>Raw Data File name</a:t>
             </a:r>
           </a:p>
           <a:p>
             <a:pPr algn="ctr"/>
             <a:r>
-              <a:rPr lang="en-US" dirty="0" err="1">
+              <a:rPr lang="en-US">
                 <a:ea typeface="+mn-lt"/>
                 <a:cs typeface="+mn-lt"/>
               </a:rPr>
               <a:t>RodHeat_NewData</a:t>
             </a:r>
-            <a:endParaRPr lang="en-US" dirty="0" err="1"/>
+            <a:endParaRPr lang="en-US"/>
           </a:p>
         </p:txBody>
       </p:sp>
@@ -5282,7 +5306,7 @@
           </a:lstStyle>
           <a:p>
             <a:r>
-              <a:rPr lang="en-US" sz="6000" dirty="0"/>
+              <a:rPr lang="en-US" sz="6000"/>
               <a:t>Test #3: Additional close up data</a:t>
             </a:r>
           </a:p>
@@ -5380,7 +5404,7 @@
           <a:lstStyle/>
           <a:p>
             <a:r>
-              <a:rPr lang="en-US" dirty="0"/>
+              <a:rPr lang="en-US"/>
               <a:t>0.511 gal/min flow rate</a:t>
             </a:r>
           </a:p>
@@ -5457,11 +5481,11 @@
           <a:lstStyle/>
           <a:p>
             <a:r>
-              <a:rPr lang="en-US" dirty="0"/>
+              <a:rPr lang="en-US"/>
               <a:t>PDF name- </a:t>
             </a:r>
             <a:r>
-              <a:rPr lang="en-US" dirty="0">
+              <a:rPr lang="en-US">
                 <a:ea typeface="+mn-lt"/>
                 <a:cs typeface="+mn-lt"/>
               </a:rPr>
@@ -5502,23 +5526,790 @@
           <a:lstStyle/>
           <a:p>
             <a:r>
+              <a:rPr lang="en-US"/>
+              <a:t>PDF name- </a:t>
+            </a:r>
+            <a:r>
+              <a:rPr lang="en-US">
+                <a:ea typeface="+mn-lt"/>
+                <a:cs typeface="+mn-lt"/>
+              </a:rPr>
+              <a:t>RodHeat_6_hours.vc</a:t>
+            </a:r>
+          </a:p>
+        </p:txBody>
+      </p:sp>
+    </p:spTree>
+    <p:extLst>
+      <p:ext uri="{BB962C8B-B14F-4D97-AF65-F5344CB8AC3E}">
+        <p14:creationId xmlns:p14="http://schemas.microsoft.com/office/powerpoint/2010/main" val="1566582535"/>
+      </p:ext>
+    </p:extLst>
+  </p:cSld>
+  <p:clrMapOvr>
+    <a:masterClrMapping/>
+  </p:clrMapOvr>
+</p:sld>
+</file>
+
+<file path=ppt/slides/slide8.xml><?xml version="1.0" encoding="utf-8"?>
+<p:sld xmlns:a="http://schemas.openxmlformats.org/drawingml/2006/main" xmlns:r="http://schemas.openxmlformats.org/officeDocument/2006/relationships" xmlns:p="http://schemas.openxmlformats.org/presentationml/2006/main">
+  <p:cSld>
+    <p:spTree>
+      <p:nvGrpSpPr>
+        <p:cNvPr id="1" name="">
+          <a:extLst>
+            <a:ext uri="{FF2B5EF4-FFF2-40B4-BE49-F238E27FC236}">
+              <a16:creationId xmlns:a16="http://schemas.microsoft.com/office/drawing/2014/main" id="{574CCAD0-DD48-EA10-A74F-9273B737BC2A}"/>
+            </a:ext>
+          </a:extLst>
+        </p:cNvPr>
+        <p:cNvGrpSpPr/>
+        <p:nvPr/>
+      </p:nvGrpSpPr>
+      <p:grpSpPr>
+        <a:xfrm>
+          <a:off x="0" y="0"/>
+          <a:ext cx="0" cy="0"/>
+          <a:chOff x="0" y="0"/>
+          <a:chExt cx="0" cy="0"/>
+        </a:xfrm>
+      </p:grpSpPr>
+      <p:sp>
+        <p:nvSpPr>
+          <p:cNvPr id="2" name="Title 1">
+            <a:extLst>
+              <a:ext uri="{FF2B5EF4-FFF2-40B4-BE49-F238E27FC236}">
+                <a16:creationId xmlns:a16="http://schemas.microsoft.com/office/drawing/2014/main" id="{9600404D-2BD9-AC73-2F17-6432F4893DA1}"/>
+              </a:ext>
+            </a:extLst>
+          </p:cNvPr>
+          <p:cNvSpPr>
+            <a:spLocks noGrp="1"/>
+          </p:cNvSpPr>
+          <p:nvPr>
+            <p:ph type="ctrTitle"/>
+          </p:nvPr>
+        </p:nvSpPr>
+        <p:spPr>
+          <a:xfrm>
+            <a:off x="-162526" y="174073"/>
+            <a:ext cx="12155424" cy="985520"/>
+          </a:xfrm>
+        </p:spPr>
+        <p:txBody>
+          <a:bodyPr>
+            <a:normAutofit/>
+          </a:bodyPr>
+          <a:lstStyle/>
+          <a:p>
+            <a:r>
+              <a:rPr lang="en-US" dirty="0"/>
+              <a:t>Test #4: Rod Heat up (</a:t>
+            </a:r>
+            <a:r>
+              <a:rPr lang="en-US" dirty="0" err="1"/>
+              <a:t>vo</a:t>
+            </a:r>
+            <a:r>
+              <a:rPr lang="en-US" dirty="0"/>
+              <a:t>)</a:t>
+            </a:r>
+          </a:p>
+        </p:txBody>
+      </p:sp>
+      <p:sp>
+        <p:nvSpPr>
+          <p:cNvPr id="5" name="Content Placeholder 2">
+            <a:extLst>
+              <a:ext uri="{FF2B5EF4-FFF2-40B4-BE49-F238E27FC236}">
+                <a16:creationId xmlns:a16="http://schemas.microsoft.com/office/drawing/2014/main" id="{AAC7E8F4-D653-7725-CAF0-320A956706D7}"/>
+              </a:ext>
+            </a:extLst>
+          </p:cNvPr>
+          <p:cNvSpPr txBox="1">
+            <a:spLocks/>
+          </p:cNvSpPr>
+          <p:nvPr/>
+        </p:nvSpPr>
+        <p:spPr>
+          <a:xfrm>
+            <a:off x="-122798" y="2100565"/>
+            <a:ext cx="6041136" cy="3790506"/>
+          </a:xfrm>
+          <a:prstGeom prst="rect">
+            <a:avLst/>
+          </a:prstGeom>
+        </p:spPr>
+        <p:txBody>
+          <a:bodyPr vert="horz" lIns="91440" tIns="45720" rIns="91440" bIns="45720" rtlCol="0" anchor="t">
+            <a:normAutofit/>
+          </a:bodyPr>
+          <a:lstStyle>
+            <a:lvl1pPr marL="0" indent="0" algn="ctr" defTabSz="914400" rtl="0" eaLnBrk="1" latinLnBrk="0" hangingPunct="1">
+              <a:lnSpc>
+                <a:spcPct val="90000"/>
+              </a:lnSpc>
+              <a:spcBef>
+                <a:spcPts val="1000"/>
+              </a:spcBef>
+              <a:buFont typeface="Arial" panose="020B0604020202020204" pitchFamily="34" charset="0"/>
+              <a:buNone/>
+              <a:defRPr sz="2400" kern="1200">
+                <a:solidFill>
+                  <a:schemeClr val="tx1"/>
+                </a:solidFill>
+                <a:latin typeface="+mn-lt"/>
+                <a:ea typeface="+mn-ea"/>
+                <a:cs typeface="+mn-cs"/>
+              </a:defRPr>
+            </a:lvl1pPr>
+            <a:lvl2pPr marL="457200" indent="0" algn="ctr" defTabSz="914400" rtl="0" eaLnBrk="1" latinLnBrk="0" hangingPunct="1">
+              <a:lnSpc>
+                <a:spcPct val="90000"/>
+              </a:lnSpc>
+              <a:spcBef>
+                <a:spcPts val="500"/>
+              </a:spcBef>
+              <a:buFont typeface="Arial" panose="020B0604020202020204" pitchFamily="34" charset="0"/>
+              <a:buNone/>
+              <a:defRPr sz="2000" kern="1200">
+                <a:solidFill>
+                  <a:schemeClr val="tx1"/>
+                </a:solidFill>
+                <a:latin typeface="+mn-lt"/>
+                <a:ea typeface="+mn-ea"/>
+                <a:cs typeface="+mn-cs"/>
+              </a:defRPr>
+            </a:lvl2pPr>
+            <a:lvl3pPr marL="914400" indent="0" algn="ctr" defTabSz="914400" rtl="0" eaLnBrk="1" latinLnBrk="0" hangingPunct="1">
+              <a:lnSpc>
+                <a:spcPct val="90000"/>
+              </a:lnSpc>
+              <a:spcBef>
+                <a:spcPts val="500"/>
+              </a:spcBef>
+              <a:buFont typeface="Arial" panose="020B0604020202020204" pitchFamily="34" charset="0"/>
+              <a:buNone/>
+              <a:defRPr sz="1800" kern="1200">
+                <a:solidFill>
+                  <a:schemeClr val="tx1"/>
+                </a:solidFill>
+                <a:latin typeface="+mn-lt"/>
+                <a:ea typeface="+mn-ea"/>
+                <a:cs typeface="+mn-cs"/>
+              </a:defRPr>
+            </a:lvl3pPr>
+            <a:lvl4pPr marL="1371600" indent="0" algn="ctr" defTabSz="914400" rtl="0" eaLnBrk="1" latinLnBrk="0" hangingPunct="1">
+              <a:lnSpc>
+                <a:spcPct val="90000"/>
+              </a:lnSpc>
+              <a:spcBef>
+                <a:spcPts val="500"/>
+              </a:spcBef>
+              <a:buFont typeface="Arial" panose="020B0604020202020204" pitchFamily="34" charset="0"/>
+              <a:buNone/>
+              <a:defRPr sz="1600" kern="1200">
+                <a:solidFill>
+                  <a:schemeClr val="tx1"/>
+                </a:solidFill>
+                <a:latin typeface="+mn-lt"/>
+                <a:ea typeface="+mn-ea"/>
+                <a:cs typeface="+mn-cs"/>
+              </a:defRPr>
+            </a:lvl4pPr>
+            <a:lvl5pPr marL="1828800" indent="0" algn="ctr" defTabSz="914400" rtl="0" eaLnBrk="1" latinLnBrk="0" hangingPunct="1">
+              <a:lnSpc>
+                <a:spcPct val="90000"/>
+              </a:lnSpc>
+              <a:spcBef>
+                <a:spcPts val="500"/>
+              </a:spcBef>
+              <a:buFont typeface="Arial" panose="020B0604020202020204" pitchFamily="34" charset="0"/>
+              <a:buNone/>
+              <a:defRPr sz="1600" kern="1200">
+                <a:solidFill>
+                  <a:schemeClr val="tx1"/>
+                </a:solidFill>
+                <a:latin typeface="+mn-lt"/>
+                <a:ea typeface="+mn-ea"/>
+                <a:cs typeface="+mn-cs"/>
+              </a:defRPr>
+            </a:lvl5pPr>
+            <a:lvl6pPr marL="2286000" indent="0" algn="ctr" defTabSz="914400" rtl="0" eaLnBrk="1" latinLnBrk="0" hangingPunct="1">
+              <a:lnSpc>
+                <a:spcPct val="90000"/>
+              </a:lnSpc>
+              <a:spcBef>
+                <a:spcPts val="500"/>
+              </a:spcBef>
+              <a:buFont typeface="Arial" panose="020B0604020202020204" pitchFamily="34" charset="0"/>
+              <a:buNone/>
+              <a:defRPr sz="1600" kern="1200">
+                <a:solidFill>
+                  <a:schemeClr val="tx1"/>
+                </a:solidFill>
+                <a:latin typeface="+mn-lt"/>
+                <a:ea typeface="+mn-ea"/>
+                <a:cs typeface="+mn-cs"/>
+              </a:defRPr>
+            </a:lvl6pPr>
+            <a:lvl7pPr marL="2743200" indent="0" algn="ctr" defTabSz="914400" rtl="0" eaLnBrk="1" latinLnBrk="0" hangingPunct="1">
+              <a:lnSpc>
+                <a:spcPct val="90000"/>
+              </a:lnSpc>
+              <a:spcBef>
+                <a:spcPts val="500"/>
+              </a:spcBef>
+              <a:buFont typeface="Arial" panose="020B0604020202020204" pitchFamily="34" charset="0"/>
+              <a:buNone/>
+              <a:defRPr sz="1600" kern="1200">
+                <a:solidFill>
+                  <a:schemeClr val="tx1"/>
+                </a:solidFill>
+                <a:latin typeface="+mn-lt"/>
+                <a:ea typeface="+mn-ea"/>
+                <a:cs typeface="+mn-cs"/>
+              </a:defRPr>
+            </a:lvl7pPr>
+            <a:lvl8pPr marL="3200400" indent="0" algn="ctr" defTabSz="914400" rtl="0" eaLnBrk="1" latinLnBrk="0" hangingPunct="1">
+              <a:lnSpc>
+                <a:spcPct val="90000"/>
+              </a:lnSpc>
+              <a:spcBef>
+                <a:spcPts val="500"/>
+              </a:spcBef>
+              <a:buFont typeface="Arial" panose="020B0604020202020204" pitchFamily="34" charset="0"/>
+              <a:buNone/>
+              <a:defRPr sz="1600" kern="1200">
+                <a:solidFill>
+                  <a:schemeClr val="tx1"/>
+                </a:solidFill>
+                <a:latin typeface="+mn-lt"/>
+                <a:ea typeface="+mn-ea"/>
+                <a:cs typeface="+mn-cs"/>
+              </a:defRPr>
+            </a:lvl8pPr>
+            <a:lvl9pPr marL="3657600" indent="0" algn="ctr" defTabSz="914400" rtl="0" eaLnBrk="1" latinLnBrk="0" hangingPunct="1">
+              <a:lnSpc>
+                <a:spcPct val="90000"/>
+              </a:lnSpc>
+              <a:spcBef>
+                <a:spcPts val="500"/>
+              </a:spcBef>
+              <a:buFont typeface="Arial" panose="020B0604020202020204" pitchFamily="34" charset="0"/>
+              <a:buNone/>
+              <a:defRPr sz="1600" kern="1200">
+                <a:solidFill>
+                  <a:schemeClr val="tx1"/>
+                </a:solidFill>
+                <a:latin typeface="+mn-lt"/>
+                <a:ea typeface="+mn-ea"/>
+                <a:cs typeface="+mn-cs"/>
+              </a:defRPr>
+            </a:lvl9pPr>
+          </a:lstStyle>
+          <a:p>
+            <a:pPr marL="457200" indent="-457200">
+              <a:buFont typeface="Calibri" panose="020B0604020202020204" pitchFamily="34" charset="0"/>
+              <a:buChar char="-"/>
+            </a:pPr>
+            <a:r>
+              <a:rPr lang="en-US" sz="2800" dirty="0"/>
+              <a:t>Middle Valve open</a:t>
+            </a:r>
+            <a:endParaRPr lang="en-US" dirty="0"/>
+          </a:p>
+          <a:p>
+            <a:pPr marL="457200" indent="-457200">
+              <a:buFont typeface="Calibri" panose="020B0604020202020204" pitchFamily="34" charset="0"/>
+              <a:buChar char="-"/>
+            </a:pPr>
+            <a:r>
+              <a:rPr lang="en-US" sz="2800" dirty="0"/>
+              <a:t>Upper Valve open</a:t>
+            </a:r>
+          </a:p>
+          <a:p>
+            <a:pPr marL="457200" indent="-457200">
+              <a:buFont typeface="Calibri" panose="020B0604020202020204" pitchFamily="34" charset="0"/>
+              <a:buChar char="-"/>
+            </a:pPr>
+            <a:r>
+              <a:rPr lang="en-US" sz="2800" dirty="0"/>
+              <a:t>At 4.45 hours Pump and Rod turned off</a:t>
+            </a:r>
+          </a:p>
+          <a:p>
+            <a:endParaRPr lang="en-US"/>
+          </a:p>
+        </p:txBody>
+      </p:sp>
+      <p:sp>
+        <p:nvSpPr>
+          <p:cNvPr id="8" name="TextBox 7">
+            <a:extLst>
+              <a:ext uri="{FF2B5EF4-FFF2-40B4-BE49-F238E27FC236}">
+                <a16:creationId xmlns:a16="http://schemas.microsoft.com/office/drawing/2014/main" id="{378EB675-30A5-86B0-1B6D-99976F09F373}"/>
+              </a:ext>
+            </a:extLst>
+          </p:cNvPr>
+          <p:cNvSpPr txBox="1"/>
+          <p:nvPr/>
+        </p:nvSpPr>
+        <p:spPr>
+          <a:xfrm>
+            <a:off x="6384010" y="5550977"/>
+            <a:ext cx="5158352" cy="369332"/>
+          </a:xfrm>
+          <a:prstGeom prst="rect">
+            <a:avLst/>
+          </a:prstGeom>
+          <a:noFill/>
+        </p:spPr>
+        <p:txBody>
+          <a:bodyPr rot="0" spcFirstLastPara="0" vertOverflow="overflow" horzOverflow="overflow" vert="horz" wrap="square" lIns="91440" tIns="45720" rIns="91440" bIns="45720" numCol="1" spcCol="0" rtlCol="0" fromWordArt="0" anchor="t" anchorCtr="0" forceAA="0" compatLnSpc="1">
+            <a:prstTxWarp prst="textNoShape">
+              <a:avLst/>
+            </a:prstTxWarp>
+            <a:spAutoFit/>
+          </a:bodyPr>
+          <a:lstStyle/>
+          <a:p>
+            <a:r>
               <a:rPr lang="en-US" dirty="0"/>
               <a:t>PDF name- </a:t>
+            </a:r>
+            <a:r>
+              <a:rPr lang="en-US" dirty="0" err="1">
+                <a:ea typeface="+mn-lt"/>
+                <a:cs typeface="+mn-lt"/>
+              </a:rPr>
+              <a:t>Full_RodHeat.vo</a:t>
             </a:r>
             <a:r>
               <a:rPr lang="en-US" dirty="0">
                 <a:ea typeface="+mn-lt"/>
                 <a:cs typeface="+mn-lt"/>
               </a:rPr>
-              <a:t>RodHeat_6_hours.vc</a:t>
-            </a:r>
-          </a:p>
-        </p:txBody>
-      </p:sp>
+              <a:t>(</a:t>
+            </a:r>
+            <a:r>
+              <a:rPr lang="en-US" dirty="0" err="1">
+                <a:ea typeface="+mn-lt"/>
+                <a:cs typeface="+mn-lt"/>
+              </a:rPr>
+              <a:t>CoolDown</a:t>
+            </a:r>
+            <a:r>
+              <a:rPr lang="en-US" dirty="0">
+                <a:ea typeface="+mn-lt"/>
+                <a:cs typeface="+mn-lt"/>
+              </a:rPr>
+              <a:t>)</a:t>
+            </a:r>
+          </a:p>
+        </p:txBody>
+      </p:sp>
+      <p:sp>
+        <p:nvSpPr>
+          <p:cNvPr id="10" name="TextBox 9">
+            <a:extLst>
+              <a:ext uri="{FF2B5EF4-FFF2-40B4-BE49-F238E27FC236}">
+                <a16:creationId xmlns:a16="http://schemas.microsoft.com/office/drawing/2014/main" id="{542AD553-7C36-B2B0-2977-558E5E64FFEA}"/>
+              </a:ext>
+            </a:extLst>
+          </p:cNvPr>
+          <p:cNvSpPr txBox="1"/>
+          <p:nvPr/>
+        </p:nvSpPr>
+        <p:spPr>
+          <a:xfrm>
+            <a:off x="71033" y="4462219"/>
+            <a:ext cx="5605219" cy="646331"/>
+          </a:xfrm>
+          <a:prstGeom prst="rect">
+            <a:avLst/>
+          </a:prstGeom>
+          <a:noFill/>
+        </p:spPr>
+        <p:txBody>
+          <a:bodyPr rot="0" spcFirstLastPara="0" vertOverflow="overflow" horzOverflow="overflow" vert="horz" wrap="square" lIns="91440" tIns="45720" rIns="91440" bIns="45720" numCol="1" spcCol="0" rtlCol="0" fromWordArt="0" anchor="t" anchorCtr="0" forceAA="0" compatLnSpc="1">
+            <a:prstTxWarp prst="textNoShape">
+              <a:avLst/>
+            </a:prstTxWarp>
+            <a:spAutoFit/>
+          </a:bodyPr>
+          <a:lstStyle/>
+          <a:p>
+            <a:pPr algn="ctr"/>
+            <a:r>
+              <a:rPr lang="en-US" dirty="0"/>
+              <a:t>Raw Data File name</a:t>
+            </a:r>
+          </a:p>
+          <a:p>
+            <a:pPr algn="ctr"/>
+            <a:r>
+              <a:rPr lang="en-US" dirty="0" err="1">
+                <a:ea typeface="+mn-lt"/>
+                <a:cs typeface="+mn-lt"/>
+              </a:rPr>
+              <a:t>RodHeat_vo_cool_NewData</a:t>
+            </a:r>
+            <a:endParaRPr lang="en-US" dirty="0" err="1"/>
+          </a:p>
+        </p:txBody>
+      </p:sp>
+      <p:pic>
+        <p:nvPicPr>
+          <p:cNvPr id="3" name="Picture 2" descr="A graph of a temperature&#10;&#10;AI-generated content may be incorrect.">
+            <a:extLst>
+              <a:ext uri="{FF2B5EF4-FFF2-40B4-BE49-F238E27FC236}">
+                <a16:creationId xmlns:a16="http://schemas.microsoft.com/office/drawing/2014/main" id="{A79378CF-DF85-EA4C-F6B3-CCAB9D31CD9A}"/>
+              </a:ext>
+            </a:extLst>
+          </p:cNvPr>
+          <p:cNvPicPr>
+            <a:picLocks noChangeAspect="1"/>
+          </p:cNvPicPr>
+          <p:nvPr/>
+        </p:nvPicPr>
+        <p:blipFill>
+          <a:blip r:embed="rId2"/>
+          <a:stretch>
+            <a:fillRect/>
+          </a:stretch>
+        </p:blipFill>
+        <p:spPr>
+          <a:xfrm>
+            <a:off x="5586209" y="1157111"/>
+            <a:ext cx="6415669" cy="4238978"/>
+          </a:xfrm>
+          <a:prstGeom prst="rect">
+            <a:avLst/>
+          </a:prstGeom>
+        </p:spPr>
+      </p:pic>
     </p:spTree>
     <p:extLst>
       <p:ext uri="{BB962C8B-B14F-4D97-AF65-F5344CB8AC3E}">
-        <p14:creationId xmlns:p14="http://schemas.microsoft.com/office/powerpoint/2010/main" val="1566582535"/>
+        <p14:creationId xmlns:p14="http://schemas.microsoft.com/office/powerpoint/2010/main" val="3444211954"/>
+      </p:ext>
+    </p:extLst>
+  </p:cSld>
+  <p:clrMapOvr>
+    <a:masterClrMapping/>
+  </p:clrMapOvr>
+</p:sld>
+</file>
+
+<file path=ppt/slides/slide9.xml><?xml version="1.0" encoding="utf-8"?>
+<p:sld xmlns:a="http://schemas.openxmlformats.org/drawingml/2006/main" xmlns:r="http://schemas.openxmlformats.org/officeDocument/2006/relationships" xmlns:p="http://schemas.openxmlformats.org/presentationml/2006/main">
+  <p:cSld>
+    <p:spTree>
+      <p:nvGrpSpPr>
+        <p:cNvPr id="1" name="">
+          <a:extLst>
+            <a:ext uri="{FF2B5EF4-FFF2-40B4-BE49-F238E27FC236}">
+              <a16:creationId xmlns:a16="http://schemas.microsoft.com/office/drawing/2014/main" id="{587FD0D1-8F06-4AED-A4AA-2B192EEBE251}"/>
+            </a:ext>
+          </a:extLst>
+        </p:cNvPr>
+        <p:cNvGrpSpPr/>
+        <p:nvPr/>
+      </p:nvGrpSpPr>
+      <p:grpSpPr>
+        <a:xfrm>
+          <a:off x="0" y="0"/>
+          <a:ext cx="0" cy="0"/>
+          <a:chOff x="0" y="0"/>
+          <a:chExt cx="0" cy="0"/>
+        </a:xfrm>
+      </p:grpSpPr>
+      <p:sp>
+        <p:nvSpPr>
+          <p:cNvPr id="13" name="Title 1">
+            <a:extLst>
+              <a:ext uri="{FF2B5EF4-FFF2-40B4-BE49-F238E27FC236}">
+                <a16:creationId xmlns:a16="http://schemas.microsoft.com/office/drawing/2014/main" id="{DC265F04-9067-6C99-58F5-3A3872DF4FD4}"/>
+              </a:ext>
+            </a:extLst>
+          </p:cNvPr>
+          <p:cNvSpPr txBox="1">
+            <a:spLocks/>
+          </p:cNvSpPr>
+          <p:nvPr/>
+        </p:nvSpPr>
+        <p:spPr>
+          <a:xfrm>
+            <a:off x="768458" y="373278"/>
+            <a:ext cx="10667998" cy="831312"/>
+          </a:xfrm>
+          <a:prstGeom prst="rect">
+            <a:avLst/>
+          </a:prstGeom>
+        </p:spPr>
+        <p:txBody>
+          <a:bodyPr lIns="91440" tIns="45720" rIns="91440" bIns="45720" anchor="t"/>
+          <a:lstStyle>
+            <a:lvl1pPr algn="l" defTabSz="914400" rtl="0" eaLnBrk="1" latinLnBrk="0" hangingPunct="1">
+              <a:lnSpc>
+                <a:spcPct val="90000"/>
+              </a:lnSpc>
+              <a:spcBef>
+                <a:spcPct val="0"/>
+              </a:spcBef>
+              <a:buNone/>
+              <a:defRPr sz="4400" kern="1200">
+                <a:solidFill>
+                  <a:schemeClr val="tx1"/>
+                </a:solidFill>
+                <a:latin typeface="+mj-lt"/>
+                <a:ea typeface="+mj-ea"/>
+                <a:cs typeface="+mj-cs"/>
+              </a:defRPr>
+            </a:lvl1pPr>
+          </a:lstStyle>
+          <a:p>
+            <a:r>
+              <a:rPr lang="en-US" sz="6000" dirty="0"/>
+              <a:t>Test #4: Additional close up data</a:t>
+            </a:r>
+          </a:p>
+        </p:txBody>
+      </p:sp>
+      <p:pic>
+        <p:nvPicPr>
+          <p:cNvPr id="3" name="Picture 2">
+            <a:extLst>
+              <a:ext uri="{FF2B5EF4-FFF2-40B4-BE49-F238E27FC236}">
+                <a16:creationId xmlns:a16="http://schemas.microsoft.com/office/drawing/2014/main" id="{D64BF567-D515-DE41-873D-F556661B9056}"/>
+              </a:ext>
+            </a:extLst>
+          </p:cNvPr>
+          <p:cNvPicPr>
+            <a:picLocks noChangeAspect="1"/>
+          </p:cNvPicPr>
+          <p:nvPr/>
+        </p:nvPicPr>
+        <p:blipFill>
+          <a:blip r:embed="rId2"/>
+          <a:stretch>
+            <a:fillRect/>
+          </a:stretch>
+        </p:blipFill>
+        <p:spPr>
+          <a:xfrm>
+            <a:off x="1944" y="1711271"/>
+            <a:ext cx="6079196" cy="4003729"/>
+          </a:xfrm>
+          <a:prstGeom prst="rect">
+            <a:avLst/>
+          </a:prstGeom>
+        </p:spPr>
+      </p:pic>
+      <p:sp>
+        <p:nvSpPr>
+          <p:cNvPr id="12" name="TextBox 11">
+            <a:extLst>
+              <a:ext uri="{FF2B5EF4-FFF2-40B4-BE49-F238E27FC236}">
+                <a16:creationId xmlns:a16="http://schemas.microsoft.com/office/drawing/2014/main" id="{8003D972-46F8-50CC-BD1A-8BE5E37A2B7D}"/>
+              </a:ext>
+            </a:extLst>
+          </p:cNvPr>
+          <p:cNvSpPr txBox="1"/>
+          <p:nvPr/>
+        </p:nvSpPr>
+        <p:spPr>
+          <a:xfrm>
+            <a:off x="6558366" y="5835113"/>
+            <a:ext cx="5158352" cy="369332"/>
+          </a:xfrm>
+          <a:prstGeom prst="rect">
+            <a:avLst/>
+          </a:prstGeom>
+          <a:noFill/>
+        </p:spPr>
+        <p:txBody>
+          <a:bodyPr rot="0" spcFirstLastPara="0" vertOverflow="overflow" horzOverflow="overflow" vert="horz" wrap="square" lIns="91440" tIns="45720" rIns="91440" bIns="45720" numCol="1" spcCol="0" rtlCol="0" fromWordArt="0" anchor="t" anchorCtr="0" forceAA="0" compatLnSpc="1">
+            <a:prstTxWarp prst="textNoShape">
+              <a:avLst/>
+            </a:prstTxWarp>
+            <a:spAutoFit/>
+          </a:bodyPr>
+          <a:lstStyle/>
+          <a:p>
+            <a:r>
+              <a:rPr lang="en-US" dirty="0"/>
+              <a:t>PDF name- </a:t>
+            </a:r>
+            <a:r>
+              <a:rPr lang="en-US" dirty="0" err="1">
+                <a:ea typeface="+mn-lt"/>
+                <a:cs typeface="+mn-lt"/>
+              </a:rPr>
+              <a:t>RodHeat_CoolDown.vo</a:t>
+            </a:r>
+          </a:p>
+        </p:txBody>
+      </p:sp>
+      <p:sp>
+        <p:nvSpPr>
+          <p:cNvPr id="16" name="TextBox 15">
+            <a:extLst>
+              <a:ext uri="{FF2B5EF4-FFF2-40B4-BE49-F238E27FC236}">
+                <a16:creationId xmlns:a16="http://schemas.microsoft.com/office/drawing/2014/main" id="{287524FD-6B45-3A56-552B-AF93B706AD02}"/>
+              </a:ext>
+            </a:extLst>
+          </p:cNvPr>
+          <p:cNvSpPr txBox="1"/>
+          <p:nvPr/>
+        </p:nvSpPr>
+        <p:spPr>
+          <a:xfrm>
+            <a:off x="468824" y="5835113"/>
+            <a:ext cx="5158352" cy="369332"/>
+          </a:xfrm>
+          <a:prstGeom prst="rect">
+            <a:avLst/>
+          </a:prstGeom>
+          <a:noFill/>
+        </p:spPr>
+        <p:txBody>
+          <a:bodyPr rot="0" spcFirstLastPara="0" vertOverflow="overflow" horzOverflow="overflow" vert="horz" wrap="square" lIns="91440" tIns="45720" rIns="91440" bIns="45720" numCol="1" spcCol="0" rtlCol="0" fromWordArt="0" anchor="t" anchorCtr="0" forceAA="0" compatLnSpc="1">
+            <a:prstTxWarp prst="textNoShape">
+              <a:avLst/>
+            </a:prstTxWarp>
+            <a:spAutoFit/>
+          </a:bodyPr>
+          <a:lstStyle/>
+          <a:p>
+            <a:r>
+              <a:rPr lang="en-US" dirty="0"/>
+              <a:t>PDF name- </a:t>
+            </a:r>
+            <a:r>
+              <a:rPr lang="en-US" dirty="0" err="1">
+                <a:ea typeface="+mn-lt"/>
+                <a:cs typeface="+mn-lt"/>
+              </a:rPr>
+              <a:t>RodHeat_up.vo</a:t>
+            </a:r>
+          </a:p>
+        </p:txBody>
+      </p:sp>
+      <p:pic>
+        <p:nvPicPr>
+          <p:cNvPr id="2" name="Picture 1" descr="A graph with a line graph&#10;&#10;AI-generated content may be incorrect.">
+            <a:extLst>
+              <a:ext uri="{FF2B5EF4-FFF2-40B4-BE49-F238E27FC236}">
+                <a16:creationId xmlns:a16="http://schemas.microsoft.com/office/drawing/2014/main" id="{D86C21DB-26CE-F069-6A60-09DDB9CC361C}"/>
+              </a:ext>
+            </a:extLst>
+          </p:cNvPr>
+          <p:cNvPicPr>
+            <a:picLocks noChangeAspect="1"/>
+          </p:cNvPicPr>
+          <p:nvPr/>
+        </p:nvPicPr>
+        <p:blipFill>
+          <a:blip r:embed="rId3"/>
+          <a:stretch>
+            <a:fillRect/>
+          </a:stretch>
+        </p:blipFill>
+        <p:spPr>
+          <a:xfrm>
+            <a:off x="6082921" y="1710267"/>
+            <a:ext cx="6065714" cy="3996267"/>
+          </a:xfrm>
+          <a:prstGeom prst="rect">
+            <a:avLst/>
+          </a:prstGeom>
+        </p:spPr>
+      </p:pic>
+      <p:sp>
+        <p:nvSpPr>
+          <p:cNvPr id="8" name="TextBox 7">
+            <a:extLst>
+              <a:ext uri="{FF2B5EF4-FFF2-40B4-BE49-F238E27FC236}">
+                <a16:creationId xmlns:a16="http://schemas.microsoft.com/office/drawing/2014/main" id="{CA6CCFA7-88A3-3570-190C-7B1E40486161}"/>
+              </a:ext>
+            </a:extLst>
+          </p:cNvPr>
+          <p:cNvSpPr txBox="1"/>
+          <p:nvPr/>
+        </p:nvSpPr>
+        <p:spPr>
+          <a:xfrm>
+            <a:off x="7783042" y="2078514"/>
+            <a:ext cx="2712203" cy="369332"/>
+          </a:xfrm>
+          <a:prstGeom prst="rect">
+            <a:avLst/>
+          </a:prstGeom>
+          <a:noFill/>
+        </p:spPr>
+        <p:txBody>
+          <a:bodyPr rot="0" spcFirstLastPara="0" vertOverflow="overflow" horzOverflow="overflow" vert="horz" wrap="square" lIns="91440" tIns="45720" rIns="91440" bIns="45720" numCol="1" spcCol="0" rtlCol="0" fromWordArt="0" anchor="t" anchorCtr="0" forceAA="0" compatLnSpc="1">
+            <a:prstTxWarp prst="textNoShape">
+              <a:avLst/>
+            </a:prstTxWarp>
+            <a:spAutoFit/>
+          </a:bodyPr>
+          <a:lstStyle/>
+          <a:p>
+            <a:r>
+              <a:rPr lang="en-US" dirty="0"/>
+              <a:t>Pump and Rod turned off</a:t>
+            </a:r>
+          </a:p>
+        </p:txBody>
+      </p:sp>
+      <p:cxnSp>
+        <p:nvCxnSpPr>
+          <p:cNvPr id="10" name="Straight Arrow Connector 9">
+            <a:extLst>
+              <a:ext uri="{FF2B5EF4-FFF2-40B4-BE49-F238E27FC236}">
+                <a16:creationId xmlns:a16="http://schemas.microsoft.com/office/drawing/2014/main" id="{8F9A4FD7-0FD0-8D74-B141-73FD3FD6035D}"/>
+              </a:ext>
+            </a:extLst>
+          </p:cNvPr>
+          <p:cNvCxnSpPr/>
+          <p:nvPr/>
+        </p:nvCxnSpPr>
+        <p:spPr>
+          <a:xfrm flipH="1" flipV="1">
+            <a:off x="7146114" y="2160101"/>
+            <a:ext cx="641825" cy="84476"/>
+          </a:xfrm>
+          <a:prstGeom prst="straightConnector1">
+            <a:avLst/>
+          </a:prstGeom>
+          <a:ln>
+            <a:tailEnd type="triangle"/>
+          </a:ln>
+        </p:spPr>
+        <p:style>
+          <a:lnRef idx="2">
+            <a:schemeClr val="accent1"/>
+          </a:lnRef>
+          <a:fillRef idx="0">
+            <a:schemeClr val="accent1"/>
+          </a:fillRef>
+          <a:effectRef idx="1">
+            <a:schemeClr val="accent1"/>
+          </a:effectRef>
+          <a:fontRef idx="minor">
+            <a:schemeClr val="tx1"/>
+          </a:fontRef>
+        </p:style>
+      </p:cxnSp>
+    </p:spTree>
+    <p:extLst>
+      <p:ext uri="{BB962C8B-B14F-4D97-AF65-F5344CB8AC3E}">
+        <p14:creationId xmlns:p14="http://schemas.microsoft.com/office/powerpoint/2010/main" val="3055642964"/>
       </p:ext>
     </p:extLst>
   </p:cSld>
